--- a/docs/content/multivariate_statistics/multivariate_statistics_activity.pptx
+++ b/docs/content/multivariate_statistics/multivariate_statistics_activity.pptx
@@ -15,6 +15,7 @@
     <p:sldId id="263" r:id="rId9"/>
     <p:sldId id="264" r:id="rId10"/>
     <p:sldId id="265" r:id="rId11"/>
+    <p:sldId id="266" r:id="rId12"/>
   </p:sldIdLst>
   <p:sldSz cx="9144000" cy="5143500" type="screen16x9"/>
   <p:notesSz cx="6858000" cy="9144000"/>
@@ -3302,7 +3303,7 @@
             </a:pPr>
             <a:r>
               <a:rPr/>
-              <a:t>Multivariate Statistics (MANOVA)</a:t>
+              <a:t>Activity: Multivariate Statistics (MANOVA)</a:t>
             </a:r>
           </a:p>
         </p:txBody>
@@ -3367,12 +3368,42 @@
       </p:grpSpPr>
       <p:sp>
         <p:nvSpPr>
-          <p:cNvPr id="4" name="Text Placeholder 3"/>
+          <p:cNvPr id="2" name="Title 1"/>
           <p:cNvSpPr>
             <a:spLocks noGrp="1"/>
           </p:cNvSpPr>
           <p:nvPr>
-            <p:ph idx="2" sz="half" type="body"/>
+            <p:ph type="title"/>
+          </p:nvPr>
+        </p:nvSpPr>
+        <p:spPr>
+          <a:xfrm>
+            <a:off x="0" y="0"/>
+            <a:ext cx="9144000" cy="582780"/>
+          </a:xfrm>
+        </p:spPr>
+        <p:txBody>
+          <a:bodyPr/>
+          <a:lstStyle/>
+          <a:p>
+            <a:pPr lvl="0" indent="0" marL="0">
+              <a:buNone/>
+            </a:pPr>
+            <a:r>
+              <a:rPr/>
+              <a:t>Review and checkpoint</a:t>
+            </a:r>
+          </a:p>
+        </p:txBody>
+      </p:sp>
+      <p:sp>
+        <p:nvSpPr>
+          <p:cNvPr id="3" name="Content Placeholder 2"/>
+          <p:cNvSpPr>
+            <a:spLocks noGrp="1"/>
+          </p:cNvSpPr>
+          <p:nvPr>
+            <p:ph idx="1"/>
           </p:nvPr>
         </p:nvSpPr>
         <p:spPr/>
@@ -3380,51 +3411,319 @@
           <a:bodyPr/>
           <a:lstStyle/>
           <a:p>
-            <a:pPr lvl="0" indent="0">
+            <a:pPr lvl="0" indent="0" marL="0">
               <a:buNone/>
             </a:pPr>
             <a:r>
-              <a:rPr>
-                <a:latin typeface="Courier"/>
-              </a:rPr>
-              <a:t>          DG       HD      LEH
-HD  4.346434                  
-LEH 1.621198 3.659711         
-TJH 1.843120 3.021386 1.960547</a:t>
+              <a:rPr/>
+              <a:t>At this point you can:</a:t>
+            </a:r>
+          </a:p>
+          <a:p>
+            <a:pPr lvl="0"/>
+            <a:r>
+              <a:rPr/>
+              <a:t>☐ Explain why standardization matters before PCA</a:t>
+            </a:r>
+          </a:p>
+          <a:p>
+            <a:pPr lvl="0"/>
+            <a:r>
+              <a:rPr/>
+              <a:t>☐ Interpret a correlation matrix in the context of PCA</a:t>
+            </a:r>
+          </a:p>
+          <a:p>
+            <a:pPr lvl="0"/>
+            <a:r>
+              <a:rPr/>
+              <a:t>☐ Run a PCA with </a:t>
+            </a:r>
+            <a:r>
+              <a:rPr>
+                <a:latin typeface="Courier"/>
+              </a:rPr>
+              <a:t>prcomp()</a:t>
+            </a:r>
+            <a:r>
+              <a:rPr/>
+              <a:t> and read a scree plot</a:t>
+            </a:r>
+          </a:p>
+          <a:p>
+            <a:pPr lvl="0"/>
+            <a:r>
+              <a:rPr/>
+              <a:t>☐ Interpret loadings to give principal components biological meaning</a:t>
+            </a:r>
+          </a:p>
+          <a:p>
+            <a:pPr lvl="0"/>
+            <a:r>
+              <a:rPr/>
+              <a:t>☐ Plot and interpret PC scores, including an interactive 3D version</a:t>
+            </a:r>
+          </a:p>
+          <a:p>
+            <a:pPr lvl="0"/>
+            <a:r>
+              <a:rPr/>
+              <a:t>☐ Calculate Euclidean distances between group centroids in PC space</a:t>
+            </a:r>
+          </a:p>
+          <a:p>
+            <a:pPr lvl="0" indent="0" marL="1270000">
+              <a:buNone/>
+            </a:pPr>
+            <a:r>
+              <a:rPr sz="2000" b="1"/>
+              <a:t>Note</a:t>
+            </a:r>
+          </a:p>
+          <a:p>
+            <a:pPr lvl="0" indent="0" marL="1270000">
+              <a:buNone/>
+            </a:pPr>
+            <a:r>
+              <a:rPr sz="2000" b="1"/>
+              <a:t>📤 What to turn in before next class</a:t>
+            </a:r>
+          </a:p>
+          <a:p>
+            <a:pPr lvl="0" indent="0" marL="1270000">
+              <a:buNone/>
+            </a:pPr>
+            <a:r>
+              <a:rPr sz="2000"/>
+              <a:t>Upload both of these to the course management system:</a:t>
+            </a:r>
+          </a:p>
+          <a:p>
+            <a:pPr lvl="0" indent="-342900" marL="342900">
+              <a:buAutoNum type="arabicPeriod"/>
+            </a:pPr>
+            <a:r>
+              <a:rPr sz="2000"/>
+              <a:t>Your code — the </a:t>
+            </a:r>
+            <a:r>
+              <a:rPr sz="2000">
+                <a:latin typeface="Courier"/>
+              </a:rPr>
+              <a:t>scripts/</a:t>
+            </a:r>
+            <a:r>
+              <a:rPr sz="2000"/>
+              <a:t> folder (or just </a:t>
+            </a:r>
+            <a:r>
+              <a:rPr sz="2000">
+                <a:latin typeface="Courier"/>
+              </a:rPr>
+              <a:t>09_multivariate_statistics.R</a:t>
+            </a:r>
+            <a:r>
+              <a:rPr sz="2000"/>
+              <a:t>)</a:t>
+            </a:r>
+          </a:p>
+          <a:p>
+            <a:pPr lvl="0" indent="-342900" marL="342900">
+              <a:buAutoNum type="arabicPeriod"/>
+            </a:pPr>
+            <a:r>
+              <a:rPr sz="2000"/>
+              <a:t>This worksheet, with your written answers</a:t>
             </a:r>
           </a:p>
         </p:txBody>
       </p:sp>
-      <p:pic>
-        <p:nvPicPr>
-          <p:cNvPr descr="multivariate_statistics_activity_files/figure-pptx/unnamed-chunk-17-1.png" id="0" name="Picture 1"/>
-          <p:cNvPicPr>
-            <a:picLocks noGrp="1" noChangeAspect="1"/>
-          </p:cNvPicPr>
-          <p:nvPr/>
-        </p:nvPicPr>
-        <p:blipFill>
-          <a:blip r:embed="rId2"/>
-          <a:stretch>
-            <a:fillRect/>
-          </a:stretch>
-        </p:blipFill>
-        <p:spPr bwMode="auto">
+    </p:spTree>
+  </p:cSld>
+</p:sld>
+</file>
+
+<file path=ppt/slides/slide11.xml><?xml version="1.0" encoding="utf-8"?>
+<p:sld xmlns:a="http://schemas.openxmlformats.org/drawingml/2006/main" xmlns:r="http://schemas.openxmlformats.org/officeDocument/2006/relationships" xmlns:p="http://schemas.openxmlformats.org/presentationml/2006/main">
+  <p:cSld>
+    <p:spTree>
+      <p:nvGrpSpPr>
+        <p:cNvPr id="1" name=""/>
+        <p:cNvGrpSpPr/>
+        <p:nvPr/>
+      </p:nvGrpSpPr>
+      <p:grpSpPr>
+        <a:xfrm>
+          <a:off x="0" y="0"/>
+          <a:ext cx="0" cy="0"/>
+          <a:chOff x="0" y="0"/>
+          <a:chExt cx="0" cy="0"/>
+        </a:xfrm>
+      </p:grpSpPr>
+      <p:sp>
+        <p:nvSpPr>
+          <p:cNvPr id="2" name="Title 1"/>
+          <p:cNvSpPr>
+            <a:spLocks noGrp="1"/>
+          </p:cNvSpPr>
+          <p:nvPr>
+            <p:ph type="title"/>
+          </p:nvPr>
+        </p:nvSpPr>
+        <p:spPr>
           <a:xfrm>
-            <a:off x="3657600" y="1244600"/>
-            <a:ext cx="5232400" cy="3225800"/>
+            <a:off x="0" y="0"/>
+            <a:ext cx="9144000" cy="582780"/>
           </a:xfrm>
-          <a:prstGeom prst="rect">
-            <a:avLst/>
-          </a:prstGeom>
-          <a:noFill/>
-          <a:ln w="9525">
-            <a:noFill/>
-            <a:headEnd/>
-            <a:tailEnd/>
-          </a:ln>
         </p:spPr>
-      </p:pic>
+        <p:txBody>
+          <a:bodyPr/>
+          <a:lstStyle/>
+          <a:p>
+            <a:pPr lvl="0" indent="0" marL="0">
+              <a:buNone/>
+            </a:pPr>
+            <a:r>
+              <a:rPr/>
+              <a:t>Getting unstuck</a:t>
+            </a:r>
+          </a:p>
+        </p:txBody>
+      </p:sp>
+      <p:sp>
+        <p:nvSpPr>
+          <p:cNvPr id="3" name="Content Placeholder 2"/>
+          <p:cNvSpPr>
+            <a:spLocks noGrp="1"/>
+          </p:cNvSpPr>
+          <p:nvPr>
+            <p:ph idx="1"/>
+          </p:nvPr>
+        </p:nvSpPr>
+        <p:spPr/>
+        <p:txBody>
+          <a:bodyPr/>
+          <a:lstStyle/>
+          <a:p>
+            <a:pPr lvl="0" indent="0" marL="0">
+              <a:buNone/>
+            </a:pPr>
+            <a:r>
+              <a:rPr/>
+              <a:t>When code breaks — and it will, that is normal:</a:t>
+            </a:r>
+          </a:p>
+          <a:p>
+            <a:pPr lvl="0" indent="-342900" marL="342900">
+              <a:buAutoNum type="arabicPeriod"/>
+            </a:pPr>
+            <a:r>
+              <a:rPr b="1"/>
+              <a:t>Read the error message out loud.</a:t>
+            </a:r>
+            <a:r>
+              <a:rPr/>
+              <a:t> R usually names the line and the problem.</a:t>
+            </a:r>
+          </a:p>
+          <a:p>
+            <a:pPr lvl="0" indent="-342900" marL="342900">
+              <a:buAutoNum type="arabicPeriod"/>
+            </a:pPr>
+            <a:r>
+              <a:rPr b="1"/>
+              <a:t>Check the usual suspects:</a:t>
+            </a:r>
+            <a:r>
+              <a:rPr/>
+              <a:t> did you run all the </a:t>
+            </a:r>
+            <a:r>
+              <a:rPr>
+                <a:latin typeface="Courier"/>
+              </a:rPr>
+              <a:t>library()</a:t>
+            </a:r>
+            <a:r>
+              <a:rPr/>
+              <a:t> calls at the top? Spelling? A missing </a:t>
+            </a:r>
+            <a:r>
+              <a:rPr>
+                <a:latin typeface="Courier"/>
+              </a:rPr>
+              <a:t>)</a:t>
+            </a:r>
+            <a:r>
+              <a:rPr/>
+              <a:t> or </a:t>
+            </a:r>
+            <a:r>
+              <a:rPr>
+                <a:latin typeface="Courier"/>
+              </a:rPr>
+              <a:t>%&gt;%</a:t>
+            </a:r>
+            <a:r>
+              <a:rPr/>
+              <a:t> at the </a:t>
+            </a:r>
+            <a:r>
+              <a:rPr i="1"/>
+              <a:t>start</a:t>
+            </a:r>
+            <a:r>
+              <a:rPr/>
+              <a:t> of a line?</a:t>
+            </a:r>
+          </a:p>
+          <a:p>
+            <a:pPr lvl="0" indent="-342900" marL="342900">
+              <a:buAutoNum type="arabicPeriod"/>
+            </a:pPr>
+            <a:r>
+              <a:rPr>
+                <a:latin typeface="Courier"/>
+              </a:rPr>
+              <a:t>?function_name</a:t>
+            </a:r>
+            <a:r>
+              <a:rPr/>
+              <a:t> opens the built-in help page.</a:t>
+            </a:r>
+          </a:p>
+          <a:p>
+            <a:pPr lvl="0" indent="-342900" marL="342900">
+              <a:buAutoNum type="arabicPeriod"/>
+            </a:pPr>
+            <a:r>
+              <a:rPr b="1"/>
+              <a:t>Bring the exact error</a:t>
+            </a:r>
+            <a:r>
+              <a:rPr/>
+              <a:t> (copy-paste it) to class or office hours.</a:t>
+            </a:r>
+          </a:p>
+          <a:p>
+            <a:pPr lvl="0" indent="0" marL="1270000">
+              <a:buNone/>
+            </a:pPr>
+            <a:r>
+              <a:rPr sz="2000"/>
+              <a:t>💡 </a:t>
+            </a:r>
+            <a:r>
+              <a:rPr sz="2000" b="1"/>
+              <a:t>Key idea:</a:t>
+            </a:r>
+            <a:r>
+              <a:rPr sz="2000"/>
+              <a:t> Every working scientist googles error messages daily. Getting stuck is not failing — it is the job.</a:t>
+            </a:r>
+          </a:p>
+        </p:txBody>
+      </p:sp>
     </p:spTree>
   </p:cSld>
 </p:sld>
@@ -3460,7 +3759,7 @@
         <p:spPr>
           <a:xfrm>
             <a:off x="0" y="0"/>
-            <a:ext cx="9144000" cy="871538"/>
+            <a:ext cx="9144000" cy="582780"/>
           </a:xfrm>
         </p:spPr>
         <p:txBody>
@@ -3472,19 +3771,19 @@
             </a:pPr>
             <a:r>
               <a:rPr/>
-              <a:t>Lecture 16: PCA</a:t>
+              <a:t>Worksheet: Multivariate Statistics</a:t>
             </a:r>
           </a:p>
         </p:txBody>
       </p:sp>
       <p:sp>
         <p:nvSpPr>
-          <p:cNvPr id="4" name="Text Placeholder 3"/>
+          <p:cNvPr id="3" name="Content Placeholder 2"/>
           <p:cNvSpPr>
             <a:spLocks noGrp="1"/>
           </p:cNvSpPr>
           <p:nvPr>
-            <p:ph idx="2" sz="half" type="body"/>
+            <p:ph idx="1"/>
           </p:nvPr>
         </p:nvSpPr>
         <p:spPr/>
@@ -3492,75 +3791,422 @@
           <a:bodyPr/>
           <a:lstStyle/>
           <a:p>
+            <a:pPr lvl="0" indent="0" marL="0">
+              <a:spcBef>
+                <a:spcPts val="3000"/>
+              </a:spcBef>
+              <a:buNone/>
+            </a:pPr>
+            <a:r>
+              <a:rPr sz="2000" b="1"/>
+              <a:t>How to use this worksheet</a:t>
+            </a:r>
+          </a:p>
+          <a:p>
+            <a:pPr lvl="0" indent="0" marL="1270000">
+              <a:buNone/>
+            </a:pPr>
+            <a:r>
+              <a:rPr sz="2000"/>
+              <a:t>Work through each part in order, at your own pace. Type every line of code yourself into a </a:t>
+            </a:r>
+            <a:r>
+              <a:rPr sz="2000" b="1"/>
+              <a:t>plain R script</a:t>
+            </a:r>
+            <a:r>
+              <a:rPr sz="2000"/>
+              <a:t> — do not copy-paste. Blocks marked </a:t>
+            </a:r>
+            <a:r>
+              <a:rPr sz="2000" b="1"/>
+              <a:t>▶ Run this</a:t>
+            </a:r>
+            <a:r>
+              <a:rPr sz="2000"/>
+              <a:t> are code you should type and execute. Blocks marked </a:t>
+            </a:r>
+            <a:r>
+              <a:rPr sz="2000" b="1"/>
+              <a:t>✏️ Your turn</a:t>
+            </a:r>
+            <a:r>
+              <a:rPr sz="2000"/>
+              <a:t> ask you to write, modify, or answer something. Boxes marked </a:t>
+            </a:r>
+            <a:r>
+              <a:rPr sz="2000" b="1"/>
+              <a:t>🚀 If you finish early</a:t>
+            </a:r>
+            <a:r>
+              <a:rPr sz="2000"/>
+              <a:t> are optional bonus material that goes a bit further than what we covered in lecture.</a:t>
+            </a:r>
+          </a:p>
+          <a:p>
+            <a:pPr lvl="0" indent="0" marL="1270000">
+              <a:buNone/>
+            </a:pPr>
+            <a:r>
+              <a:rPr sz="2000"/>
+              <a:t>This worksheet uses the same Darlingtonia (cobra lily) morphology dataset from lecture — 89 plants measured on 10 morphological and biomass variables across 4 sites.</a:t>
+            </a:r>
+          </a:p>
+          <a:p>
+            <a:pPr lvl="0" indent="0" marL="0">
+              <a:buNone/>
+            </a:pPr>
+            <a:r>
+              <a:rPr b="1"/>
+              <a:t>▶ Run this in your Script:</a:t>
+            </a:r>
+          </a:p>
+          <a:p>
             <a:pPr lvl="0" indent="0">
               <a:buNone/>
             </a:pPr>
             <a:r>
               <a:rPr>
-                <a:latin typeface="Courier"/>
-              </a:rPr>
-              <a:t># A tibble: 6 × 11
-  site  height mouth_diam tube_diam keel_diam wing1_length wing2_length
-  &lt;chr&gt;  &lt;dbl&gt;      &lt;dbl&gt;     &lt;dbl&gt;     &lt;dbl&gt;        &lt;dbl&gt;        &lt;dbl&gt;
-1 TJH      654       38.4      16.6       6.4           85           76
-2 TJH      413       22.2      17.2       5.9           55           26
-3 TJH      610       31.2      19.9       6.7           62           60
-4 TJH      546       34.4      20.8       6.3           84           79
-5 TJH      665       30.5      20.4       6.6           60           51
-6 TJH      665       33.6      19.5       6.6           84           66
-# ℹ 4 more variables: wingsprea &lt;dbl&gt;, hoodmass_g &lt;dbl&gt;, tubemass_g &lt;dbl&gt;,
-#   wingmass_g &lt;dbl&gt;</a:t>
-            </a:r>
-          </a:p>
-          <a:p>
-            <a:pPr lvl="0" indent="0">
-              <a:buNone/>
-            </a:pPr>
-            <a:r>
-              <a:rPr>
-                <a:latin typeface="Courier"/>
-              </a:rPr>
-              <a:t># A tibble: 4 × 2
-  site  n_plants
-  &lt;chr&gt;    &lt;int&gt;
-1 DG          25
-2 HD          12
-3 LEH         25
-4 TJH         25</a:t>
+                <a:solidFill>
+                  <a:srgbClr val="4758AB"/>
+                </a:solidFill>
+                <a:latin typeface="Courier"/>
+              </a:rPr>
+              <a:t>library</a:t>
+            </a:r>
+            <a:r>
+              <a:rPr>
+                <a:solidFill>
+                  <a:srgbClr val="003B4F"/>
+                </a:solidFill>
+                <a:latin typeface="Courier"/>
+              </a:rPr>
+              <a:t>(car)</a:t>
+            </a:r>
+            <a:br/>
+            <a:r>
+              <a:rPr>
+                <a:solidFill>
+                  <a:srgbClr val="4758AB"/>
+                </a:solidFill>
+                <a:latin typeface="Courier"/>
+              </a:rPr>
+              <a:t>library</a:t>
+            </a:r>
+            <a:r>
+              <a:rPr>
+                <a:solidFill>
+                  <a:srgbClr val="003B4F"/>
+                </a:solidFill>
+                <a:latin typeface="Courier"/>
+              </a:rPr>
+              <a:t>(emmeans)</a:t>
+            </a:r>
+            <a:br/>
+            <a:r>
+              <a:rPr>
+                <a:solidFill>
+                  <a:srgbClr val="4758AB"/>
+                </a:solidFill>
+                <a:latin typeface="Courier"/>
+              </a:rPr>
+              <a:t>library</a:t>
+            </a:r>
+            <a:r>
+              <a:rPr>
+                <a:solidFill>
+                  <a:srgbClr val="003B4F"/>
+                </a:solidFill>
+                <a:latin typeface="Courier"/>
+              </a:rPr>
+              <a:t>(psych)</a:t>
+            </a:r>
+            <a:br/>
+            <a:r>
+              <a:rPr>
+                <a:solidFill>
+                  <a:srgbClr val="4758AB"/>
+                </a:solidFill>
+                <a:latin typeface="Courier"/>
+              </a:rPr>
+              <a:t>library</a:t>
+            </a:r>
+            <a:r>
+              <a:rPr>
+                <a:solidFill>
+                  <a:srgbClr val="003B4F"/>
+                </a:solidFill>
+                <a:latin typeface="Courier"/>
+              </a:rPr>
+              <a:t>(vegan)</a:t>
+            </a:r>
+            <a:br/>
+            <a:r>
+              <a:rPr>
+                <a:solidFill>
+                  <a:srgbClr val="4758AB"/>
+                </a:solidFill>
+                <a:latin typeface="Courier"/>
+              </a:rPr>
+              <a:t>library</a:t>
+            </a:r>
+            <a:r>
+              <a:rPr>
+                <a:solidFill>
+                  <a:srgbClr val="003B4F"/>
+                </a:solidFill>
+                <a:latin typeface="Courier"/>
+              </a:rPr>
+              <a:t>(ggfortify)</a:t>
+            </a:r>
+            <a:br/>
+            <a:r>
+              <a:rPr>
+                <a:solidFill>
+                  <a:srgbClr val="4758AB"/>
+                </a:solidFill>
+                <a:latin typeface="Courier"/>
+              </a:rPr>
+              <a:t>library</a:t>
+            </a:r>
+            <a:r>
+              <a:rPr>
+                <a:solidFill>
+                  <a:srgbClr val="003B4F"/>
+                </a:solidFill>
+                <a:latin typeface="Courier"/>
+              </a:rPr>
+              <a:t>(corrplot)</a:t>
+            </a:r>
+            <a:br/>
+            <a:r>
+              <a:rPr>
+                <a:solidFill>
+                  <a:srgbClr val="4758AB"/>
+                </a:solidFill>
+                <a:latin typeface="Courier"/>
+              </a:rPr>
+              <a:t>library</a:t>
+            </a:r>
+            <a:r>
+              <a:rPr>
+                <a:solidFill>
+                  <a:srgbClr val="003B4F"/>
+                </a:solidFill>
+                <a:latin typeface="Courier"/>
+              </a:rPr>
+              <a:t>(FactoMineR)</a:t>
+            </a:r>
+            <a:br/>
+            <a:r>
+              <a:rPr>
+                <a:solidFill>
+                  <a:srgbClr val="4758AB"/>
+                </a:solidFill>
+                <a:latin typeface="Courier"/>
+              </a:rPr>
+              <a:t>library</a:t>
+            </a:r>
+            <a:r>
+              <a:rPr>
+                <a:solidFill>
+                  <a:srgbClr val="003B4F"/>
+                </a:solidFill>
+                <a:latin typeface="Courier"/>
+              </a:rPr>
+              <a:t>(factoextra)</a:t>
+            </a:r>
+            <a:br/>
+            <a:r>
+              <a:rPr>
+                <a:solidFill>
+                  <a:srgbClr val="4758AB"/>
+                </a:solidFill>
+                <a:latin typeface="Courier"/>
+              </a:rPr>
+              <a:t>library</a:t>
+            </a:r>
+            <a:r>
+              <a:rPr>
+                <a:solidFill>
+                  <a:srgbClr val="003B4F"/>
+                </a:solidFill>
+                <a:latin typeface="Courier"/>
+              </a:rPr>
+              <a:t>(ggrepel)</a:t>
+            </a:r>
+            <a:br/>
+            <a:r>
+              <a:rPr>
+                <a:solidFill>
+                  <a:srgbClr val="4758AB"/>
+                </a:solidFill>
+                <a:latin typeface="Courier"/>
+              </a:rPr>
+              <a:t>library</a:t>
+            </a:r>
+            <a:r>
+              <a:rPr>
+                <a:solidFill>
+                  <a:srgbClr val="003B4F"/>
+                </a:solidFill>
+                <a:latin typeface="Courier"/>
+              </a:rPr>
+              <a:t>(plotly)</a:t>
+            </a:r>
+            <a:br/>
+            <a:r>
+              <a:rPr>
+                <a:solidFill>
+                  <a:srgbClr val="4758AB"/>
+                </a:solidFill>
+                <a:latin typeface="Courier"/>
+              </a:rPr>
+              <a:t>library</a:t>
+            </a:r>
+            <a:r>
+              <a:rPr>
+                <a:solidFill>
+                  <a:srgbClr val="003B4F"/>
+                </a:solidFill>
+                <a:latin typeface="Courier"/>
+              </a:rPr>
+              <a:t>(broom)</a:t>
+            </a:r>
+            <a:br/>
+            <a:r>
+              <a:rPr>
+                <a:solidFill>
+                  <a:srgbClr val="4758AB"/>
+                </a:solidFill>
+                <a:latin typeface="Courier"/>
+              </a:rPr>
+              <a:t>library</a:t>
+            </a:r>
+            <a:r>
+              <a:rPr>
+                <a:solidFill>
+                  <a:srgbClr val="003B4F"/>
+                </a:solidFill>
+                <a:latin typeface="Courier"/>
+              </a:rPr>
+              <a:t>(patchwork)</a:t>
+            </a:r>
+            <a:br/>
+            <a:r>
+              <a:rPr>
+                <a:solidFill>
+                  <a:srgbClr val="4758AB"/>
+                </a:solidFill>
+                <a:latin typeface="Courier"/>
+              </a:rPr>
+              <a:t>library</a:t>
+            </a:r>
+            <a:r>
+              <a:rPr>
+                <a:solidFill>
+                  <a:srgbClr val="003B4F"/>
+                </a:solidFill>
+                <a:latin typeface="Courier"/>
+              </a:rPr>
+              <a:t>(janitor)</a:t>
+            </a:r>
+            <a:br/>
+            <a:r>
+              <a:rPr>
+                <a:solidFill>
+                  <a:srgbClr val="4758AB"/>
+                </a:solidFill>
+                <a:latin typeface="Courier"/>
+              </a:rPr>
+              <a:t>library</a:t>
+            </a:r>
+            <a:r>
+              <a:rPr>
+                <a:solidFill>
+                  <a:srgbClr val="003B4F"/>
+                </a:solidFill>
+                <a:latin typeface="Courier"/>
+              </a:rPr>
+              <a:t>(tidyverse)</a:t>
+            </a:r>
+            <a:br/>
+            <a:br/>
+            <a:r>
+              <a:rPr>
+                <a:solidFill>
+                  <a:srgbClr val="4758AB"/>
+                </a:solidFill>
+                <a:latin typeface="Courier"/>
+              </a:rPr>
+              <a:t>theme_set</a:t>
+            </a:r>
+            <a:r>
+              <a:rPr>
+                <a:solidFill>
+                  <a:srgbClr val="003B4F"/>
+                </a:solidFill>
+                <a:latin typeface="Courier"/>
+              </a:rPr>
+              <a:t>(</a:t>
+            </a:r>
+            <a:r>
+              <a:rPr>
+                <a:solidFill>
+                  <a:srgbClr val="4758AB"/>
+                </a:solidFill>
+                <a:latin typeface="Courier"/>
+              </a:rPr>
+              <a:t>theme_minimal</a:t>
+            </a:r>
+            <a:r>
+              <a:rPr>
+                <a:solidFill>
+                  <a:srgbClr val="003B4F"/>
+                </a:solidFill>
+                <a:latin typeface="Courier"/>
+              </a:rPr>
+              <a:t>(</a:t>
+            </a:r>
+            <a:r>
+              <a:rPr>
+                <a:solidFill>
+                  <a:srgbClr val="657422"/>
+                </a:solidFill>
+                <a:latin typeface="Courier"/>
+              </a:rPr>
+              <a:t>base_size =</a:t>
+            </a:r>
+            <a:r>
+              <a:rPr>
+                <a:solidFill>
+                  <a:srgbClr val="003B4F"/>
+                </a:solidFill>
+                <a:latin typeface="Courier"/>
+              </a:rPr>
+              <a:t> </a:t>
+            </a:r>
+            <a:r>
+              <a:rPr>
+                <a:solidFill>
+                  <a:srgbClr val="AD0000"/>
+                </a:solidFill>
+                <a:latin typeface="Courier"/>
+              </a:rPr>
+              <a:t>9</a:t>
+            </a:r>
+            <a:r>
+              <a:rPr>
+                <a:solidFill>
+                  <a:srgbClr val="003B4F"/>
+                </a:solidFill>
+                <a:latin typeface="Courier"/>
+              </a:rPr>
+              <a:t>))</a:t>
             </a:r>
           </a:p>
         </p:txBody>
       </p:sp>
-      <p:pic>
-        <p:nvPicPr>
-          <p:cNvPr descr="multivariate_statistics_activity_files/figure-pptx/unnamed-chunk-2-1.png" id="0" name="Picture 1"/>
-          <p:cNvPicPr>
-            <a:picLocks noGrp="1" noChangeAspect="1"/>
-          </p:cNvPicPr>
-          <p:nvPr/>
-        </p:nvPicPr>
-        <p:blipFill>
-          <a:blip r:embed="rId2"/>
-          <a:stretch>
-            <a:fillRect/>
-          </a:stretch>
-        </p:blipFill>
-        <p:spPr bwMode="auto">
-          <a:xfrm>
-            <a:off x="3657600" y="1244600"/>
-            <a:ext cx="5232400" cy="3225800"/>
-          </a:xfrm>
-          <a:prstGeom prst="rect">
-            <a:avLst/>
-          </a:prstGeom>
-          <a:noFill/>
-          <a:ln w="9525">
-            <a:noFill/>
-            <a:headEnd/>
-            <a:tailEnd/>
-          </a:ln>
-        </p:spPr>
-      </p:pic>
     </p:spTree>
   </p:cSld>
 </p:sld>
@@ -3585,12 +4231,42 @@
       </p:grpSpPr>
       <p:sp>
         <p:nvSpPr>
-          <p:cNvPr id="4" name="Text Placeholder 3"/>
+          <p:cNvPr id="2" name="Title 1"/>
           <p:cNvSpPr>
             <a:spLocks noGrp="1"/>
           </p:cNvSpPr>
           <p:nvPr>
-            <p:ph idx="2" sz="half" type="body"/>
+            <p:ph type="title"/>
+          </p:nvPr>
+        </p:nvSpPr>
+        <p:spPr>
+          <a:xfrm>
+            <a:off x="0" y="0"/>
+            <a:ext cx="9144000" cy="582780"/>
+          </a:xfrm>
+        </p:spPr>
+        <p:txBody>
+          <a:bodyPr/>
+          <a:lstStyle/>
+          <a:p>
+            <a:pPr lvl="0" indent="0" marL="0">
+              <a:buNone/>
+            </a:pPr>
+            <a:r>
+              <a:rPr/>
+              <a:t>Part 1 · Load and Explore the Data</a:t>
+            </a:r>
+          </a:p>
+        </p:txBody>
+      </p:sp>
+      <p:sp>
+        <p:nvSpPr>
+          <p:cNvPr id="3" name="Content Placeholder 2"/>
+          <p:cNvSpPr>
+            <a:spLocks noGrp="1"/>
+          </p:cNvSpPr>
+          <p:nvPr>
+            <p:ph idx="1"/>
           </p:nvPr>
         </p:nvSpPr>
         <p:spPr/>
@@ -3598,54 +4274,1024 @@
           <a:bodyPr/>
           <a:lstStyle/>
           <a:p>
+            <a:pPr lvl="0" indent="0" marL="0">
+              <a:buNone/>
+            </a:pPr>
+            <a:r>
+              <a:rPr b="1"/>
+              <a:t>▶ Run this:</a:t>
+            </a:r>
+          </a:p>
+          <a:p>
             <a:pPr lvl="0" indent="0">
               <a:buNone/>
             </a:pPr>
             <a:r>
               <a:rPr>
-                <a:latin typeface="Courier"/>
-              </a:rPr>
-              <a:t># A tibble: 4 × 5
-  site  mean_height sd_height mean_wingmass sd_wingmass
-  &lt;chr&gt;       &lt;dbl&gt;     &lt;dbl&gt;         &lt;dbl&gt;       &lt;dbl&gt;
-1 DG           619.     101.         0.225       0.0682
-2 HD           574.     101.         0.0567      0.0202
-3 LEH          638.     115.         0.151       0.122 
-4 TJH          610.      82.0        0.134       0.0853</a:t>
+                <a:solidFill>
+                  <a:srgbClr val="003B4F"/>
+                </a:solidFill>
+                <a:latin typeface="Courier"/>
+              </a:rPr>
+              <a:t>darlingtonia &lt;- </a:t>
+            </a:r>
+            <a:r>
+              <a:rPr>
+                <a:solidFill>
+                  <a:srgbClr val="4758AB"/>
+                </a:solidFill>
+                <a:latin typeface="Courier"/>
+              </a:rPr>
+              <a:t>read_csv</a:t>
+            </a:r>
+            <a:r>
+              <a:rPr>
+                <a:solidFill>
+                  <a:srgbClr val="003B4F"/>
+                </a:solidFill>
+                <a:latin typeface="Courier"/>
+              </a:rPr>
+              <a:t>(</a:t>
+            </a:r>
+            <a:r>
+              <a:rPr>
+                <a:solidFill>
+                  <a:srgbClr val="20794D"/>
+                </a:solidFill>
+                <a:latin typeface="Courier"/>
+              </a:rPr>
+              <a:t>"darlingtonia.csv"</a:t>
+            </a:r>
+            <a:r>
+              <a:rPr>
+                <a:solidFill>
+                  <a:srgbClr val="003B4F"/>
+                </a:solidFill>
+                <a:latin typeface="Courier"/>
+              </a:rPr>
+              <a:t>)</a:t>
+            </a:r>
+            <a:br/>
+            <a:br/>
+            <a:r>
+              <a:rPr>
+                <a:solidFill>
+                  <a:srgbClr val="4758AB"/>
+                </a:solidFill>
+                <a:latin typeface="Courier"/>
+              </a:rPr>
+              <a:t>head</a:t>
+            </a:r>
+            <a:r>
+              <a:rPr>
+                <a:solidFill>
+                  <a:srgbClr val="003B4F"/>
+                </a:solidFill>
+                <a:latin typeface="Courier"/>
+              </a:rPr>
+              <a:t>(darlingtonia)</a:t>
+            </a:r>
+            <a:br/>
+            <a:br/>
+            <a:r>
+              <a:rPr>
+                <a:solidFill>
+                  <a:srgbClr val="003B4F"/>
+                </a:solidFill>
+                <a:latin typeface="Courier"/>
+              </a:rPr>
+              <a:t>darlingtonia </a:t>
+            </a:r>
+            <a:r>
+              <a:rPr>
+                <a:solidFill>
+                  <a:srgbClr val="5E5E5E"/>
+                </a:solidFill>
+                <a:latin typeface="Courier"/>
+              </a:rPr>
+              <a:t>%&gt;%</a:t>
+            </a:r>
+            <a:br/>
+            <a:r>
+              <a:rPr>
+                <a:solidFill>
+                  <a:srgbClr val="003B4F"/>
+                </a:solidFill>
+                <a:latin typeface="Courier"/>
+              </a:rPr>
+              <a:t>  </a:t>
+            </a:r>
+            <a:r>
+              <a:rPr>
+                <a:solidFill>
+                  <a:srgbClr val="4758AB"/>
+                </a:solidFill>
+                <a:latin typeface="Courier"/>
+              </a:rPr>
+              <a:t>count</a:t>
+            </a:r>
+            <a:r>
+              <a:rPr>
+                <a:solidFill>
+                  <a:srgbClr val="003B4F"/>
+                </a:solidFill>
+                <a:latin typeface="Courier"/>
+              </a:rPr>
+              <a:t>(site, </a:t>
+            </a:r>
+            <a:r>
+              <a:rPr>
+                <a:solidFill>
+                  <a:srgbClr val="657422"/>
+                </a:solidFill>
+                <a:latin typeface="Courier"/>
+              </a:rPr>
+              <a:t>name =</a:t>
+            </a:r>
+            <a:r>
+              <a:rPr>
+                <a:solidFill>
+                  <a:srgbClr val="003B4F"/>
+                </a:solidFill>
+                <a:latin typeface="Courier"/>
+              </a:rPr>
+              <a:t> </a:t>
+            </a:r>
+            <a:r>
+              <a:rPr>
+                <a:solidFill>
+                  <a:srgbClr val="20794D"/>
+                </a:solidFill>
+                <a:latin typeface="Courier"/>
+              </a:rPr>
+              <a:t>"n_plants"</a:t>
+            </a:r>
+            <a:r>
+              <a:rPr>
+                <a:solidFill>
+                  <a:srgbClr val="003B4F"/>
+                </a:solidFill>
+                <a:latin typeface="Courier"/>
+              </a:rPr>
+              <a:t>)</a:t>
+            </a:r>
+          </a:p>
+          <a:p>
+            <a:pPr lvl="0" indent="0" marL="0">
+              <a:buNone/>
+            </a:pPr>
+            <a:r>
+              <a:rPr b="1"/>
+              <a:t>▶ Run this</a:t>
+            </a:r>
+            <a:r>
+              <a:rPr/>
+              <a:t> — visualize the raw data by site (notice the different scales!):</a:t>
+            </a:r>
+          </a:p>
+          <a:p>
+            <a:pPr lvl="0" indent="0">
+              <a:buNone/>
+            </a:pPr>
+            <a:r>
+              <a:rPr>
+                <a:solidFill>
+                  <a:srgbClr val="003B4F"/>
+                </a:solidFill>
+                <a:latin typeface="Courier"/>
+              </a:rPr>
+              <a:t>darl_long &lt;- darlingtonia </a:t>
+            </a:r>
+            <a:r>
+              <a:rPr>
+                <a:solidFill>
+                  <a:srgbClr val="5E5E5E"/>
+                </a:solidFill>
+                <a:latin typeface="Courier"/>
+              </a:rPr>
+              <a:t>%&gt;%</a:t>
+            </a:r>
+            <a:br/>
+            <a:r>
+              <a:rPr>
+                <a:solidFill>
+                  <a:srgbClr val="003B4F"/>
+                </a:solidFill>
+                <a:latin typeface="Courier"/>
+              </a:rPr>
+              <a:t>  </a:t>
+            </a:r>
+            <a:r>
+              <a:rPr>
+                <a:solidFill>
+                  <a:srgbClr val="4758AB"/>
+                </a:solidFill>
+                <a:latin typeface="Courier"/>
+              </a:rPr>
+              <a:t>pivot_longer</a:t>
+            </a:r>
+            <a:r>
+              <a:rPr>
+                <a:solidFill>
+                  <a:srgbClr val="003B4F"/>
+                </a:solidFill>
+                <a:latin typeface="Courier"/>
+              </a:rPr>
+              <a:t>(</a:t>
+            </a:r>
+            <a:r>
+              <a:rPr>
+                <a:solidFill>
+                  <a:srgbClr val="657422"/>
+                </a:solidFill>
+                <a:latin typeface="Courier"/>
+              </a:rPr>
+              <a:t>cols =</a:t>
+            </a:r>
+            <a:r>
+              <a:rPr>
+                <a:solidFill>
+                  <a:srgbClr val="003B4F"/>
+                </a:solidFill>
+                <a:latin typeface="Courier"/>
+              </a:rPr>
+              <a:t> </a:t>
+            </a:r>
+            <a:r>
+              <a:rPr>
+                <a:solidFill>
+                  <a:srgbClr val="5E5E5E"/>
+                </a:solidFill>
+                <a:latin typeface="Courier"/>
+              </a:rPr>
+              <a:t>-</a:t>
+            </a:r>
+            <a:r>
+              <a:rPr>
+                <a:solidFill>
+                  <a:srgbClr val="003B4F"/>
+                </a:solidFill>
+                <a:latin typeface="Courier"/>
+              </a:rPr>
+              <a:t>site,</a:t>
+            </a:r>
+            <a:br/>
+            <a:r>
+              <a:rPr>
+                <a:solidFill>
+                  <a:srgbClr val="003B4F"/>
+                </a:solidFill>
+                <a:latin typeface="Courier"/>
+              </a:rPr>
+              <a:t>               </a:t>
+            </a:r>
+            <a:r>
+              <a:rPr>
+                <a:solidFill>
+                  <a:srgbClr val="657422"/>
+                </a:solidFill>
+                <a:latin typeface="Courier"/>
+              </a:rPr>
+              <a:t>names_to =</a:t>
+            </a:r>
+            <a:r>
+              <a:rPr>
+                <a:solidFill>
+                  <a:srgbClr val="003B4F"/>
+                </a:solidFill>
+                <a:latin typeface="Courier"/>
+              </a:rPr>
+              <a:t> </a:t>
+            </a:r>
+            <a:r>
+              <a:rPr>
+                <a:solidFill>
+                  <a:srgbClr val="20794D"/>
+                </a:solidFill>
+                <a:latin typeface="Courier"/>
+              </a:rPr>
+              <a:t>"variable"</a:t>
+            </a:r>
+            <a:r>
+              <a:rPr>
+                <a:solidFill>
+                  <a:srgbClr val="003B4F"/>
+                </a:solidFill>
+                <a:latin typeface="Courier"/>
+              </a:rPr>
+              <a:t>,</a:t>
+            </a:r>
+            <a:br/>
+            <a:r>
+              <a:rPr>
+                <a:solidFill>
+                  <a:srgbClr val="003B4F"/>
+                </a:solidFill>
+                <a:latin typeface="Courier"/>
+              </a:rPr>
+              <a:t>               </a:t>
+            </a:r>
+            <a:r>
+              <a:rPr>
+                <a:solidFill>
+                  <a:srgbClr val="657422"/>
+                </a:solidFill>
+                <a:latin typeface="Courier"/>
+              </a:rPr>
+              <a:t>values_to =</a:t>
+            </a:r>
+            <a:r>
+              <a:rPr>
+                <a:solidFill>
+                  <a:srgbClr val="003B4F"/>
+                </a:solidFill>
+                <a:latin typeface="Courier"/>
+              </a:rPr>
+              <a:t> </a:t>
+            </a:r>
+            <a:r>
+              <a:rPr>
+                <a:solidFill>
+                  <a:srgbClr val="20794D"/>
+                </a:solidFill>
+                <a:latin typeface="Courier"/>
+              </a:rPr>
+              <a:t>"value"</a:t>
+            </a:r>
+            <a:r>
+              <a:rPr>
+                <a:solidFill>
+                  <a:srgbClr val="003B4F"/>
+                </a:solidFill>
+                <a:latin typeface="Courier"/>
+              </a:rPr>
+              <a:t>)</a:t>
+            </a:r>
+            <a:br/>
+            <a:br/>
+            <a:r>
+              <a:rPr>
+                <a:solidFill>
+                  <a:srgbClr val="4758AB"/>
+                </a:solidFill>
+                <a:latin typeface="Courier"/>
+              </a:rPr>
+              <a:t>ggplot</a:t>
+            </a:r>
+            <a:r>
+              <a:rPr>
+                <a:solidFill>
+                  <a:srgbClr val="003B4F"/>
+                </a:solidFill>
+                <a:latin typeface="Courier"/>
+              </a:rPr>
+              <a:t>(darl_long, </a:t>
+            </a:r>
+            <a:r>
+              <a:rPr>
+                <a:solidFill>
+                  <a:srgbClr val="4758AB"/>
+                </a:solidFill>
+                <a:latin typeface="Courier"/>
+              </a:rPr>
+              <a:t>aes</a:t>
+            </a:r>
+            <a:r>
+              <a:rPr>
+                <a:solidFill>
+                  <a:srgbClr val="003B4F"/>
+                </a:solidFill>
+                <a:latin typeface="Courier"/>
+              </a:rPr>
+              <a:t>(</a:t>
+            </a:r>
+            <a:r>
+              <a:rPr>
+                <a:solidFill>
+                  <a:srgbClr val="657422"/>
+                </a:solidFill>
+                <a:latin typeface="Courier"/>
+              </a:rPr>
+              <a:t>x =</a:t>
+            </a:r>
+            <a:r>
+              <a:rPr>
+                <a:solidFill>
+                  <a:srgbClr val="003B4F"/>
+                </a:solidFill>
+                <a:latin typeface="Courier"/>
+              </a:rPr>
+              <a:t> site, </a:t>
+            </a:r>
+            <a:r>
+              <a:rPr>
+                <a:solidFill>
+                  <a:srgbClr val="657422"/>
+                </a:solidFill>
+                <a:latin typeface="Courier"/>
+              </a:rPr>
+              <a:t>y =</a:t>
+            </a:r>
+            <a:r>
+              <a:rPr>
+                <a:solidFill>
+                  <a:srgbClr val="003B4F"/>
+                </a:solidFill>
+                <a:latin typeface="Courier"/>
+              </a:rPr>
+              <a:t> value, </a:t>
+            </a:r>
+            <a:r>
+              <a:rPr>
+                <a:solidFill>
+                  <a:srgbClr val="657422"/>
+                </a:solidFill>
+                <a:latin typeface="Courier"/>
+              </a:rPr>
+              <a:t>fill =</a:t>
+            </a:r>
+            <a:r>
+              <a:rPr>
+                <a:solidFill>
+                  <a:srgbClr val="003B4F"/>
+                </a:solidFill>
+                <a:latin typeface="Courier"/>
+              </a:rPr>
+              <a:t> site)) </a:t>
+            </a:r>
+            <a:r>
+              <a:rPr>
+                <a:solidFill>
+                  <a:srgbClr val="5E5E5E"/>
+                </a:solidFill>
+                <a:latin typeface="Courier"/>
+              </a:rPr>
+              <a:t>+</a:t>
+            </a:r>
+            <a:br/>
+            <a:r>
+              <a:rPr>
+                <a:solidFill>
+                  <a:srgbClr val="003B4F"/>
+                </a:solidFill>
+                <a:latin typeface="Courier"/>
+              </a:rPr>
+              <a:t>  </a:t>
+            </a:r>
+            <a:r>
+              <a:rPr>
+                <a:solidFill>
+                  <a:srgbClr val="4758AB"/>
+                </a:solidFill>
+                <a:latin typeface="Courier"/>
+              </a:rPr>
+              <a:t>geom_boxplot</a:t>
+            </a:r>
+            <a:r>
+              <a:rPr>
+                <a:solidFill>
+                  <a:srgbClr val="003B4F"/>
+                </a:solidFill>
+                <a:latin typeface="Courier"/>
+              </a:rPr>
+              <a:t>() </a:t>
+            </a:r>
+            <a:r>
+              <a:rPr>
+                <a:solidFill>
+                  <a:srgbClr val="5E5E5E"/>
+                </a:solidFill>
+                <a:latin typeface="Courier"/>
+              </a:rPr>
+              <a:t>+</a:t>
+            </a:r>
+            <a:br/>
+            <a:r>
+              <a:rPr>
+                <a:solidFill>
+                  <a:srgbClr val="003B4F"/>
+                </a:solidFill>
+                <a:latin typeface="Courier"/>
+              </a:rPr>
+              <a:t>  </a:t>
+            </a:r>
+            <a:r>
+              <a:rPr>
+                <a:solidFill>
+                  <a:srgbClr val="4758AB"/>
+                </a:solidFill>
+                <a:latin typeface="Courier"/>
+              </a:rPr>
+              <a:t>facet_wrap</a:t>
+            </a:r>
+            <a:r>
+              <a:rPr>
+                <a:solidFill>
+                  <a:srgbClr val="003B4F"/>
+                </a:solidFill>
+                <a:latin typeface="Courier"/>
+              </a:rPr>
+              <a:t>(</a:t>
+            </a:r>
+            <a:r>
+              <a:rPr>
+                <a:solidFill>
+                  <a:srgbClr val="5E5E5E"/>
+                </a:solidFill>
+                <a:latin typeface="Courier"/>
+              </a:rPr>
+              <a:t>~</a:t>
+            </a:r>
+            <a:r>
+              <a:rPr>
+                <a:solidFill>
+                  <a:srgbClr val="003B4F"/>
+                </a:solidFill>
+                <a:latin typeface="Courier"/>
+              </a:rPr>
+              <a:t>variable, </a:t>
+            </a:r>
+            <a:r>
+              <a:rPr>
+                <a:solidFill>
+                  <a:srgbClr val="657422"/>
+                </a:solidFill>
+                <a:latin typeface="Courier"/>
+              </a:rPr>
+              <a:t>scales =</a:t>
+            </a:r>
+            <a:r>
+              <a:rPr>
+                <a:solidFill>
+                  <a:srgbClr val="003B4F"/>
+                </a:solidFill>
+                <a:latin typeface="Courier"/>
+              </a:rPr>
+              <a:t> </a:t>
+            </a:r>
+            <a:r>
+              <a:rPr>
+                <a:solidFill>
+                  <a:srgbClr val="20794D"/>
+                </a:solidFill>
+                <a:latin typeface="Courier"/>
+              </a:rPr>
+              <a:t>"free_y"</a:t>
+            </a:r>
+            <a:r>
+              <a:rPr>
+                <a:solidFill>
+                  <a:srgbClr val="003B4F"/>
+                </a:solidFill>
+                <a:latin typeface="Courier"/>
+              </a:rPr>
+              <a:t>, </a:t>
+            </a:r>
+            <a:r>
+              <a:rPr>
+                <a:solidFill>
+                  <a:srgbClr val="657422"/>
+                </a:solidFill>
+                <a:latin typeface="Courier"/>
+              </a:rPr>
+              <a:t>ncol =</a:t>
+            </a:r>
+            <a:r>
+              <a:rPr>
+                <a:solidFill>
+                  <a:srgbClr val="003B4F"/>
+                </a:solidFill>
+                <a:latin typeface="Courier"/>
+              </a:rPr>
+              <a:t> </a:t>
+            </a:r>
+            <a:r>
+              <a:rPr>
+                <a:solidFill>
+                  <a:srgbClr val="AD0000"/>
+                </a:solidFill>
+                <a:latin typeface="Courier"/>
+              </a:rPr>
+              <a:t>2</a:t>
+            </a:r>
+            <a:r>
+              <a:rPr>
+                <a:solidFill>
+                  <a:srgbClr val="003B4F"/>
+                </a:solidFill>
+                <a:latin typeface="Courier"/>
+              </a:rPr>
+              <a:t>) </a:t>
+            </a:r>
+            <a:r>
+              <a:rPr>
+                <a:solidFill>
+                  <a:srgbClr val="5E5E5E"/>
+                </a:solidFill>
+                <a:latin typeface="Courier"/>
+              </a:rPr>
+              <a:t>+</a:t>
+            </a:r>
+            <a:br/>
+            <a:r>
+              <a:rPr>
+                <a:solidFill>
+                  <a:srgbClr val="003B4F"/>
+                </a:solidFill>
+                <a:latin typeface="Courier"/>
+              </a:rPr>
+              <a:t>  </a:t>
+            </a:r>
+            <a:r>
+              <a:rPr>
+                <a:solidFill>
+                  <a:srgbClr val="4758AB"/>
+                </a:solidFill>
+                <a:latin typeface="Courier"/>
+              </a:rPr>
+              <a:t>theme_minimal</a:t>
+            </a:r>
+            <a:r>
+              <a:rPr>
+                <a:solidFill>
+                  <a:srgbClr val="003B4F"/>
+                </a:solidFill>
+                <a:latin typeface="Courier"/>
+              </a:rPr>
+              <a:t>(</a:t>
+            </a:r>
+            <a:r>
+              <a:rPr>
+                <a:solidFill>
+                  <a:srgbClr val="657422"/>
+                </a:solidFill>
+                <a:latin typeface="Courier"/>
+              </a:rPr>
+              <a:t>base_size =</a:t>
+            </a:r>
+            <a:r>
+              <a:rPr>
+                <a:solidFill>
+                  <a:srgbClr val="003B4F"/>
+                </a:solidFill>
+                <a:latin typeface="Courier"/>
+              </a:rPr>
+              <a:t> </a:t>
+            </a:r>
+            <a:r>
+              <a:rPr>
+                <a:solidFill>
+                  <a:srgbClr val="AD0000"/>
+                </a:solidFill>
+                <a:latin typeface="Courier"/>
+              </a:rPr>
+              <a:t>7</a:t>
+            </a:r>
+            <a:r>
+              <a:rPr>
+                <a:solidFill>
+                  <a:srgbClr val="003B4F"/>
+                </a:solidFill>
+                <a:latin typeface="Courier"/>
+              </a:rPr>
+              <a:t>) </a:t>
+            </a:r>
+            <a:r>
+              <a:rPr>
+                <a:solidFill>
+                  <a:srgbClr val="5E5E5E"/>
+                </a:solidFill>
+                <a:latin typeface="Courier"/>
+              </a:rPr>
+              <a:t>+</a:t>
+            </a:r>
+            <a:br/>
+            <a:r>
+              <a:rPr>
+                <a:solidFill>
+                  <a:srgbClr val="003B4F"/>
+                </a:solidFill>
+                <a:latin typeface="Courier"/>
+              </a:rPr>
+              <a:t>  </a:t>
+            </a:r>
+            <a:r>
+              <a:rPr>
+                <a:solidFill>
+                  <a:srgbClr val="4758AB"/>
+                </a:solidFill>
+                <a:latin typeface="Courier"/>
+              </a:rPr>
+              <a:t>theme</a:t>
+            </a:r>
+            <a:r>
+              <a:rPr>
+                <a:solidFill>
+                  <a:srgbClr val="003B4F"/>
+                </a:solidFill>
+                <a:latin typeface="Courier"/>
+              </a:rPr>
+              <a:t>(</a:t>
+            </a:r>
+            <a:r>
+              <a:rPr>
+                <a:solidFill>
+                  <a:srgbClr val="657422"/>
+                </a:solidFill>
+                <a:latin typeface="Courier"/>
+              </a:rPr>
+              <a:t>legend.position =</a:t>
+            </a:r>
+            <a:r>
+              <a:rPr>
+                <a:solidFill>
+                  <a:srgbClr val="003B4F"/>
+                </a:solidFill>
+                <a:latin typeface="Courier"/>
+              </a:rPr>
+              <a:t> </a:t>
+            </a:r>
+            <a:r>
+              <a:rPr>
+                <a:solidFill>
+                  <a:srgbClr val="20794D"/>
+                </a:solidFill>
+                <a:latin typeface="Courier"/>
+              </a:rPr>
+              <a:t>"none"</a:t>
+            </a:r>
+            <a:r>
+              <a:rPr>
+                <a:solidFill>
+                  <a:srgbClr val="003B4F"/>
+                </a:solidFill>
+                <a:latin typeface="Courier"/>
+              </a:rPr>
+              <a:t>,</a:t>
+            </a:r>
+            <a:br/>
+            <a:r>
+              <a:rPr>
+                <a:solidFill>
+                  <a:srgbClr val="003B4F"/>
+                </a:solidFill>
+                <a:latin typeface="Courier"/>
+              </a:rPr>
+              <a:t>        </a:t>
+            </a:r>
+            <a:r>
+              <a:rPr>
+                <a:solidFill>
+                  <a:srgbClr val="657422"/>
+                </a:solidFill>
+                <a:latin typeface="Courier"/>
+              </a:rPr>
+              <a:t>axis.text.x =</a:t>
+            </a:r>
+            <a:r>
+              <a:rPr>
+                <a:solidFill>
+                  <a:srgbClr val="003B4F"/>
+                </a:solidFill>
+                <a:latin typeface="Courier"/>
+              </a:rPr>
+              <a:t> </a:t>
+            </a:r>
+            <a:r>
+              <a:rPr>
+                <a:solidFill>
+                  <a:srgbClr val="4758AB"/>
+                </a:solidFill>
+                <a:latin typeface="Courier"/>
+              </a:rPr>
+              <a:t>element_text</a:t>
+            </a:r>
+            <a:r>
+              <a:rPr>
+                <a:solidFill>
+                  <a:srgbClr val="003B4F"/>
+                </a:solidFill>
+                <a:latin typeface="Courier"/>
+              </a:rPr>
+              <a:t>(</a:t>
+            </a:r>
+            <a:r>
+              <a:rPr>
+                <a:solidFill>
+                  <a:srgbClr val="657422"/>
+                </a:solidFill>
+                <a:latin typeface="Courier"/>
+              </a:rPr>
+              <a:t>angle =</a:t>
+            </a:r>
+            <a:r>
+              <a:rPr>
+                <a:solidFill>
+                  <a:srgbClr val="003B4F"/>
+                </a:solidFill>
+                <a:latin typeface="Courier"/>
+              </a:rPr>
+              <a:t> </a:t>
+            </a:r>
+            <a:r>
+              <a:rPr>
+                <a:solidFill>
+                  <a:srgbClr val="AD0000"/>
+                </a:solidFill>
+                <a:latin typeface="Courier"/>
+              </a:rPr>
+              <a:t>45</a:t>
+            </a:r>
+            <a:r>
+              <a:rPr>
+                <a:solidFill>
+                  <a:srgbClr val="003B4F"/>
+                </a:solidFill>
+                <a:latin typeface="Courier"/>
+              </a:rPr>
+              <a:t>, </a:t>
+            </a:r>
+            <a:r>
+              <a:rPr>
+                <a:solidFill>
+                  <a:srgbClr val="657422"/>
+                </a:solidFill>
+                <a:latin typeface="Courier"/>
+              </a:rPr>
+              <a:t>hjust =</a:t>
+            </a:r>
+            <a:r>
+              <a:rPr>
+                <a:solidFill>
+                  <a:srgbClr val="003B4F"/>
+                </a:solidFill>
+                <a:latin typeface="Courier"/>
+              </a:rPr>
+              <a:t> </a:t>
+            </a:r>
+            <a:r>
+              <a:rPr>
+                <a:solidFill>
+                  <a:srgbClr val="AD0000"/>
+                </a:solidFill>
+                <a:latin typeface="Courier"/>
+              </a:rPr>
+              <a:t>1</a:t>
+            </a:r>
+            <a:r>
+              <a:rPr>
+                <a:solidFill>
+                  <a:srgbClr val="003B4F"/>
+                </a:solidFill>
+                <a:latin typeface="Courier"/>
+              </a:rPr>
+              <a:t>)) </a:t>
+            </a:r>
+            <a:r>
+              <a:rPr>
+                <a:solidFill>
+                  <a:srgbClr val="5E5E5E"/>
+                </a:solidFill>
+                <a:latin typeface="Courier"/>
+              </a:rPr>
+              <a:t>+</a:t>
+            </a:r>
+            <a:br/>
+            <a:r>
+              <a:rPr>
+                <a:solidFill>
+                  <a:srgbClr val="003B4F"/>
+                </a:solidFill>
+                <a:latin typeface="Courier"/>
+              </a:rPr>
+              <a:t>  </a:t>
+            </a:r>
+            <a:r>
+              <a:rPr>
+                <a:solidFill>
+                  <a:srgbClr val="4758AB"/>
+                </a:solidFill>
+                <a:latin typeface="Courier"/>
+              </a:rPr>
+              <a:t>labs</a:t>
+            </a:r>
+            <a:r>
+              <a:rPr>
+                <a:solidFill>
+                  <a:srgbClr val="003B4F"/>
+                </a:solidFill>
+                <a:latin typeface="Courier"/>
+              </a:rPr>
+              <a:t>(</a:t>
+            </a:r>
+            <a:r>
+              <a:rPr>
+                <a:solidFill>
+                  <a:srgbClr val="657422"/>
+                </a:solidFill>
+                <a:latin typeface="Courier"/>
+              </a:rPr>
+              <a:t>title =</a:t>
+            </a:r>
+            <a:r>
+              <a:rPr>
+                <a:solidFill>
+                  <a:srgbClr val="003B4F"/>
+                </a:solidFill>
+                <a:latin typeface="Courier"/>
+              </a:rPr>
+              <a:t> </a:t>
+            </a:r>
+            <a:r>
+              <a:rPr>
+                <a:solidFill>
+                  <a:srgbClr val="20794D"/>
+                </a:solidFill>
+                <a:latin typeface="Courier"/>
+              </a:rPr>
+              <a:t>"Raw Data by Site"</a:t>
+            </a:r>
+            <a:r>
+              <a:rPr>
+                <a:solidFill>
+                  <a:srgbClr val="003B4F"/>
+                </a:solidFill>
+                <a:latin typeface="Courier"/>
+              </a:rPr>
+              <a:t>,</a:t>
+            </a:r>
+            <a:br/>
+            <a:r>
+              <a:rPr>
+                <a:solidFill>
+                  <a:srgbClr val="003B4F"/>
+                </a:solidFill>
+                <a:latin typeface="Courier"/>
+              </a:rPr>
+              <a:t>       </a:t>
+            </a:r>
+            <a:r>
+              <a:rPr>
+                <a:solidFill>
+                  <a:srgbClr val="657422"/>
+                </a:solidFill>
+                <a:latin typeface="Courier"/>
+              </a:rPr>
+              <a:t>subtitle =</a:t>
+            </a:r>
+            <a:r>
+              <a:rPr>
+                <a:solidFill>
+                  <a:srgbClr val="003B4F"/>
+                </a:solidFill>
+                <a:latin typeface="Courier"/>
+              </a:rPr>
+              <a:t> </a:t>
+            </a:r>
+            <a:r>
+              <a:rPr>
+                <a:solidFill>
+                  <a:srgbClr val="20794D"/>
+                </a:solidFill>
+                <a:latin typeface="Courier"/>
+              </a:rPr>
+              <a:t>"Notice the different scales!"</a:t>
+            </a:r>
+            <a:r>
+              <a:rPr>
+                <a:solidFill>
+                  <a:srgbClr val="003B4F"/>
+                </a:solidFill>
+                <a:latin typeface="Courier"/>
+              </a:rPr>
+              <a:t>)</a:t>
+            </a:r>
+          </a:p>
+          <a:p>
+            <a:pPr lvl="0" indent="0" marL="0">
+              <a:buNone/>
+            </a:pPr>
+            <a:r>
+              <a:rPr/>
+              <a:t>✏️ </a:t>
+            </a:r>
+            <a:r>
+              <a:rPr b="1"/>
+              <a:t>Your turn:</a:t>
+            </a:r>
+            <a:r>
+              <a:rPr/>
+              <a:t> Which variable(s) have the largest values (dominating the raw scale), and which have the smallest? </a:t>
+            </a:r>
+            <a:r>
+              <a:rPr>
+                <a:latin typeface="Courier"/>
+              </a:rPr>
+              <a:t>________________________</a:t>
             </a:r>
           </a:p>
         </p:txBody>
       </p:sp>
-      <p:pic>
-        <p:nvPicPr>
-          <p:cNvPr descr="multivariate_statistics_activity_files/figure-pptx/unnamed-chunk-4-1.png" id="0" name="Picture 1"/>
-          <p:cNvPicPr>
-            <a:picLocks noGrp="1" noChangeAspect="1"/>
-          </p:cNvPicPr>
-          <p:nvPr/>
-        </p:nvPicPr>
-        <p:blipFill>
-          <a:blip r:embed="rId2"/>
-          <a:stretch>
-            <a:fillRect/>
-          </a:stretch>
-        </p:blipFill>
-        <p:spPr bwMode="auto">
-          <a:xfrm>
-            <a:off x="3657600" y="1244600"/>
-            <a:ext cx="5232400" cy="3225800"/>
-          </a:xfrm>
-          <a:prstGeom prst="rect">
-            <a:avLst/>
-          </a:prstGeom>
-          <a:noFill/>
-          <a:ln w="9525">
-            <a:noFill/>
-            <a:headEnd/>
-            <a:tailEnd/>
-          </a:ln>
-        </p:spPr>
-      </p:pic>
     </p:spTree>
   </p:cSld>
 </p:sld>
@@ -3668,36 +5314,1012 @@
           <a:chExt cx="0" cy="0"/>
         </a:xfrm>
       </p:grpSpPr>
-      <p:pic>
-        <p:nvPicPr>
-          <p:cNvPr descr="multivariate_statistics_activity_files/figure-pptx/unnamed-chunk-5-1.png" id="0" name="Picture 1"/>
-          <p:cNvPicPr>
-            <a:picLocks noGrp="1" noChangeAspect="1"/>
-          </p:cNvPicPr>
-          <p:nvPr/>
-        </p:nvPicPr>
-        <p:blipFill>
-          <a:blip r:embed="rId2"/>
-          <a:stretch>
-            <a:fillRect/>
-          </a:stretch>
-        </p:blipFill>
-        <p:spPr bwMode="auto">
+      <p:sp>
+        <p:nvSpPr>
+          <p:cNvPr id="2" name="Title 1"/>
+          <p:cNvSpPr>
+            <a:spLocks noGrp="1"/>
+          </p:cNvSpPr>
+          <p:nvPr>
+            <p:ph type="title"/>
+          </p:nvPr>
+        </p:nvSpPr>
+        <p:spPr>
           <a:xfrm>
-            <a:off x="1358900" y="609600"/>
-            <a:ext cx="6350000" cy="3911600"/>
+            <a:off x="0" y="0"/>
+            <a:ext cx="9144000" cy="582780"/>
           </a:xfrm>
-          <a:prstGeom prst="rect">
-            <a:avLst/>
-          </a:prstGeom>
-          <a:noFill/>
-          <a:ln w="9525">
-            <a:noFill/>
-            <a:headEnd/>
-            <a:tailEnd/>
-          </a:ln>
         </p:spPr>
-      </p:pic>
+        <p:txBody>
+          <a:bodyPr/>
+          <a:lstStyle/>
+          <a:p>
+            <a:pPr lvl="0" indent="0" marL="0">
+              <a:buNone/>
+            </a:pPr>
+            <a:r>
+              <a:rPr/>
+              <a:t>Part 2 · Standardization</a:t>
+            </a:r>
+          </a:p>
+        </p:txBody>
+      </p:sp>
+      <p:sp>
+        <p:nvSpPr>
+          <p:cNvPr id="3" name="Content Placeholder 2"/>
+          <p:cNvSpPr>
+            <a:spLocks noGrp="1"/>
+          </p:cNvSpPr>
+          <p:nvPr>
+            <p:ph idx="1"/>
+          </p:nvPr>
+        </p:nvSpPr>
+        <p:spPr/>
+        <p:txBody>
+          <a:bodyPr/>
+          <a:lstStyle/>
+          <a:p>
+            <a:pPr lvl="0" indent="0" marL="0">
+              <a:buNone/>
+            </a:pPr>
+            <a:r>
+              <a:rPr b="1"/>
+              <a:t>▶ Run this</a:t>
+            </a:r>
+            <a:r>
+              <a:rPr/>
+              <a:t> — check means and SDs by site before standardizing:</a:t>
+            </a:r>
+          </a:p>
+          <a:p>
+            <a:pPr lvl="0" indent="0">
+              <a:buNone/>
+            </a:pPr>
+            <a:r>
+              <a:rPr>
+                <a:solidFill>
+                  <a:srgbClr val="003B4F"/>
+                </a:solidFill>
+                <a:latin typeface="Courier"/>
+              </a:rPr>
+              <a:t>darlingtonia </a:t>
+            </a:r>
+            <a:r>
+              <a:rPr>
+                <a:solidFill>
+                  <a:srgbClr val="5E5E5E"/>
+                </a:solidFill>
+                <a:latin typeface="Courier"/>
+              </a:rPr>
+              <a:t>%&gt;%</a:t>
+            </a:r>
+            <a:br/>
+            <a:r>
+              <a:rPr>
+                <a:solidFill>
+                  <a:srgbClr val="003B4F"/>
+                </a:solidFill>
+                <a:latin typeface="Courier"/>
+              </a:rPr>
+              <a:t>  </a:t>
+            </a:r>
+            <a:r>
+              <a:rPr>
+                <a:solidFill>
+                  <a:srgbClr val="4758AB"/>
+                </a:solidFill>
+                <a:latin typeface="Courier"/>
+              </a:rPr>
+              <a:t>group_by</a:t>
+            </a:r>
+            <a:r>
+              <a:rPr>
+                <a:solidFill>
+                  <a:srgbClr val="003B4F"/>
+                </a:solidFill>
+                <a:latin typeface="Courier"/>
+              </a:rPr>
+              <a:t>(site) </a:t>
+            </a:r>
+            <a:r>
+              <a:rPr>
+                <a:solidFill>
+                  <a:srgbClr val="5E5E5E"/>
+                </a:solidFill>
+                <a:latin typeface="Courier"/>
+              </a:rPr>
+              <a:t>%&gt;%</a:t>
+            </a:r>
+            <a:br/>
+            <a:r>
+              <a:rPr>
+                <a:solidFill>
+                  <a:srgbClr val="003B4F"/>
+                </a:solidFill>
+                <a:latin typeface="Courier"/>
+              </a:rPr>
+              <a:t>  </a:t>
+            </a:r>
+            <a:r>
+              <a:rPr>
+                <a:solidFill>
+                  <a:srgbClr val="4758AB"/>
+                </a:solidFill>
+                <a:latin typeface="Courier"/>
+              </a:rPr>
+              <a:t>summarize</a:t>
+            </a:r>
+            <a:r>
+              <a:rPr>
+                <a:solidFill>
+                  <a:srgbClr val="003B4F"/>
+                </a:solidFill>
+                <a:latin typeface="Courier"/>
+              </a:rPr>
+              <a:t>(</a:t>
+            </a:r>
+            <a:br/>
+            <a:r>
+              <a:rPr>
+                <a:solidFill>
+                  <a:srgbClr val="003B4F"/>
+                </a:solidFill>
+                <a:latin typeface="Courier"/>
+              </a:rPr>
+              <a:t>    </a:t>
+            </a:r>
+            <a:r>
+              <a:rPr>
+                <a:solidFill>
+                  <a:srgbClr val="657422"/>
+                </a:solidFill>
+                <a:latin typeface="Courier"/>
+              </a:rPr>
+              <a:t>mean_height =</a:t>
+            </a:r>
+            <a:r>
+              <a:rPr>
+                <a:solidFill>
+                  <a:srgbClr val="003B4F"/>
+                </a:solidFill>
+                <a:latin typeface="Courier"/>
+              </a:rPr>
+              <a:t> </a:t>
+            </a:r>
+            <a:r>
+              <a:rPr>
+                <a:solidFill>
+                  <a:srgbClr val="4758AB"/>
+                </a:solidFill>
+                <a:latin typeface="Courier"/>
+              </a:rPr>
+              <a:t>mean</a:t>
+            </a:r>
+            <a:r>
+              <a:rPr>
+                <a:solidFill>
+                  <a:srgbClr val="003B4F"/>
+                </a:solidFill>
+                <a:latin typeface="Courier"/>
+              </a:rPr>
+              <a:t>(height),</a:t>
+            </a:r>
+            <a:br/>
+            <a:r>
+              <a:rPr>
+                <a:solidFill>
+                  <a:srgbClr val="003B4F"/>
+                </a:solidFill>
+                <a:latin typeface="Courier"/>
+              </a:rPr>
+              <a:t>    </a:t>
+            </a:r>
+            <a:r>
+              <a:rPr>
+                <a:solidFill>
+                  <a:srgbClr val="657422"/>
+                </a:solidFill>
+                <a:latin typeface="Courier"/>
+              </a:rPr>
+              <a:t>sd_height =</a:t>
+            </a:r>
+            <a:r>
+              <a:rPr>
+                <a:solidFill>
+                  <a:srgbClr val="003B4F"/>
+                </a:solidFill>
+                <a:latin typeface="Courier"/>
+              </a:rPr>
+              <a:t> </a:t>
+            </a:r>
+            <a:r>
+              <a:rPr>
+                <a:solidFill>
+                  <a:srgbClr val="4758AB"/>
+                </a:solidFill>
+                <a:latin typeface="Courier"/>
+              </a:rPr>
+              <a:t>sd</a:t>
+            </a:r>
+            <a:r>
+              <a:rPr>
+                <a:solidFill>
+                  <a:srgbClr val="003B4F"/>
+                </a:solidFill>
+                <a:latin typeface="Courier"/>
+              </a:rPr>
+              <a:t>(height),</a:t>
+            </a:r>
+            <a:br/>
+            <a:r>
+              <a:rPr>
+                <a:solidFill>
+                  <a:srgbClr val="003B4F"/>
+                </a:solidFill>
+                <a:latin typeface="Courier"/>
+              </a:rPr>
+              <a:t>    </a:t>
+            </a:r>
+            <a:r>
+              <a:rPr>
+                <a:solidFill>
+                  <a:srgbClr val="657422"/>
+                </a:solidFill>
+                <a:latin typeface="Courier"/>
+              </a:rPr>
+              <a:t>mean_wingmass =</a:t>
+            </a:r>
+            <a:r>
+              <a:rPr>
+                <a:solidFill>
+                  <a:srgbClr val="003B4F"/>
+                </a:solidFill>
+                <a:latin typeface="Courier"/>
+              </a:rPr>
+              <a:t> </a:t>
+            </a:r>
+            <a:r>
+              <a:rPr>
+                <a:solidFill>
+                  <a:srgbClr val="4758AB"/>
+                </a:solidFill>
+                <a:latin typeface="Courier"/>
+              </a:rPr>
+              <a:t>mean</a:t>
+            </a:r>
+            <a:r>
+              <a:rPr>
+                <a:solidFill>
+                  <a:srgbClr val="003B4F"/>
+                </a:solidFill>
+                <a:latin typeface="Courier"/>
+              </a:rPr>
+              <a:t>(wingmass_g),</a:t>
+            </a:r>
+            <a:br/>
+            <a:r>
+              <a:rPr>
+                <a:solidFill>
+                  <a:srgbClr val="003B4F"/>
+                </a:solidFill>
+                <a:latin typeface="Courier"/>
+              </a:rPr>
+              <a:t>    </a:t>
+            </a:r>
+            <a:r>
+              <a:rPr>
+                <a:solidFill>
+                  <a:srgbClr val="657422"/>
+                </a:solidFill>
+                <a:latin typeface="Courier"/>
+              </a:rPr>
+              <a:t>sd_wingmass =</a:t>
+            </a:r>
+            <a:r>
+              <a:rPr>
+                <a:solidFill>
+                  <a:srgbClr val="003B4F"/>
+                </a:solidFill>
+                <a:latin typeface="Courier"/>
+              </a:rPr>
+              <a:t> </a:t>
+            </a:r>
+            <a:r>
+              <a:rPr>
+                <a:solidFill>
+                  <a:srgbClr val="4758AB"/>
+                </a:solidFill>
+                <a:latin typeface="Courier"/>
+              </a:rPr>
+              <a:t>sd</a:t>
+            </a:r>
+            <a:r>
+              <a:rPr>
+                <a:solidFill>
+                  <a:srgbClr val="003B4F"/>
+                </a:solidFill>
+                <a:latin typeface="Courier"/>
+              </a:rPr>
+              <a:t>(wingmass_g)</a:t>
+            </a:r>
+            <a:br/>
+            <a:r>
+              <a:rPr>
+                <a:solidFill>
+                  <a:srgbClr val="003B4F"/>
+                </a:solidFill>
+                <a:latin typeface="Courier"/>
+              </a:rPr>
+              <a:t>  )</a:t>
+            </a:r>
+            <a:br/>
+            <a:br/>
+            <a:r>
+              <a:rPr>
+                <a:solidFill>
+                  <a:srgbClr val="5E5E5E"/>
+                </a:solidFill>
+                <a:latin typeface="Courier"/>
+              </a:rPr>
+              <a:t># After standardization, both will have:</a:t>
+            </a:r>
+            <a:br/>
+            <a:r>
+              <a:rPr>
+                <a:solidFill>
+                  <a:srgbClr val="5E5E5E"/>
+                </a:solidFill>
+                <a:latin typeface="Courier"/>
+              </a:rPr>
+              <a:t># mean = 0, sd = 1</a:t>
+            </a:r>
+          </a:p>
+          <a:p>
+            <a:pPr lvl="0" indent="0" marL="0">
+              <a:buNone/>
+            </a:pPr>
+            <a:r>
+              <a:rPr b="1"/>
+              <a:t>▶ Run this</a:t>
+            </a:r>
+            <a:r>
+              <a:rPr/>
+              <a:t> — standardize all numeric variables and visualize:</a:t>
+            </a:r>
+          </a:p>
+          <a:p>
+            <a:pPr lvl="0" indent="0">
+              <a:buNone/>
+            </a:pPr>
+            <a:r>
+              <a:rPr>
+                <a:solidFill>
+                  <a:srgbClr val="003B4F"/>
+                </a:solidFill>
+                <a:latin typeface="Courier"/>
+              </a:rPr>
+              <a:t>darl_numeric &lt;- darlingtonia </a:t>
+            </a:r>
+            <a:r>
+              <a:rPr>
+                <a:solidFill>
+                  <a:srgbClr val="5E5E5E"/>
+                </a:solidFill>
+                <a:latin typeface="Courier"/>
+              </a:rPr>
+              <a:t>%&gt;%</a:t>
+            </a:r>
+            <a:br/>
+            <a:r>
+              <a:rPr>
+                <a:solidFill>
+                  <a:srgbClr val="003B4F"/>
+                </a:solidFill>
+                <a:latin typeface="Courier"/>
+              </a:rPr>
+              <a:t>  dplyr</a:t>
+            </a:r>
+            <a:r>
+              <a:rPr>
+                <a:solidFill>
+                  <a:srgbClr val="5E5E5E"/>
+                </a:solidFill>
+                <a:latin typeface="Courier"/>
+              </a:rPr>
+              <a:t>::</a:t>
+            </a:r>
+            <a:r>
+              <a:rPr>
+                <a:solidFill>
+                  <a:srgbClr val="4758AB"/>
+                </a:solidFill>
+                <a:latin typeface="Courier"/>
+              </a:rPr>
+              <a:t>select</a:t>
+            </a:r>
+            <a:r>
+              <a:rPr>
+                <a:solidFill>
+                  <a:srgbClr val="003B4F"/>
+                </a:solidFill>
+                <a:latin typeface="Courier"/>
+              </a:rPr>
+              <a:t>(</a:t>
+            </a:r>
+            <a:r>
+              <a:rPr>
+                <a:solidFill>
+                  <a:srgbClr val="5E5E5E"/>
+                </a:solidFill>
+                <a:latin typeface="Courier"/>
+              </a:rPr>
+              <a:t>-</a:t>
+            </a:r>
+            <a:r>
+              <a:rPr>
+                <a:solidFill>
+                  <a:srgbClr val="003B4F"/>
+                </a:solidFill>
+                <a:latin typeface="Courier"/>
+              </a:rPr>
+              <a:t>site)</a:t>
+            </a:r>
+            <a:br/>
+            <a:br/>
+            <a:r>
+              <a:rPr>
+                <a:solidFill>
+                  <a:srgbClr val="5E5E5E"/>
+                </a:solidFill>
+                <a:latin typeface="Courier"/>
+              </a:rPr>
+              <a:t># Standardize using scale() - centers (mean=0) and scales (sd=1) each variable</a:t>
+            </a:r>
+            <a:br/>
+            <a:r>
+              <a:rPr>
+                <a:solidFill>
+                  <a:srgbClr val="003B4F"/>
+                </a:solidFill>
+                <a:latin typeface="Courier"/>
+              </a:rPr>
+              <a:t>darl_scaled &lt;- </a:t>
+            </a:r>
+            <a:r>
+              <a:rPr>
+                <a:solidFill>
+                  <a:srgbClr val="4758AB"/>
+                </a:solidFill>
+                <a:latin typeface="Courier"/>
+              </a:rPr>
+              <a:t>scale</a:t>
+            </a:r>
+            <a:r>
+              <a:rPr>
+                <a:solidFill>
+                  <a:srgbClr val="003B4F"/>
+                </a:solidFill>
+                <a:latin typeface="Courier"/>
+              </a:rPr>
+              <a:t>(darl_numeric)</a:t>
+            </a:r>
+            <a:br/>
+            <a:br/>
+            <a:r>
+              <a:rPr>
+                <a:solidFill>
+                  <a:srgbClr val="003B4F"/>
+                </a:solidFill>
+                <a:latin typeface="Courier"/>
+              </a:rPr>
+              <a:t>darl_scaled_df &lt;- </a:t>
+            </a:r>
+            <a:r>
+              <a:rPr>
+                <a:solidFill>
+                  <a:srgbClr val="4758AB"/>
+                </a:solidFill>
+                <a:latin typeface="Courier"/>
+              </a:rPr>
+              <a:t>as.data.frame</a:t>
+            </a:r>
+            <a:r>
+              <a:rPr>
+                <a:solidFill>
+                  <a:srgbClr val="003B4F"/>
+                </a:solidFill>
+                <a:latin typeface="Courier"/>
+              </a:rPr>
+              <a:t>(darl_scaled)</a:t>
+            </a:r>
+            <a:br/>
+            <a:br/>
+            <a:r>
+              <a:rPr>
+                <a:solidFill>
+                  <a:srgbClr val="003B4F"/>
+                </a:solidFill>
+                <a:latin typeface="Courier"/>
+              </a:rPr>
+              <a:t>darl_scaled_df </a:t>
+            </a:r>
+            <a:r>
+              <a:rPr>
+                <a:solidFill>
+                  <a:srgbClr val="5E5E5E"/>
+                </a:solidFill>
+                <a:latin typeface="Courier"/>
+              </a:rPr>
+              <a:t>%&gt;%</a:t>
+            </a:r>
+            <a:br/>
+            <a:r>
+              <a:rPr>
+                <a:solidFill>
+                  <a:srgbClr val="003B4F"/>
+                </a:solidFill>
+                <a:latin typeface="Courier"/>
+              </a:rPr>
+              <a:t>  </a:t>
+            </a:r>
+            <a:r>
+              <a:rPr>
+                <a:solidFill>
+                  <a:srgbClr val="4758AB"/>
+                </a:solidFill>
+                <a:latin typeface="Courier"/>
+              </a:rPr>
+              <a:t>select</a:t>
+            </a:r>
+            <a:r>
+              <a:rPr>
+                <a:solidFill>
+                  <a:srgbClr val="003B4F"/>
+                </a:solidFill>
+                <a:latin typeface="Courier"/>
+              </a:rPr>
+              <a:t>(height, mouth_diam, wingmass_g) </a:t>
+            </a:r>
+            <a:r>
+              <a:rPr>
+                <a:solidFill>
+                  <a:srgbClr val="5E5E5E"/>
+                </a:solidFill>
+                <a:latin typeface="Courier"/>
+              </a:rPr>
+              <a:t>%&gt;%</a:t>
+            </a:r>
+            <a:br/>
+            <a:r>
+              <a:rPr>
+                <a:solidFill>
+                  <a:srgbClr val="003B4F"/>
+                </a:solidFill>
+                <a:latin typeface="Courier"/>
+              </a:rPr>
+              <a:t>  </a:t>
+            </a:r>
+            <a:r>
+              <a:rPr>
+                <a:solidFill>
+                  <a:srgbClr val="4758AB"/>
+                </a:solidFill>
+                <a:latin typeface="Courier"/>
+              </a:rPr>
+              <a:t>pivot_longer</a:t>
+            </a:r>
+            <a:r>
+              <a:rPr>
+                <a:solidFill>
+                  <a:srgbClr val="003B4F"/>
+                </a:solidFill>
+                <a:latin typeface="Courier"/>
+              </a:rPr>
+              <a:t>(</a:t>
+            </a:r>
+            <a:r>
+              <a:rPr>
+                <a:solidFill>
+                  <a:srgbClr val="657422"/>
+                </a:solidFill>
+                <a:latin typeface="Courier"/>
+              </a:rPr>
+              <a:t>cols =</a:t>
+            </a:r>
+            <a:r>
+              <a:rPr>
+                <a:solidFill>
+                  <a:srgbClr val="003B4F"/>
+                </a:solidFill>
+                <a:latin typeface="Courier"/>
+              </a:rPr>
+              <a:t> </a:t>
+            </a:r>
+            <a:r>
+              <a:rPr>
+                <a:solidFill>
+                  <a:srgbClr val="4758AB"/>
+                </a:solidFill>
+                <a:latin typeface="Courier"/>
+              </a:rPr>
+              <a:t>c</a:t>
+            </a:r>
+            <a:r>
+              <a:rPr>
+                <a:solidFill>
+                  <a:srgbClr val="003B4F"/>
+                </a:solidFill>
+                <a:latin typeface="Courier"/>
+              </a:rPr>
+              <a:t>(height, mouth_diam, wingmass_g), </a:t>
+            </a:r>
+            <a:r>
+              <a:rPr>
+                <a:solidFill>
+                  <a:srgbClr val="657422"/>
+                </a:solidFill>
+                <a:latin typeface="Courier"/>
+              </a:rPr>
+              <a:t>names_to =</a:t>
+            </a:r>
+            <a:r>
+              <a:rPr>
+                <a:solidFill>
+                  <a:srgbClr val="003B4F"/>
+                </a:solidFill>
+                <a:latin typeface="Courier"/>
+              </a:rPr>
+              <a:t> </a:t>
+            </a:r>
+            <a:r>
+              <a:rPr>
+                <a:solidFill>
+                  <a:srgbClr val="20794D"/>
+                </a:solidFill>
+                <a:latin typeface="Courier"/>
+              </a:rPr>
+              <a:t>"variable"</a:t>
+            </a:r>
+            <a:r>
+              <a:rPr>
+                <a:solidFill>
+                  <a:srgbClr val="003B4F"/>
+                </a:solidFill>
+                <a:latin typeface="Courier"/>
+              </a:rPr>
+              <a:t>, </a:t>
+            </a:r>
+            <a:r>
+              <a:rPr>
+                <a:solidFill>
+                  <a:srgbClr val="657422"/>
+                </a:solidFill>
+                <a:latin typeface="Courier"/>
+              </a:rPr>
+              <a:t>values_to =</a:t>
+            </a:r>
+            <a:r>
+              <a:rPr>
+                <a:solidFill>
+                  <a:srgbClr val="003B4F"/>
+                </a:solidFill>
+                <a:latin typeface="Courier"/>
+              </a:rPr>
+              <a:t> </a:t>
+            </a:r>
+            <a:r>
+              <a:rPr>
+                <a:solidFill>
+                  <a:srgbClr val="20794D"/>
+                </a:solidFill>
+                <a:latin typeface="Courier"/>
+              </a:rPr>
+              <a:t>"value"</a:t>
+            </a:r>
+            <a:r>
+              <a:rPr>
+                <a:solidFill>
+                  <a:srgbClr val="003B4F"/>
+                </a:solidFill>
+                <a:latin typeface="Courier"/>
+              </a:rPr>
+              <a:t>) </a:t>
+            </a:r>
+            <a:r>
+              <a:rPr>
+                <a:solidFill>
+                  <a:srgbClr val="5E5E5E"/>
+                </a:solidFill>
+                <a:latin typeface="Courier"/>
+              </a:rPr>
+              <a:t>%&gt;%</a:t>
+            </a:r>
+            <a:br/>
+            <a:r>
+              <a:rPr>
+                <a:solidFill>
+                  <a:srgbClr val="003B4F"/>
+                </a:solidFill>
+                <a:latin typeface="Courier"/>
+              </a:rPr>
+              <a:t>  </a:t>
+            </a:r>
+            <a:r>
+              <a:rPr>
+                <a:solidFill>
+                  <a:srgbClr val="4758AB"/>
+                </a:solidFill>
+                <a:latin typeface="Courier"/>
+              </a:rPr>
+              <a:t>ggplot</a:t>
+            </a:r>
+            <a:r>
+              <a:rPr>
+                <a:solidFill>
+                  <a:srgbClr val="003B4F"/>
+                </a:solidFill>
+                <a:latin typeface="Courier"/>
+              </a:rPr>
+              <a:t>(</a:t>
+            </a:r>
+            <a:r>
+              <a:rPr>
+                <a:solidFill>
+                  <a:srgbClr val="4758AB"/>
+                </a:solidFill>
+                <a:latin typeface="Courier"/>
+              </a:rPr>
+              <a:t>aes</a:t>
+            </a:r>
+            <a:r>
+              <a:rPr>
+                <a:solidFill>
+                  <a:srgbClr val="003B4F"/>
+                </a:solidFill>
+                <a:latin typeface="Courier"/>
+              </a:rPr>
+              <a:t>(</a:t>
+            </a:r>
+            <a:r>
+              <a:rPr>
+                <a:solidFill>
+                  <a:srgbClr val="657422"/>
+                </a:solidFill>
+                <a:latin typeface="Courier"/>
+              </a:rPr>
+              <a:t>x =</a:t>
+            </a:r>
+            <a:r>
+              <a:rPr>
+                <a:solidFill>
+                  <a:srgbClr val="003B4F"/>
+                </a:solidFill>
+                <a:latin typeface="Courier"/>
+              </a:rPr>
+              <a:t> variable, </a:t>
+            </a:r>
+            <a:r>
+              <a:rPr>
+                <a:solidFill>
+                  <a:srgbClr val="657422"/>
+                </a:solidFill>
+                <a:latin typeface="Courier"/>
+              </a:rPr>
+              <a:t>y =</a:t>
+            </a:r>
+            <a:r>
+              <a:rPr>
+                <a:solidFill>
+                  <a:srgbClr val="003B4F"/>
+                </a:solidFill>
+                <a:latin typeface="Courier"/>
+              </a:rPr>
+              <a:t> value, </a:t>
+            </a:r>
+            <a:r>
+              <a:rPr>
+                <a:solidFill>
+                  <a:srgbClr val="657422"/>
+                </a:solidFill>
+                <a:latin typeface="Courier"/>
+              </a:rPr>
+              <a:t>fill =</a:t>
+            </a:r>
+            <a:r>
+              <a:rPr>
+                <a:solidFill>
+                  <a:srgbClr val="003B4F"/>
+                </a:solidFill>
+                <a:latin typeface="Courier"/>
+              </a:rPr>
+              <a:t> variable)) </a:t>
+            </a:r>
+            <a:r>
+              <a:rPr>
+                <a:solidFill>
+                  <a:srgbClr val="5E5E5E"/>
+                </a:solidFill>
+                <a:latin typeface="Courier"/>
+              </a:rPr>
+              <a:t>+</a:t>
+            </a:r>
+            <a:br/>
+            <a:r>
+              <a:rPr>
+                <a:solidFill>
+                  <a:srgbClr val="003B4F"/>
+                </a:solidFill>
+                <a:latin typeface="Courier"/>
+              </a:rPr>
+              <a:t>  </a:t>
+            </a:r>
+            <a:r>
+              <a:rPr>
+                <a:solidFill>
+                  <a:srgbClr val="4758AB"/>
+                </a:solidFill>
+                <a:latin typeface="Courier"/>
+              </a:rPr>
+              <a:t>geom_boxplot</a:t>
+            </a:r>
+            <a:r>
+              <a:rPr>
+                <a:solidFill>
+                  <a:srgbClr val="003B4F"/>
+                </a:solidFill>
+                <a:latin typeface="Courier"/>
+              </a:rPr>
+              <a:t>() </a:t>
+            </a:r>
+            <a:r>
+              <a:rPr>
+                <a:solidFill>
+                  <a:srgbClr val="5E5E5E"/>
+                </a:solidFill>
+                <a:latin typeface="Courier"/>
+              </a:rPr>
+              <a:t>+</a:t>
+            </a:r>
+            <a:br/>
+            <a:r>
+              <a:rPr>
+                <a:solidFill>
+                  <a:srgbClr val="003B4F"/>
+                </a:solidFill>
+                <a:latin typeface="Courier"/>
+              </a:rPr>
+              <a:t>  </a:t>
+            </a:r>
+            <a:r>
+              <a:rPr>
+                <a:solidFill>
+                  <a:srgbClr val="4758AB"/>
+                </a:solidFill>
+                <a:latin typeface="Courier"/>
+              </a:rPr>
+              <a:t>labs</a:t>
+            </a:r>
+            <a:r>
+              <a:rPr>
+                <a:solidFill>
+                  <a:srgbClr val="003B4F"/>
+                </a:solidFill>
+                <a:latin typeface="Courier"/>
+              </a:rPr>
+              <a:t>(</a:t>
+            </a:r>
+            <a:r>
+              <a:rPr>
+                <a:solidFill>
+                  <a:srgbClr val="657422"/>
+                </a:solidFill>
+                <a:latin typeface="Courier"/>
+              </a:rPr>
+              <a:t>title =</a:t>
+            </a:r>
+            <a:r>
+              <a:rPr>
+                <a:solidFill>
+                  <a:srgbClr val="003B4F"/>
+                </a:solidFill>
+                <a:latin typeface="Courier"/>
+              </a:rPr>
+              <a:t> </a:t>
+            </a:r>
+            <a:r>
+              <a:rPr>
+                <a:solidFill>
+                  <a:srgbClr val="20794D"/>
+                </a:solidFill>
+                <a:latin typeface="Courier"/>
+              </a:rPr>
+              <a:t>"Standardized Data (same scale)"</a:t>
+            </a:r>
+            <a:r>
+              <a:rPr>
+                <a:solidFill>
+                  <a:srgbClr val="003B4F"/>
+                </a:solidFill>
+                <a:latin typeface="Courier"/>
+              </a:rPr>
+              <a:t>) </a:t>
+            </a:r>
+            <a:r>
+              <a:rPr>
+                <a:solidFill>
+                  <a:srgbClr val="5E5E5E"/>
+                </a:solidFill>
+                <a:latin typeface="Courier"/>
+              </a:rPr>
+              <a:t>+</a:t>
+            </a:r>
+            <a:br/>
+            <a:r>
+              <a:rPr>
+                <a:solidFill>
+                  <a:srgbClr val="003B4F"/>
+                </a:solidFill>
+                <a:latin typeface="Courier"/>
+              </a:rPr>
+              <a:t>  </a:t>
+            </a:r>
+            <a:r>
+              <a:rPr>
+                <a:solidFill>
+                  <a:srgbClr val="4758AB"/>
+                </a:solidFill>
+                <a:latin typeface="Courier"/>
+              </a:rPr>
+              <a:t>theme</a:t>
+            </a:r>
+            <a:r>
+              <a:rPr>
+                <a:solidFill>
+                  <a:srgbClr val="003B4F"/>
+                </a:solidFill>
+                <a:latin typeface="Courier"/>
+              </a:rPr>
+              <a:t>(</a:t>
+            </a:r>
+            <a:r>
+              <a:rPr>
+                <a:solidFill>
+                  <a:srgbClr val="657422"/>
+                </a:solidFill>
+                <a:latin typeface="Courier"/>
+              </a:rPr>
+              <a:t>legend.position =</a:t>
+            </a:r>
+            <a:r>
+              <a:rPr>
+                <a:solidFill>
+                  <a:srgbClr val="003B4F"/>
+                </a:solidFill>
+                <a:latin typeface="Courier"/>
+              </a:rPr>
+              <a:t> </a:t>
+            </a:r>
+            <a:r>
+              <a:rPr>
+                <a:solidFill>
+                  <a:srgbClr val="20794D"/>
+                </a:solidFill>
+                <a:latin typeface="Courier"/>
+              </a:rPr>
+              <a:t>"none"</a:t>
+            </a:r>
+            <a:r>
+              <a:rPr>
+                <a:solidFill>
+                  <a:srgbClr val="003B4F"/>
+                </a:solidFill>
+                <a:latin typeface="Courier"/>
+              </a:rPr>
+              <a:t>)</a:t>
+            </a:r>
+          </a:p>
+        </p:txBody>
+      </p:sp>
     </p:spTree>
   </p:cSld>
 </p:sld>
@@ -3722,12 +6344,42 @@
       </p:grpSpPr>
       <p:sp>
         <p:nvSpPr>
-          <p:cNvPr id="4" name="Text Placeholder 3"/>
+          <p:cNvPr id="2" name="Title 1"/>
           <p:cNvSpPr>
             <a:spLocks noGrp="1"/>
           </p:cNvSpPr>
           <p:nvPr>
-            <p:ph idx="2" sz="half" type="body"/>
+            <p:ph type="title"/>
+          </p:nvPr>
+        </p:nvSpPr>
+        <p:spPr>
+          <a:xfrm>
+            <a:off x="0" y="0"/>
+            <a:ext cx="9144000" cy="582780"/>
+          </a:xfrm>
+        </p:spPr>
+        <p:txBody>
+          <a:bodyPr/>
+          <a:lstStyle/>
+          <a:p>
+            <a:pPr lvl="0" indent="0" marL="0">
+              <a:buNone/>
+            </a:pPr>
+            <a:r>
+              <a:rPr/>
+              <a:t>Part 3 · Correlations</a:t>
+            </a:r>
+          </a:p>
+        </p:txBody>
+      </p:sp>
+      <p:sp>
+        <p:nvSpPr>
+          <p:cNvPr id="3" name="Content Placeholder 2"/>
+          <p:cNvSpPr>
+            <a:spLocks noGrp="1"/>
+          </p:cNvSpPr>
+          <p:nvPr>
+            <p:ph idx="1"/>
           </p:nvPr>
         </p:nvSpPr>
         <p:spPr/>
@@ -3735,88 +6387,633 @@
           <a:bodyPr/>
           <a:lstStyle/>
           <a:p>
+            <a:pPr lvl="0" indent="0" marL="0">
+              <a:buNone/>
+            </a:pPr>
+            <a:r>
+              <a:rPr b="1"/>
+              <a:t>▶ Run this:</a:t>
+            </a:r>
+          </a:p>
+          <a:p>
             <a:pPr lvl="0" indent="0">
               <a:buNone/>
             </a:pPr>
             <a:r>
               <a:rPr>
-                <a:latin typeface="Courier"/>
-              </a:rPr>
-              <a:t>             height mouth_diam tube_diam keel_diam wing1_length wing2_length
-height         1.00       0.61      0.24     -0.06         0.28         0.29
-mouth_diam     0.61       1.00     -0.05     -0.39         0.57         0.44
-tube_diam      0.24      -0.05      1.00      0.65        -0.09         0.01
-keel_diam     -0.06      -0.39      0.65      1.00        -0.35        -0.24
-wing1_length   0.28       0.57     -0.09     -0.35         1.00         0.84
-wing2_length   0.29       0.44      0.01     -0.24         0.84         1.00
-wingsprea      0.12       0.25      0.10     -0.19         0.64         0.71
-hoodmass_g     0.49       0.76     -0.11     -0.34         0.61         0.49
-tubemass_g     0.84       0.72      0.10     -0.24         0.44         0.36
-wingmass_g     0.40       0.62     -0.16     -0.36         0.76         0.69
-             wingsprea hoodmass_g tubemass_g wingmass_g
-height            0.12       0.49       0.84       0.40
-mouth_diam        0.25       0.76       0.72       0.62
-tube_diam         0.10      -0.11       0.10      -0.16
-keel_diam        -0.19      -0.34      -0.24      -0.36
-wing1_length      0.64       0.61       0.44       0.76
-wing2_length      0.71       0.49       0.36       0.69
-wingsprea         1.00       0.25       0.16       0.39
-hoodmass_g        0.25       1.00       0.76       0.80
-tubemass_g        0.16       0.76       1.00       0.63
-wingmass_g        0.39       0.80       0.63       1.00</a:t>
-            </a:r>
-          </a:p>
-          <a:p>
-            <a:pPr lvl="0" indent="0">
+                <a:solidFill>
+                  <a:srgbClr val="003B4F"/>
+                </a:solidFill>
+                <a:latin typeface="Courier"/>
+              </a:rPr>
+              <a:t>cor_matrix &lt;- </a:t>
+            </a:r>
+            <a:r>
+              <a:rPr>
+                <a:solidFill>
+                  <a:srgbClr val="4758AB"/>
+                </a:solidFill>
+                <a:latin typeface="Courier"/>
+              </a:rPr>
+              <a:t>cor</a:t>
+            </a:r>
+            <a:r>
+              <a:rPr>
+                <a:solidFill>
+                  <a:srgbClr val="003B4F"/>
+                </a:solidFill>
+                <a:latin typeface="Courier"/>
+              </a:rPr>
+              <a:t>(darl_numeric)</a:t>
+            </a:r>
+            <a:br/>
+            <a:br/>
+            <a:r>
+              <a:rPr>
+                <a:solidFill>
+                  <a:srgbClr val="4758AB"/>
+                </a:solidFill>
+                <a:latin typeface="Courier"/>
+              </a:rPr>
+              <a:t>corrplot</a:t>
+            </a:r>
+            <a:r>
+              <a:rPr>
+                <a:solidFill>
+                  <a:srgbClr val="003B4F"/>
+                </a:solidFill>
+                <a:latin typeface="Courier"/>
+              </a:rPr>
+              <a:t>(cor_matrix,</a:t>
+            </a:r>
+            <a:br/>
+            <a:r>
+              <a:rPr>
+                <a:solidFill>
+                  <a:srgbClr val="003B4F"/>
+                </a:solidFill>
+                <a:latin typeface="Courier"/>
+              </a:rPr>
+              <a:t>         </a:t>
+            </a:r>
+            <a:r>
+              <a:rPr>
+                <a:solidFill>
+                  <a:srgbClr val="657422"/>
+                </a:solidFill>
+                <a:latin typeface="Courier"/>
+              </a:rPr>
+              <a:t>method =</a:t>
+            </a:r>
+            <a:r>
+              <a:rPr>
+                <a:solidFill>
+                  <a:srgbClr val="003B4F"/>
+                </a:solidFill>
+                <a:latin typeface="Courier"/>
+              </a:rPr>
+              <a:t> </a:t>
+            </a:r>
+            <a:r>
+              <a:rPr>
+                <a:solidFill>
+                  <a:srgbClr val="20794D"/>
+                </a:solidFill>
+                <a:latin typeface="Courier"/>
+              </a:rPr>
+              <a:t>"color"</a:t>
+            </a:r>
+            <a:r>
+              <a:rPr>
+                <a:solidFill>
+                  <a:srgbClr val="003B4F"/>
+                </a:solidFill>
+                <a:latin typeface="Courier"/>
+              </a:rPr>
+              <a:t>,</a:t>
+            </a:r>
+            <a:br/>
+            <a:r>
+              <a:rPr>
+                <a:solidFill>
+                  <a:srgbClr val="003B4F"/>
+                </a:solidFill>
+                <a:latin typeface="Courier"/>
+              </a:rPr>
+              <a:t>         </a:t>
+            </a:r>
+            <a:r>
+              <a:rPr>
+                <a:solidFill>
+                  <a:srgbClr val="657422"/>
+                </a:solidFill>
+                <a:latin typeface="Courier"/>
+              </a:rPr>
+              <a:t>type =</a:t>
+            </a:r>
+            <a:r>
+              <a:rPr>
+                <a:solidFill>
+                  <a:srgbClr val="003B4F"/>
+                </a:solidFill>
+                <a:latin typeface="Courier"/>
+              </a:rPr>
+              <a:t> </a:t>
+            </a:r>
+            <a:r>
+              <a:rPr>
+                <a:solidFill>
+                  <a:srgbClr val="20794D"/>
+                </a:solidFill>
+                <a:latin typeface="Courier"/>
+              </a:rPr>
+              <a:t>"upper"</a:t>
+            </a:r>
+            <a:r>
+              <a:rPr>
+                <a:solidFill>
+                  <a:srgbClr val="003B4F"/>
+                </a:solidFill>
+                <a:latin typeface="Courier"/>
+              </a:rPr>
+              <a:t>,</a:t>
+            </a:r>
+            <a:br/>
+            <a:r>
+              <a:rPr>
+                <a:solidFill>
+                  <a:srgbClr val="003B4F"/>
+                </a:solidFill>
+                <a:latin typeface="Courier"/>
+              </a:rPr>
+              <a:t>         </a:t>
+            </a:r>
+            <a:r>
+              <a:rPr>
+                <a:solidFill>
+                  <a:srgbClr val="657422"/>
+                </a:solidFill>
+                <a:latin typeface="Courier"/>
+              </a:rPr>
+              <a:t>order =</a:t>
+            </a:r>
+            <a:r>
+              <a:rPr>
+                <a:solidFill>
+                  <a:srgbClr val="003B4F"/>
+                </a:solidFill>
+                <a:latin typeface="Courier"/>
+              </a:rPr>
+              <a:t> </a:t>
+            </a:r>
+            <a:r>
+              <a:rPr>
+                <a:solidFill>
+                  <a:srgbClr val="20794D"/>
+                </a:solidFill>
+                <a:latin typeface="Courier"/>
+              </a:rPr>
+              <a:t>"hclust"</a:t>
+            </a:r>
+            <a:r>
+              <a:rPr>
+                <a:solidFill>
+                  <a:srgbClr val="003B4F"/>
+                </a:solidFill>
+                <a:latin typeface="Courier"/>
+              </a:rPr>
+              <a:t>,</a:t>
+            </a:r>
+            <a:br/>
+            <a:r>
+              <a:rPr>
+                <a:solidFill>
+                  <a:srgbClr val="003B4F"/>
+                </a:solidFill>
+                <a:latin typeface="Courier"/>
+              </a:rPr>
+              <a:t>         </a:t>
+            </a:r>
+            <a:r>
+              <a:rPr>
+                <a:solidFill>
+                  <a:srgbClr val="657422"/>
+                </a:solidFill>
+                <a:latin typeface="Courier"/>
+              </a:rPr>
+              <a:t>tl.col =</a:t>
+            </a:r>
+            <a:r>
+              <a:rPr>
+                <a:solidFill>
+                  <a:srgbClr val="003B4F"/>
+                </a:solidFill>
+                <a:latin typeface="Courier"/>
+              </a:rPr>
+              <a:t> </a:t>
+            </a:r>
+            <a:r>
+              <a:rPr>
+                <a:solidFill>
+                  <a:srgbClr val="20794D"/>
+                </a:solidFill>
+                <a:latin typeface="Courier"/>
+              </a:rPr>
+              <a:t>"black"</a:t>
+            </a:r>
+            <a:r>
+              <a:rPr>
+                <a:solidFill>
+                  <a:srgbClr val="003B4F"/>
+                </a:solidFill>
+                <a:latin typeface="Courier"/>
+              </a:rPr>
+              <a:t>,</a:t>
+            </a:r>
+            <a:br/>
+            <a:r>
+              <a:rPr>
+                <a:solidFill>
+                  <a:srgbClr val="003B4F"/>
+                </a:solidFill>
+                <a:latin typeface="Courier"/>
+              </a:rPr>
+              <a:t>         </a:t>
+            </a:r>
+            <a:r>
+              <a:rPr>
+                <a:solidFill>
+                  <a:srgbClr val="657422"/>
+                </a:solidFill>
+                <a:latin typeface="Courier"/>
+              </a:rPr>
+              <a:t>tl.cex =</a:t>
+            </a:r>
+            <a:r>
+              <a:rPr>
+                <a:solidFill>
+                  <a:srgbClr val="003B4F"/>
+                </a:solidFill>
+                <a:latin typeface="Courier"/>
+              </a:rPr>
+              <a:t> </a:t>
+            </a:r>
+            <a:r>
+              <a:rPr>
+                <a:solidFill>
+                  <a:srgbClr val="AD0000"/>
+                </a:solidFill>
+                <a:latin typeface="Courier"/>
+              </a:rPr>
+              <a:t>0.7</a:t>
+            </a:r>
+            <a:r>
+              <a:rPr>
+                <a:solidFill>
+                  <a:srgbClr val="003B4F"/>
+                </a:solidFill>
+                <a:latin typeface="Courier"/>
+              </a:rPr>
+              <a:t>,</a:t>
+            </a:r>
+            <a:br/>
+            <a:r>
+              <a:rPr>
+                <a:solidFill>
+                  <a:srgbClr val="003B4F"/>
+                </a:solidFill>
+                <a:latin typeface="Courier"/>
+              </a:rPr>
+              <a:t>         </a:t>
+            </a:r>
+            <a:r>
+              <a:rPr>
+                <a:solidFill>
+                  <a:srgbClr val="657422"/>
+                </a:solidFill>
+                <a:latin typeface="Courier"/>
+              </a:rPr>
+              <a:t>addCoef.col =</a:t>
+            </a:r>
+            <a:r>
+              <a:rPr>
+                <a:solidFill>
+                  <a:srgbClr val="003B4F"/>
+                </a:solidFill>
+                <a:latin typeface="Courier"/>
+              </a:rPr>
+              <a:t> </a:t>
+            </a:r>
+            <a:r>
+              <a:rPr>
+                <a:solidFill>
+                  <a:srgbClr val="20794D"/>
+                </a:solidFill>
+                <a:latin typeface="Courier"/>
+              </a:rPr>
+              <a:t>"black"</a:t>
+            </a:r>
+            <a:r>
+              <a:rPr>
+                <a:solidFill>
+                  <a:srgbClr val="003B4F"/>
+                </a:solidFill>
+                <a:latin typeface="Courier"/>
+              </a:rPr>
+              <a:t>,</a:t>
+            </a:r>
+            <a:br/>
+            <a:r>
+              <a:rPr>
+                <a:solidFill>
+                  <a:srgbClr val="003B4F"/>
+                </a:solidFill>
+                <a:latin typeface="Courier"/>
+              </a:rPr>
+              <a:t>         </a:t>
+            </a:r>
+            <a:r>
+              <a:rPr>
+                <a:solidFill>
+                  <a:srgbClr val="657422"/>
+                </a:solidFill>
+                <a:latin typeface="Courier"/>
+              </a:rPr>
+              <a:t>number.cex =</a:t>
+            </a:r>
+            <a:r>
+              <a:rPr>
+                <a:solidFill>
+                  <a:srgbClr val="003B4F"/>
+                </a:solidFill>
+                <a:latin typeface="Courier"/>
+              </a:rPr>
+              <a:t> </a:t>
+            </a:r>
+            <a:r>
+              <a:rPr>
+                <a:solidFill>
+                  <a:srgbClr val="AD0000"/>
+                </a:solidFill>
+                <a:latin typeface="Courier"/>
+              </a:rPr>
+              <a:t>0.6</a:t>
+            </a:r>
+            <a:r>
+              <a:rPr>
+                <a:solidFill>
+                  <a:srgbClr val="003B4F"/>
+                </a:solidFill>
+                <a:latin typeface="Courier"/>
+              </a:rPr>
+              <a:t>,</a:t>
+            </a:r>
+            <a:br/>
+            <a:r>
+              <a:rPr>
+                <a:solidFill>
+                  <a:srgbClr val="003B4F"/>
+                </a:solidFill>
+                <a:latin typeface="Courier"/>
+              </a:rPr>
+              <a:t>         </a:t>
+            </a:r>
+            <a:r>
+              <a:rPr>
+                <a:solidFill>
+                  <a:srgbClr val="657422"/>
+                </a:solidFill>
+                <a:latin typeface="Courier"/>
+              </a:rPr>
+              <a:t>title =</a:t>
+            </a:r>
+            <a:r>
+              <a:rPr>
+                <a:solidFill>
+                  <a:srgbClr val="003B4F"/>
+                </a:solidFill>
+                <a:latin typeface="Courier"/>
+              </a:rPr>
+              <a:t> </a:t>
+            </a:r>
+            <a:r>
+              <a:rPr>
+                <a:solidFill>
+                  <a:srgbClr val="20794D"/>
+                </a:solidFill>
+                <a:latin typeface="Courier"/>
+              </a:rPr>
+              <a:t>"Correlation Matrix</a:t>
+            </a:r>
+            <a:r>
+              <a:rPr>
+                <a:solidFill>
+                  <a:srgbClr val="5E5E5E"/>
+                </a:solidFill>
+                <a:latin typeface="Courier"/>
+              </a:rPr>
+              <a:t>\n</a:t>
+            </a:r>
+            <a:r>
+              <a:rPr>
+                <a:solidFill>
+                  <a:srgbClr val="20794D"/>
+                </a:solidFill>
+                <a:latin typeface="Courier"/>
+              </a:rPr>
+              <a:t>(Darlingtonia variables)"</a:t>
+            </a:r>
+            <a:r>
+              <a:rPr>
+                <a:solidFill>
+                  <a:srgbClr val="003B4F"/>
+                </a:solidFill>
+                <a:latin typeface="Courier"/>
+              </a:rPr>
+              <a:t>,</a:t>
+            </a:r>
+            <a:br/>
+            <a:r>
+              <a:rPr>
+                <a:solidFill>
+                  <a:srgbClr val="003B4F"/>
+                </a:solidFill>
+                <a:latin typeface="Courier"/>
+              </a:rPr>
+              <a:t>         </a:t>
+            </a:r>
+            <a:r>
+              <a:rPr>
+                <a:solidFill>
+                  <a:srgbClr val="657422"/>
+                </a:solidFill>
+                <a:latin typeface="Courier"/>
+              </a:rPr>
+              <a:t>mar =</a:t>
+            </a:r>
+            <a:r>
+              <a:rPr>
+                <a:solidFill>
+                  <a:srgbClr val="003B4F"/>
+                </a:solidFill>
+                <a:latin typeface="Courier"/>
+              </a:rPr>
+              <a:t> </a:t>
+            </a:r>
+            <a:r>
+              <a:rPr>
+                <a:solidFill>
+                  <a:srgbClr val="4758AB"/>
+                </a:solidFill>
+                <a:latin typeface="Courier"/>
+              </a:rPr>
+              <a:t>c</a:t>
+            </a:r>
+            <a:r>
+              <a:rPr>
+                <a:solidFill>
+                  <a:srgbClr val="003B4F"/>
+                </a:solidFill>
+                <a:latin typeface="Courier"/>
+              </a:rPr>
+              <a:t>(</a:t>
+            </a:r>
+            <a:r>
+              <a:rPr>
+                <a:solidFill>
+                  <a:srgbClr val="AD0000"/>
+                </a:solidFill>
+                <a:latin typeface="Courier"/>
+              </a:rPr>
+              <a:t>0</a:t>
+            </a:r>
+            <a:r>
+              <a:rPr>
+                <a:solidFill>
+                  <a:srgbClr val="003B4F"/>
+                </a:solidFill>
+                <a:latin typeface="Courier"/>
+              </a:rPr>
+              <a:t>,</a:t>
+            </a:r>
+            <a:r>
+              <a:rPr>
+                <a:solidFill>
+                  <a:srgbClr val="AD0000"/>
+                </a:solidFill>
+                <a:latin typeface="Courier"/>
+              </a:rPr>
+              <a:t>0</a:t>
+            </a:r>
+            <a:r>
+              <a:rPr>
+                <a:solidFill>
+                  <a:srgbClr val="003B4F"/>
+                </a:solidFill>
+                <a:latin typeface="Courier"/>
+              </a:rPr>
+              <a:t>,</a:t>
+            </a:r>
+            <a:r>
+              <a:rPr>
+                <a:solidFill>
+                  <a:srgbClr val="AD0000"/>
+                </a:solidFill>
+                <a:latin typeface="Courier"/>
+              </a:rPr>
+              <a:t>2</a:t>
+            </a:r>
+            <a:r>
+              <a:rPr>
+                <a:solidFill>
+                  <a:srgbClr val="003B4F"/>
+                </a:solidFill>
+                <a:latin typeface="Courier"/>
+              </a:rPr>
+              <a:t>,</a:t>
+            </a:r>
+            <a:r>
+              <a:rPr>
+                <a:solidFill>
+                  <a:srgbClr val="AD0000"/>
+                </a:solidFill>
+                <a:latin typeface="Courier"/>
+              </a:rPr>
+              <a:t>0</a:t>
+            </a:r>
+            <a:r>
+              <a:rPr>
+                <a:solidFill>
+                  <a:srgbClr val="003B4F"/>
+                </a:solidFill>
+                <a:latin typeface="Courier"/>
+              </a:rPr>
+              <a:t>))</a:t>
+            </a:r>
+            <a:br/>
+            <a:br/>
+            <a:r>
+              <a:rPr>
+                <a:solidFill>
+                  <a:srgbClr val="4758AB"/>
+                </a:solidFill>
+                <a:latin typeface="Courier"/>
+              </a:rPr>
+              <a:t>round</a:t>
+            </a:r>
+            <a:r>
+              <a:rPr>
+                <a:solidFill>
+                  <a:srgbClr val="003B4F"/>
+                </a:solidFill>
+                <a:latin typeface="Courier"/>
+              </a:rPr>
+              <a:t>(cor_matrix, </a:t>
+            </a:r>
+            <a:r>
+              <a:rPr>
+                <a:solidFill>
+                  <a:srgbClr val="AD0000"/>
+                </a:solidFill>
+                <a:latin typeface="Courier"/>
+              </a:rPr>
+              <a:t>2</a:t>
+            </a:r>
+            <a:r>
+              <a:rPr>
+                <a:solidFill>
+                  <a:srgbClr val="003B4F"/>
+                </a:solidFill>
+                <a:latin typeface="Courier"/>
+              </a:rPr>
+              <a:t>)</a:t>
+            </a:r>
+          </a:p>
+          <a:p>
+            <a:pPr lvl="0" indent="0" marL="0">
               <a:buNone/>
             </a:pPr>
             <a:r>
-              <a:rPr>
-                <a:latin typeface="Courier"/>
-              </a:rPr>
-              <a:t>Importance of components:
-                          PC1    PC2    PC3     PC4     PC5     PC6     PC7
-Standard deviation     2.2332 1.3288 1.2354 0.75701 0.59301 0.51062 0.46177
-Proportion of Variance 0.4987 0.1766 0.1526 0.05731 0.03517 0.02607 0.02132
-Cumulative Proportion  0.4987 0.6753 0.8279 0.88521 0.92038 0.94645 0.96777
-                          PC8     PC9    PC10
-Standard deviation     0.3768 0.33982 0.25457
-Proportion of Variance 0.0142 0.01155 0.00648
-Cumulative Proportion  0.9820 0.99352 1.00000</a:t>
+              <a:rPr/>
+              <a:t>✏️ </a:t>
+            </a:r>
+            <a:r>
+              <a:rPr b="1"/>
+              <a:t>Your turn:</a:t>
+            </a:r>
+            <a:r>
+              <a:rPr/>
+              <a:t> Which pair of variables has the strongest correlation? Does that make biological sense? </a:t>
+            </a:r>
+            <a:r>
+              <a:rPr>
+                <a:latin typeface="Courier"/>
+              </a:rPr>
+              <a:t>________________________</a:t>
             </a:r>
           </a:p>
         </p:txBody>
       </p:sp>
-      <p:pic>
-        <p:nvPicPr>
-          <p:cNvPr descr="multivariate_statistics_activity_files/figure-pptx/unnamed-chunk-8-1.png" id="0" name="Picture 1"/>
-          <p:cNvPicPr>
-            <a:picLocks noGrp="1" noChangeAspect="1"/>
-          </p:cNvPicPr>
-          <p:nvPr/>
-        </p:nvPicPr>
-        <p:blipFill>
-          <a:blip r:embed="rId2"/>
-          <a:stretch>
-            <a:fillRect/>
-          </a:stretch>
-        </p:blipFill>
-        <p:spPr bwMode="auto">
-          <a:xfrm>
-            <a:off x="3657600" y="1244600"/>
-            <a:ext cx="5232400" cy="3225800"/>
-          </a:xfrm>
-          <a:prstGeom prst="rect">
-            <a:avLst/>
-          </a:prstGeom>
-          <a:noFill/>
-          <a:ln w="9525">
-            <a:noFill/>
-            <a:headEnd/>
-            <a:tailEnd/>
-          </a:ln>
-        </p:spPr>
-      </p:pic>
     </p:spTree>
   </p:cSld>
 </p:sld>
@@ -3841,12 +7038,42 @@
       </p:grpSpPr>
       <p:sp>
         <p:nvSpPr>
-          <p:cNvPr id="4" name="Text Placeholder 3"/>
+          <p:cNvPr id="2" name="Title 1"/>
           <p:cNvSpPr>
             <a:spLocks noGrp="1"/>
           </p:cNvSpPr>
           <p:nvPr>
-            <p:ph idx="2" sz="half" type="body"/>
+            <p:ph type="title"/>
+          </p:nvPr>
+        </p:nvSpPr>
+        <p:spPr>
+          <a:xfrm>
+            <a:off x="0" y="0"/>
+            <a:ext cx="9144000" cy="582780"/>
+          </a:xfrm>
+        </p:spPr>
+        <p:txBody>
+          <a:bodyPr/>
+          <a:lstStyle/>
+          <a:p>
+            <a:pPr lvl="0" indent="0" marL="0">
+              <a:buNone/>
+            </a:pPr>
+            <a:r>
+              <a:rPr/>
+              <a:t>Part 4 · Running PCA</a:t>
+            </a:r>
+          </a:p>
+        </p:txBody>
+      </p:sp>
+      <p:sp>
+        <p:nvSpPr>
+          <p:cNvPr id="3" name="Content Placeholder 2"/>
+          <p:cNvSpPr>
+            <a:spLocks noGrp="1"/>
+          </p:cNvSpPr>
+          <p:nvPr>
+            <p:ph idx="1"/>
           </p:nvPr>
         </p:nvSpPr>
         <p:spPr/>
@@ -3854,24 +7081,169 @@
           <a:bodyPr/>
           <a:lstStyle/>
           <a:p>
+            <a:pPr lvl="0" indent="0" marL="0">
+              <a:buNone/>
+            </a:pPr>
+            <a:r>
+              <a:rPr b="1"/>
+              <a:t>▶ Run this:</a:t>
+            </a:r>
+          </a:p>
+          <a:p>
             <a:pPr lvl="0" indent="0">
               <a:buNone/>
             </a:pPr>
             <a:r>
               <a:rPr>
-                <a:latin typeface="Courier"/>
-              </a:rPr>
-              <a:t>                PC1    PC2    PC3
-height       -0.278 -0.449  0.198
-mouth_diam   -0.369 -0.110  0.214
-tube_diam     0.040 -0.602 -0.390
-keel_diam     0.202 -0.491 -0.328
-wing1_length -0.375  0.171 -0.280
-wing2_length -0.342  0.131 -0.415
-wingsprea    -0.239  0.156 -0.549
-hoodmass_g   -0.385 -0.057  0.185
-tubemass_g   -0.355 -0.320  0.263
-wingmass_g   -0.393  0.080 -0.007</a:t>
+                <a:solidFill>
+                  <a:srgbClr val="003B4F"/>
+                </a:solidFill>
+                <a:latin typeface="Courier"/>
+              </a:rPr>
+              <a:t>pca_result &lt;- </a:t>
+            </a:r>
+            <a:r>
+              <a:rPr>
+                <a:solidFill>
+                  <a:srgbClr val="4758AB"/>
+                </a:solidFill>
+                <a:latin typeface="Courier"/>
+              </a:rPr>
+              <a:t>prcomp</a:t>
+            </a:r>
+            <a:r>
+              <a:rPr>
+                <a:solidFill>
+                  <a:srgbClr val="003B4F"/>
+                </a:solidFill>
+                <a:latin typeface="Courier"/>
+              </a:rPr>
+              <a:t>(darl_numeric,</a:t>
+            </a:r>
+            <a:br/>
+            <a:r>
+              <a:rPr>
+                <a:solidFill>
+                  <a:srgbClr val="003B4F"/>
+                </a:solidFill>
+                <a:latin typeface="Courier"/>
+              </a:rPr>
+              <a:t>                     </a:t>
+            </a:r>
+            <a:r>
+              <a:rPr>
+                <a:solidFill>
+                  <a:srgbClr val="657422"/>
+                </a:solidFill>
+                <a:latin typeface="Courier"/>
+              </a:rPr>
+              <a:t>center =</a:t>
+            </a:r>
+            <a:r>
+              <a:rPr>
+                <a:solidFill>
+                  <a:srgbClr val="003B4F"/>
+                </a:solidFill>
+                <a:latin typeface="Courier"/>
+              </a:rPr>
+              <a:t> </a:t>
+            </a:r>
+            <a:r>
+              <a:rPr>
+                <a:solidFill>
+                  <a:srgbClr val="8F5902"/>
+                </a:solidFill>
+                <a:latin typeface="Courier"/>
+              </a:rPr>
+              <a:t>TRUE</a:t>
+            </a:r>
+            <a:r>
+              <a:rPr>
+                <a:solidFill>
+                  <a:srgbClr val="003B4F"/>
+                </a:solidFill>
+                <a:latin typeface="Courier"/>
+              </a:rPr>
+              <a:t>,</a:t>
+            </a:r>
+            <a:br/>
+            <a:r>
+              <a:rPr>
+                <a:solidFill>
+                  <a:srgbClr val="003B4F"/>
+                </a:solidFill>
+                <a:latin typeface="Courier"/>
+              </a:rPr>
+              <a:t>                     </a:t>
+            </a:r>
+            <a:r>
+              <a:rPr>
+                <a:solidFill>
+                  <a:srgbClr val="657422"/>
+                </a:solidFill>
+                <a:latin typeface="Courier"/>
+              </a:rPr>
+              <a:t>scale =</a:t>
+            </a:r>
+            <a:r>
+              <a:rPr>
+                <a:solidFill>
+                  <a:srgbClr val="003B4F"/>
+                </a:solidFill>
+                <a:latin typeface="Courier"/>
+              </a:rPr>
+              <a:t> </a:t>
+            </a:r>
+            <a:r>
+              <a:rPr>
+                <a:solidFill>
+                  <a:srgbClr val="8F5902"/>
+                </a:solidFill>
+                <a:latin typeface="Courier"/>
+              </a:rPr>
+              <a:t>TRUE</a:t>
+            </a:r>
+            <a:r>
+              <a:rPr>
+                <a:solidFill>
+                  <a:srgbClr val="003B4F"/>
+                </a:solidFill>
+                <a:latin typeface="Courier"/>
+              </a:rPr>
+              <a:t>)</a:t>
+            </a:r>
+            <a:br/>
+            <a:br/>
+            <a:r>
+              <a:rPr>
+                <a:solidFill>
+                  <a:srgbClr val="4758AB"/>
+                </a:solidFill>
+                <a:latin typeface="Courier"/>
+              </a:rPr>
+              <a:t>summary</a:t>
+            </a:r>
+            <a:r>
+              <a:rPr>
+                <a:solidFill>
+                  <a:srgbClr val="003B4F"/>
+                </a:solidFill>
+                <a:latin typeface="Courier"/>
+              </a:rPr>
+              <a:t>(pca_result)</a:t>
+            </a:r>
+          </a:p>
+          <a:p>
+            <a:pPr lvl="0" indent="0" marL="0">
+              <a:buNone/>
+            </a:pPr>
+            <a:r>
+              <a:rPr b="1"/>
+              <a:t>▶ Run this</a:t>
+            </a:r>
+            <a:r>
+              <a:rPr/>
+              <a:t> — a scree plot to decide how many components to keep:</a:t>
             </a:r>
           </a:p>
           <a:p>
@@ -3880,55 +7252,176 @@
             </a:pPr>
             <a:r>
               <a:rPr>
-                <a:latin typeface="Courier"/>
-              </a:rPr>
-              <a:t># A tibble: 10 × 2
-   Variable     Loading
-   &lt;chr&gt;          &lt;dbl&gt;
- 1 wingmass_g   -0.393 
- 2 hoodmass_g   -0.385 
- 3 wing1_length -0.375 
- 4 mouth_diam   -0.369 
- 5 tubemass_g   -0.355 
- 6 wing2_length -0.342 
- 7 height       -0.278 
- 8 wingsprea    -0.239 
- 9 keel_diam     0.202 
-10 tube_diam     0.0402</a:t>
+                <a:solidFill>
+                  <a:srgbClr val="4758AB"/>
+                </a:solidFill>
+                <a:latin typeface="Courier"/>
+              </a:rPr>
+              <a:t>fviz_eig</a:t>
+            </a:r>
+            <a:r>
+              <a:rPr>
+                <a:solidFill>
+                  <a:srgbClr val="003B4F"/>
+                </a:solidFill>
+                <a:latin typeface="Courier"/>
+              </a:rPr>
+              <a:t>(pca_result,</a:t>
+            </a:r>
+            <a:br/>
+            <a:r>
+              <a:rPr>
+                <a:solidFill>
+                  <a:srgbClr val="003B4F"/>
+                </a:solidFill>
+                <a:latin typeface="Courier"/>
+              </a:rPr>
+              <a:t>         </a:t>
+            </a:r>
+            <a:r>
+              <a:rPr>
+                <a:solidFill>
+                  <a:srgbClr val="657422"/>
+                </a:solidFill>
+                <a:latin typeface="Courier"/>
+              </a:rPr>
+              <a:t>addlabels =</a:t>
+            </a:r>
+            <a:r>
+              <a:rPr>
+                <a:solidFill>
+                  <a:srgbClr val="003B4F"/>
+                </a:solidFill>
+                <a:latin typeface="Courier"/>
+              </a:rPr>
+              <a:t> </a:t>
+            </a:r>
+            <a:r>
+              <a:rPr>
+                <a:solidFill>
+                  <a:srgbClr val="8F5902"/>
+                </a:solidFill>
+                <a:latin typeface="Courier"/>
+              </a:rPr>
+              <a:t>TRUE</a:t>
+            </a:r>
+            <a:r>
+              <a:rPr>
+                <a:solidFill>
+                  <a:srgbClr val="003B4F"/>
+                </a:solidFill>
+                <a:latin typeface="Courier"/>
+              </a:rPr>
+              <a:t>,</a:t>
+            </a:r>
+            <a:br/>
+            <a:r>
+              <a:rPr>
+                <a:solidFill>
+                  <a:srgbClr val="003B4F"/>
+                </a:solidFill>
+                <a:latin typeface="Courier"/>
+              </a:rPr>
+              <a:t>         </a:t>
+            </a:r>
+            <a:r>
+              <a:rPr>
+                <a:solidFill>
+                  <a:srgbClr val="657422"/>
+                </a:solidFill>
+                <a:latin typeface="Courier"/>
+              </a:rPr>
+              <a:t>ylim =</a:t>
+            </a:r>
+            <a:r>
+              <a:rPr>
+                <a:solidFill>
+                  <a:srgbClr val="003B4F"/>
+                </a:solidFill>
+                <a:latin typeface="Courier"/>
+              </a:rPr>
+              <a:t> </a:t>
+            </a:r>
+            <a:r>
+              <a:rPr>
+                <a:solidFill>
+                  <a:srgbClr val="4758AB"/>
+                </a:solidFill>
+                <a:latin typeface="Courier"/>
+              </a:rPr>
+              <a:t>c</a:t>
+            </a:r>
+            <a:r>
+              <a:rPr>
+                <a:solidFill>
+                  <a:srgbClr val="003B4F"/>
+                </a:solidFill>
+                <a:latin typeface="Courier"/>
+              </a:rPr>
+              <a:t>(</a:t>
+            </a:r>
+            <a:r>
+              <a:rPr>
+                <a:solidFill>
+                  <a:srgbClr val="AD0000"/>
+                </a:solidFill>
+                <a:latin typeface="Courier"/>
+              </a:rPr>
+              <a:t>0</a:t>
+            </a:r>
+            <a:r>
+              <a:rPr>
+                <a:solidFill>
+                  <a:srgbClr val="003B4F"/>
+                </a:solidFill>
+                <a:latin typeface="Courier"/>
+              </a:rPr>
+              <a:t>, </a:t>
+            </a:r>
+            <a:r>
+              <a:rPr>
+                <a:solidFill>
+                  <a:srgbClr val="AD0000"/>
+                </a:solidFill>
+                <a:latin typeface="Courier"/>
+              </a:rPr>
+              <a:t>50</a:t>
+            </a:r>
+            <a:r>
+              <a:rPr>
+                <a:solidFill>
+                  <a:srgbClr val="003B4F"/>
+                </a:solidFill>
+                <a:latin typeface="Courier"/>
+              </a:rPr>
+              <a:t>))</a:t>
+            </a:r>
+          </a:p>
+          <a:p>
+            <a:pPr lvl="0" indent="0" marL="0">
+              <a:buNone/>
+            </a:pPr>
+            <a:r>
+              <a:rPr/>
+              <a:t>✏️ </a:t>
+            </a:r>
+            <a:r>
+              <a:rPr b="1"/>
+              <a:t>Your turn:</a:t>
+            </a:r>
+            <a:r>
+              <a:rPr/>
+              <a:t> Based on the scree plot, how many components would you retain, and why? </a:t>
+            </a:r>
+            <a:r>
+              <a:rPr>
+                <a:latin typeface="Courier"/>
+              </a:rPr>
+              <a:t>________________________</a:t>
             </a:r>
           </a:p>
         </p:txBody>
       </p:sp>
-      <p:pic>
-        <p:nvPicPr>
-          <p:cNvPr descr="multivariate_statistics_activity_files/figure-pptx/unnamed-chunk-11-1.png" id="0" name="Picture 1"/>
-          <p:cNvPicPr>
-            <a:picLocks noGrp="1" noChangeAspect="1"/>
-          </p:cNvPicPr>
-          <p:nvPr/>
-        </p:nvPicPr>
-        <p:blipFill>
-          <a:blip r:embed="rId2"/>
-          <a:stretch>
-            <a:fillRect/>
-          </a:stretch>
-        </p:blipFill>
-        <p:spPr bwMode="auto">
-          <a:xfrm>
-            <a:off x="3657600" y="1244600"/>
-            <a:ext cx="5232400" cy="3225800"/>
-          </a:xfrm>
-          <a:prstGeom prst="rect">
-            <a:avLst/>
-          </a:prstGeom>
-          <a:noFill/>
-          <a:ln w="9525">
-            <a:noFill/>
-            <a:headEnd/>
-            <a:tailEnd/>
-          </a:ln>
-        </p:spPr>
-      </p:pic>
     </p:spTree>
   </p:cSld>
 </p:sld>
@@ -3953,12 +7446,42 @@
       </p:grpSpPr>
       <p:sp>
         <p:nvSpPr>
-          <p:cNvPr id="4" name="Text Placeholder 3"/>
+          <p:cNvPr id="2" name="Title 1"/>
           <p:cNvSpPr>
             <a:spLocks noGrp="1"/>
           </p:cNvSpPr>
           <p:nvPr>
-            <p:ph idx="2" sz="half" type="body"/>
+            <p:ph type="title"/>
+          </p:nvPr>
+        </p:nvSpPr>
+        <p:spPr>
+          <a:xfrm>
+            <a:off x="0" y="0"/>
+            <a:ext cx="9144000" cy="582780"/>
+          </a:xfrm>
+        </p:spPr>
+        <p:txBody>
+          <a:bodyPr/>
+          <a:lstStyle/>
+          <a:p>
+            <a:pPr lvl="0" indent="0" marL="0">
+              <a:buNone/>
+            </a:pPr>
+            <a:r>
+              <a:rPr/>
+              <a:t>Part 5 · Interpreting Loadings</a:t>
+            </a:r>
+          </a:p>
+        </p:txBody>
+      </p:sp>
+      <p:sp>
+        <p:nvSpPr>
+          <p:cNvPr id="3" name="Content Placeholder 2"/>
+          <p:cNvSpPr>
+            <a:spLocks noGrp="1"/>
+          </p:cNvSpPr>
+          <p:nvPr>
+            <p:ph idx="1"/>
           </p:nvPr>
         </p:nvSpPr>
         <p:spPr/>
@@ -3966,60 +7489,2331 @@
           <a:bodyPr/>
           <a:lstStyle/>
           <a:p>
+            <a:pPr lvl="0" indent="0" marL="0">
+              <a:buNone/>
+            </a:pPr>
+            <a:r>
+              <a:rPr b="1"/>
+              <a:t>▶ Run this</a:t>
+            </a:r>
+            <a:r>
+              <a:rPr/>
+              <a:t> — view the loadings for the first 3 PCs:</a:t>
+            </a:r>
+          </a:p>
+          <a:p>
             <a:pPr lvl="0" indent="0">
               <a:buNone/>
             </a:pPr>
             <a:r>
               <a:rPr>
-                <a:latin typeface="Courier"/>
-              </a:rPr>
-              <a:t># A tibble: 10 × 2
-   Variable     Loading
-   &lt;chr&gt;          &lt;dbl&gt;
- 1 tube_diam    -0.602 
- 2 keel_diam    -0.491 
- 3 height       -0.449 
- 4 tubemass_g   -0.320 
- 5 wing1_length  0.171 
- 6 wingsprea     0.156 
- 7 wing2_length  0.131 
- 8 mouth_diam   -0.110 
- 9 wingmass_g    0.0800
-10 hoodmass_g   -0.0575</a:t>
+                <a:solidFill>
+                  <a:srgbClr val="003B4F"/>
+                </a:solidFill>
+                <a:latin typeface="Courier"/>
+              </a:rPr>
+              <a:t>loadings &lt;- pca_result</a:t>
+            </a:r>
+            <a:r>
+              <a:rPr>
+                <a:solidFill>
+                  <a:srgbClr val="5E5E5E"/>
+                </a:solidFill>
+                <a:latin typeface="Courier"/>
+              </a:rPr>
+              <a:t>$</a:t>
+            </a:r>
+            <a:r>
+              <a:rPr>
+                <a:solidFill>
+                  <a:srgbClr val="003B4F"/>
+                </a:solidFill>
+                <a:latin typeface="Courier"/>
+              </a:rPr>
+              <a:t>rotation[, </a:t>
+            </a:r>
+            <a:r>
+              <a:rPr>
+                <a:solidFill>
+                  <a:srgbClr val="AD0000"/>
+                </a:solidFill>
+                <a:latin typeface="Courier"/>
+              </a:rPr>
+              <a:t>1</a:t>
+            </a:r>
+            <a:r>
+              <a:rPr>
+                <a:solidFill>
+                  <a:srgbClr val="5E5E5E"/>
+                </a:solidFill>
+                <a:latin typeface="Courier"/>
+              </a:rPr>
+              <a:t>:</a:t>
+            </a:r>
+            <a:r>
+              <a:rPr>
+                <a:solidFill>
+                  <a:srgbClr val="AD0000"/>
+                </a:solidFill>
+                <a:latin typeface="Courier"/>
+              </a:rPr>
+              <a:t>3</a:t>
+            </a:r>
+            <a:r>
+              <a:rPr>
+                <a:solidFill>
+                  <a:srgbClr val="003B4F"/>
+                </a:solidFill>
+                <a:latin typeface="Courier"/>
+              </a:rPr>
+              <a:t>]</a:t>
+            </a:r>
+            <a:br/>
+            <a:r>
+              <a:rPr>
+                <a:solidFill>
+                  <a:srgbClr val="4758AB"/>
+                </a:solidFill>
+                <a:latin typeface="Courier"/>
+              </a:rPr>
+              <a:t>round</a:t>
+            </a:r>
+            <a:r>
+              <a:rPr>
+                <a:solidFill>
+                  <a:srgbClr val="003B4F"/>
+                </a:solidFill>
+                <a:latin typeface="Courier"/>
+              </a:rPr>
+              <a:t>(loadings, </a:t>
+            </a:r>
+            <a:r>
+              <a:rPr>
+                <a:solidFill>
+                  <a:srgbClr val="AD0000"/>
+                </a:solidFill>
+                <a:latin typeface="Courier"/>
+              </a:rPr>
+              <a:t>3</a:t>
+            </a:r>
+            <a:r>
+              <a:rPr>
+                <a:solidFill>
+                  <a:srgbClr val="003B4F"/>
+                </a:solidFill>
+                <a:latin typeface="Courier"/>
+              </a:rPr>
+              <a:t>)</a:t>
+            </a:r>
+          </a:p>
+          <a:p>
+            <a:pPr lvl="0" indent="0" marL="0">
+              <a:buNone/>
+            </a:pPr>
+            <a:r>
+              <a:rPr b="1"/>
+              <a:t>▶ Run this</a:t>
+            </a:r>
+            <a:r>
+              <a:rPr/>
+              <a:t> — PC1 loadings, sorted and visualized:</a:t>
+            </a:r>
+          </a:p>
+          <a:p>
+            <a:pPr lvl="0" indent="0">
+              <a:buNone/>
+            </a:pPr>
+            <a:r>
+              <a:rPr>
+                <a:solidFill>
+                  <a:srgbClr val="003B4F"/>
+                </a:solidFill>
+                <a:latin typeface="Courier"/>
+              </a:rPr>
+              <a:t>pc1_loads &lt;- </a:t>
+            </a:r>
+            <a:r>
+              <a:rPr>
+                <a:solidFill>
+                  <a:srgbClr val="4758AB"/>
+                </a:solidFill>
+                <a:latin typeface="Courier"/>
+              </a:rPr>
+              <a:t>tibble</a:t>
+            </a:r>
+            <a:r>
+              <a:rPr>
+                <a:solidFill>
+                  <a:srgbClr val="003B4F"/>
+                </a:solidFill>
+                <a:latin typeface="Courier"/>
+              </a:rPr>
+              <a:t>(</a:t>
+            </a:r>
+            <a:br/>
+            <a:r>
+              <a:rPr>
+                <a:solidFill>
+                  <a:srgbClr val="003B4F"/>
+                </a:solidFill>
+                <a:latin typeface="Courier"/>
+              </a:rPr>
+              <a:t>  </a:t>
+            </a:r>
+            <a:r>
+              <a:rPr>
+                <a:solidFill>
+                  <a:srgbClr val="657422"/>
+                </a:solidFill>
+                <a:latin typeface="Courier"/>
+              </a:rPr>
+              <a:t>Variable =</a:t>
+            </a:r>
+            <a:r>
+              <a:rPr>
+                <a:solidFill>
+                  <a:srgbClr val="003B4F"/>
+                </a:solidFill>
+                <a:latin typeface="Courier"/>
+              </a:rPr>
+              <a:t> </a:t>
+            </a:r>
+            <a:r>
+              <a:rPr>
+                <a:solidFill>
+                  <a:srgbClr val="4758AB"/>
+                </a:solidFill>
+                <a:latin typeface="Courier"/>
+              </a:rPr>
+              <a:t>rownames</a:t>
+            </a:r>
+            <a:r>
+              <a:rPr>
+                <a:solidFill>
+                  <a:srgbClr val="003B4F"/>
+                </a:solidFill>
+                <a:latin typeface="Courier"/>
+              </a:rPr>
+              <a:t>(pca_result</a:t>
+            </a:r>
+            <a:r>
+              <a:rPr>
+                <a:solidFill>
+                  <a:srgbClr val="5E5E5E"/>
+                </a:solidFill>
+                <a:latin typeface="Courier"/>
+              </a:rPr>
+              <a:t>$</a:t>
+            </a:r>
+            <a:r>
+              <a:rPr>
+                <a:solidFill>
+                  <a:srgbClr val="003B4F"/>
+                </a:solidFill>
+                <a:latin typeface="Courier"/>
+              </a:rPr>
+              <a:t>rotation),</a:t>
+            </a:r>
+            <a:br/>
+            <a:r>
+              <a:rPr>
+                <a:solidFill>
+                  <a:srgbClr val="003B4F"/>
+                </a:solidFill>
+                <a:latin typeface="Courier"/>
+              </a:rPr>
+              <a:t>  </a:t>
+            </a:r>
+            <a:r>
+              <a:rPr>
+                <a:solidFill>
+                  <a:srgbClr val="657422"/>
+                </a:solidFill>
+                <a:latin typeface="Courier"/>
+              </a:rPr>
+              <a:t>Loading =</a:t>
+            </a:r>
+            <a:r>
+              <a:rPr>
+                <a:solidFill>
+                  <a:srgbClr val="003B4F"/>
+                </a:solidFill>
+                <a:latin typeface="Courier"/>
+              </a:rPr>
+              <a:t> pca_result</a:t>
+            </a:r>
+            <a:r>
+              <a:rPr>
+                <a:solidFill>
+                  <a:srgbClr val="5E5E5E"/>
+                </a:solidFill>
+                <a:latin typeface="Courier"/>
+              </a:rPr>
+              <a:t>$</a:t>
+            </a:r>
+            <a:r>
+              <a:rPr>
+                <a:solidFill>
+                  <a:srgbClr val="003B4F"/>
+                </a:solidFill>
+                <a:latin typeface="Courier"/>
+              </a:rPr>
+              <a:t>rotation[, </a:t>
+            </a:r>
+            <a:r>
+              <a:rPr>
+                <a:solidFill>
+                  <a:srgbClr val="AD0000"/>
+                </a:solidFill>
+                <a:latin typeface="Courier"/>
+              </a:rPr>
+              <a:t>1</a:t>
+            </a:r>
+            <a:r>
+              <a:rPr>
+                <a:solidFill>
+                  <a:srgbClr val="003B4F"/>
+                </a:solidFill>
+                <a:latin typeface="Courier"/>
+              </a:rPr>
+              <a:t>]) </a:t>
+            </a:r>
+            <a:r>
+              <a:rPr>
+                <a:solidFill>
+                  <a:srgbClr val="5E5E5E"/>
+                </a:solidFill>
+                <a:latin typeface="Courier"/>
+              </a:rPr>
+              <a:t>%&gt;%</a:t>
+            </a:r>
+            <a:br/>
+            <a:r>
+              <a:rPr>
+                <a:solidFill>
+                  <a:srgbClr val="003B4F"/>
+                </a:solidFill>
+                <a:latin typeface="Courier"/>
+              </a:rPr>
+              <a:t>  </a:t>
+            </a:r>
+            <a:r>
+              <a:rPr>
+                <a:solidFill>
+                  <a:srgbClr val="4758AB"/>
+                </a:solidFill>
+                <a:latin typeface="Courier"/>
+              </a:rPr>
+              <a:t>arrange</a:t>
+            </a:r>
+            <a:r>
+              <a:rPr>
+                <a:solidFill>
+                  <a:srgbClr val="003B4F"/>
+                </a:solidFill>
+                <a:latin typeface="Courier"/>
+              </a:rPr>
+              <a:t>(</a:t>
+            </a:r>
+            <a:r>
+              <a:rPr>
+                <a:solidFill>
+                  <a:srgbClr val="4758AB"/>
+                </a:solidFill>
+                <a:latin typeface="Courier"/>
+              </a:rPr>
+              <a:t>desc</a:t>
+            </a:r>
+            <a:r>
+              <a:rPr>
+                <a:solidFill>
+                  <a:srgbClr val="003B4F"/>
+                </a:solidFill>
+                <a:latin typeface="Courier"/>
+              </a:rPr>
+              <a:t>(</a:t>
+            </a:r>
+            <a:r>
+              <a:rPr>
+                <a:solidFill>
+                  <a:srgbClr val="4758AB"/>
+                </a:solidFill>
+                <a:latin typeface="Courier"/>
+              </a:rPr>
+              <a:t>abs</a:t>
+            </a:r>
+            <a:r>
+              <a:rPr>
+                <a:solidFill>
+                  <a:srgbClr val="003B4F"/>
+                </a:solidFill>
+                <a:latin typeface="Courier"/>
+              </a:rPr>
+              <a:t>(Loading)))</a:t>
+            </a:r>
+            <a:br/>
+            <a:r>
+              <a:rPr>
+                <a:solidFill>
+                  <a:srgbClr val="003B4F"/>
+                </a:solidFill>
+                <a:latin typeface="Courier"/>
+              </a:rPr>
+              <a:t>pc1_loads</a:t>
+            </a:r>
+            <a:br/>
+            <a:br/>
+            <a:r>
+              <a:rPr>
+                <a:solidFill>
+                  <a:srgbClr val="003B4F"/>
+                </a:solidFill>
+                <a:latin typeface="Courier"/>
+              </a:rPr>
+              <a:t>pc1_loads </a:t>
+            </a:r>
+            <a:r>
+              <a:rPr>
+                <a:solidFill>
+                  <a:srgbClr val="5E5E5E"/>
+                </a:solidFill>
+                <a:latin typeface="Courier"/>
+              </a:rPr>
+              <a:t>%&gt;%</a:t>
+            </a:r>
+            <a:br/>
+            <a:r>
+              <a:rPr>
+                <a:solidFill>
+                  <a:srgbClr val="003B4F"/>
+                </a:solidFill>
+                <a:latin typeface="Courier"/>
+              </a:rPr>
+              <a:t>  </a:t>
+            </a:r>
+            <a:r>
+              <a:rPr>
+                <a:solidFill>
+                  <a:srgbClr val="4758AB"/>
+                </a:solidFill>
+                <a:latin typeface="Courier"/>
+              </a:rPr>
+              <a:t>ggplot</a:t>
+            </a:r>
+            <a:r>
+              <a:rPr>
+                <a:solidFill>
+                  <a:srgbClr val="003B4F"/>
+                </a:solidFill>
+                <a:latin typeface="Courier"/>
+              </a:rPr>
+              <a:t>(</a:t>
+            </a:r>
+            <a:r>
+              <a:rPr>
+                <a:solidFill>
+                  <a:srgbClr val="4758AB"/>
+                </a:solidFill>
+                <a:latin typeface="Courier"/>
+              </a:rPr>
+              <a:t>aes</a:t>
+            </a:r>
+            <a:r>
+              <a:rPr>
+                <a:solidFill>
+                  <a:srgbClr val="003B4F"/>
+                </a:solidFill>
+                <a:latin typeface="Courier"/>
+              </a:rPr>
+              <a:t>(</a:t>
+            </a:r>
+            <a:r>
+              <a:rPr>
+                <a:solidFill>
+                  <a:srgbClr val="657422"/>
+                </a:solidFill>
+                <a:latin typeface="Courier"/>
+              </a:rPr>
+              <a:t>x =</a:t>
+            </a:r>
+            <a:r>
+              <a:rPr>
+                <a:solidFill>
+                  <a:srgbClr val="003B4F"/>
+                </a:solidFill>
+                <a:latin typeface="Courier"/>
+              </a:rPr>
+              <a:t> </a:t>
+            </a:r>
+            <a:r>
+              <a:rPr>
+                <a:solidFill>
+                  <a:srgbClr val="4758AB"/>
+                </a:solidFill>
+                <a:latin typeface="Courier"/>
+              </a:rPr>
+              <a:t>reorder</a:t>
+            </a:r>
+            <a:r>
+              <a:rPr>
+                <a:solidFill>
+                  <a:srgbClr val="003B4F"/>
+                </a:solidFill>
+                <a:latin typeface="Courier"/>
+              </a:rPr>
+              <a:t>(Variable, Loading), </a:t>
+            </a:r>
+            <a:r>
+              <a:rPr>
+                <a:solidFill>
+                  <a:srgbClr val="657422"/>
+                </a:solidFill>
+                <a:latin typeface="Courier"/>
+              </a:rPr>
+              <a:t>y =</a:t>
+            </a:r>
+            <a:r>
+              <a:rPr>
+                <a:solidFill>
+                  <a:srgbClr val="003B4F"/>
+                </a:solidFill>
+                <a:latin typeface="Courier"/>
+              </a:rPr>
+              <a:t> Loading)) </a:t>
+            </a:r>
+            <a:r>
+              <a:rPr>
+                <a:solidFill>
+                  <a:srgbClr val="5E5E5E"/>
+                </a:solidFill>
+                <a:latin typeface="Courier"/>
+              </a:rPr>
+              <a:t>+</a:t>
+            </a:r>
+            <a:br/>
+            <a:r>
+              <a:rPr>
+                <a:solidFill>
+                  <a:srgbClr val="003B4F"/>
+                </a:solidFill>
+                <a:latin typeface="Courier"/>
+              </a:rPr>
+              <a:t>  </a:t>
+            </a:r>
+            <a:r>
+              <a:rPr>
+                <a:solidFill>
+                  <a:srgbClr val="4758AB"/>
+                </a:solidFill>
+                <a:latin typeface="Courier"/>
+              </a:rPr>
+              <a:t>geom_col</a:t>
+            </a:r>
+            <a:r>
+              <a:rPr>
+                <a:solidFill>
+                  <a:srgbClr val="003B4F"/>
+                </a:solidFill>
+                <a:latin typeface="Courier"/>
+              </a:rPr>
+              <a:t>(</a:t>
+            </a:r>
+            <a:r>
+              <a:rPr>
+                <a:solidFill>
+                  <a:srgbClr val="4758AB"/>
+                </a:solidFill>
+                <a:latin typeface="Courier"/>
+              </a:rPr>
+              <a:t>aes</a:t>
+            </a:r>
+            <a:r>
+              <a:rPr>
+                <a:solidFill>
+                  <a:srgbClr val="003B4F"/>
+                </a:solidFill>
+                <a:latin typeface="Courier"/>
+              </a:rPr>
+              <a:t>(</a:t>
+            </a:r>
+            <a:r>
+              <a:rPr>
+                <a:solidFill>
+                  <a:srgbClr val="657422"/>
+                </a:solidFill>
+                <a:latin typeface="Courier"/>
+              </a:rPr>
+              <a:t>fill =</a:t>
+            </a:r>
+            <a:r>
+              <a:rPr>
+                <a:solidFill>
+                  <a:srgbClr val="003B4F"/>
+                </a:solidFill>
+                <a:latin typeface="Courier"/>
+              </a:rPr>
+              <a:t> Loading </a:t>
+            </a:r>
+            <a:r>
+              <a:rPr>
+                <a:solidFill>
+                  <a:srgbClr val="5E5E5E"/>
+                </a:solidFill>
+                <a:latin typeface="Courier"/>
+              </a:rPr>
+              <a:t>&gt;</a:t>
+            </a:r>
+            <a:r>
+              <a:rPr>
+                <a:solidFill>
+                  <a:srgbClr val="003B4F"/>
+                </a:solidFill>
+                <a:latin typeface="Courier"/>
+              </a:rPr>
+              <a:t> </a:t>
+            </a:r>
+            <a:r>
+              <a:rPr>
+                <a:solidFill>
+                  <a:srgbClr val="AD0000"/>
+                </a:solidFill>
+                <a:latin typeface="Courier"/>
+              </a:rPr>
+              <a:t>0</a:t>
+            </a:r>
+            <a:r>
+              <a:rPr>
+                <a:solidFill>
+                  <a:srgbClr val="003B4F"/>
+                </a:solidFill>
+                <a:latin typeface="Courier"/>
+              </a:rPr>
+              <a:t>), </a:t>
+            </a:r>
+            <a:r>
+              <a:rPr>
+                <a:solidFill>
+                  <a:srgbClr val="657422"/>
+                </a:solidFill>
+                <a:latin typeface="Courier"/>
+              </a:rPr>
+              <a:t>show.legend =</a:t>
+            </a:r>
+            <a:r>
+              <a:rPr>
+                <a:solidFill>
+                  <a:srgbClr val="003B4F"/>
+                </a:solidFill>
+                <a:latin typeface="Courier"/>
+              </a:rPr>
+              <a:t> </a:t>
+            </a:r>
+            <a:r>
+              <a:rPr>
+                <a:solidFill>
+                  <a:srgbClr val="8F5902"/>
+                </a:solidFill>
+                <a:latin typeface="Courier"/>
+              </a:rPr>
+              <a:t>FALSE</a:t>
+            </a:r>
+            <a:r>
+              <a:rPr>
+                <a:solidFill>
+                  <a:srgbClr val="003B4F"/>
+                </a:solidFill>
+                <a:latin typeface="Courier"/>
+              </a:rPr>
+              <a:t>) </a:t>
+            </a:r>
+            <a:r>
+              <a:rPr>
+                <a:solidFill>
+                  <a:srgbClr val="5E5E5E"/>
+                </a:solidFill>
+                <a:latin typeface="Courier"/>
+              </a:rPr>
+              <a:t>+</a:t>
+            </a:r>
+            <a:br/>
+            <a:r>
+              <a:rPr>
+                <a:solidFill>
+                  <a:srgbClr val="003B4F"/>
+                </a:solidFill>
+                <a:latin typeface="Courier"/>
+              </a:rPr>
+              <a:t>  </a:t>
+            </a:r>
+            <a:r>
+              <a:rPr>
+                <a:solidFill>
+                  <a:srgbClr val="4758AB"/>
+                </a:solidFill>
+                <a:latin typeface="Courier"/>
+              </a:rPr>
+              <a:t>coord_flip</a:t>
+            </a:r>
+            <a:r>
+              <a:rPr>
+                <a:solidFill>
+                  <a:srgbClr val="003B4F"/>
+                </a:solidFill>
+                <a:latin typeface="Courier"/>
+              </a:rPr>
+              <a:t>() </a:t>
+            </a:r>
+            <a:r>
+              <a:rPr>
+                <a:solidFill>
+                  <a:srgbClr val="5E5E5E"/>
+                </a:solidFill>
+                <a:latin typeface="Courier"/>
+              </a:rPr>
+              <a:t>+</a:t>
+            </a:r>
+            <a:br/>
+            <a:r>
+              <a:rPr>
+                <a:solidFill>
+                  <a:srgbClr val="003B4F"/>
+                </a:solidFill>
+                <a:latin typeface="Courier"/>
+              </a:rPr>
+              <a:t>  </a:t>
+            </a:r>
+            <a:r>
+              <a:rPr>
+                <a:solidFill>
+                  <a:srgbClr val="4758AB"/>
+                </a:solidFill>
+                <a:latin typeface="Courier"/>
+              </a:rPr>
+              <a:t>geom_hline</a:t>
+            </a:r>
+            <a:r>
+              <a:rPr>
+                <a:solidFill>
+                  <a:srgbClr val="003B4F"/>
+                </a:solidFill>
+                <a:latin typeface="Courier"/>
+              </a:rPr>
+              <a:t>(</a:t>
+            </a:r>
+            <a:r>
+              <a:rPr>
+                <a:solidFill>
+                  <a:srgbClr val="657422"/>
+                </a:solidFill>
+                <a:latin typeface="Courier"/>
+              </a:rPr>
+              <a:t>yintercept =</a:t>
+            </a:r>
+            <a:r>
+              <a:rPr>
+                <a:solidFill>
+                  <a:srgbClr val="003B4F"/>
+                </a:solidFill>
+                <a:latin typeface="Courier"/>
+              </a:rPr>
+              <a:t> </a:t>
+            </a:r>
+            <a:r>
+              <a:rPr>
+                <a:solidFill>
+                  <a:srgbClr val="AD0000"/>
+                </a:solidFill>
+                <a:latin typeface="Courier"/>
+              </a:rPr>
+              <a:t>0</a:t>
+            </a:r>
+            <a:r>
+              <a:rPr>
+                <a:solidFill>
+                  <a:srgbClr val="003B4F"/>
+                </a:solidFill>
+                <a:latin typeface="Courier"/>
+              </a:rPr>
+              <a:t>, </a:t>
+            </a:r>
+            <a:r>
+              <a:rPr>
+                <a:solidFill>
+                  <a:srgbClr val="657422"/>
+                </a:solidFill>
+                <a:latin typeface="Courier"/>
+              </a:rPr>
+              <a:t>linetype =</a:t>
+            </a:r>
+            <a:r>
+              <a:rPr>
+                <a:solidFill>
+                  <a:srgbClr val="003B4F"/>
+                </a:solidFill>
+                <a:latin typeface="Courier"/>
+              </a:rPr>
+              <a:t> </a:t>
+            </a:r>
+            <a:r>
+              <a:rPr>
+                <a:solidFill>
+                  <a:srgbClr val="20794D"/>
+                </a:solidFill>
+                <a:latin typeface="Courier"/>
+              </a:rPr>
+              <a:t>"dashed"</a:t>
+            </a:r>
+            <a:r>
+              <a:rPr>
+                <a:solidFill>
+                  <a:srgbClr val="003B4F"/>
+                </a:solidFill>
+                <a:latin typeface="Courier"/>
+              </a:rPr>
+              <a:t>) </a:t>
+            </a:r>
+            <a:r>
+              <a:rPr>
+                <a:solidFill>
+                  <a:srgbClr val="5E5E5E"/>
+                </a:solidFill>
+                <a:latin typeface="Courier"/>
+              </a:rPr>
+              <a:t>+</a:t>
+            </a:r>
+            <a:br/>
+            <a:r>
+              <a:rPr>
+                <a:solidFill>
+                  <a:srgbClr val="003B4F"/>
+                </a:solidFill>
+                <a:latin typeface="Courier"/>
+              </a:rPr>
+              <a:t>  </a:t>
+            </a:r>
+            <a:r>
+              <a:rPr>
+                <a:solidFill>
+                  <a:srgbClr val="4758AB"/>
+                </a:solidFill>
+                <a:latin typeface="Courier"/>
+              </a:rPr>
+              <a:t>labs</a:t>
+            </a:r>
+            <a:r>
+              <a:rPr>
+                <a:solidFill>
+                  <a:srgbClr val="003B4F"/>
+                </a:solidFill>
+                <a:latin typeface="Courier"/>
+              </a:rPr>
+              <a:t>(</a:t>
+            </a:r>
+            <a:r>
+              <a:rPr>
+                <a:solidFill>
+                  <a:srgbClr val="657422"/>
+                </a:solidFill>
+                <a:latin typeface="Courier"/>
+              </a:rPr>
+              <a:t>title =</a:t>
+            </a:r>
+            <a:r>
+              <a:rPr>
+                <a:solidFill>
+                  <a:srgbClr val="003B4F"/>
+                </a:solidFill>
+                <a:latin typeface="Courier"/>
+              </a:rPr>
+              <a:t> </a:t>
+            </a:r>
+            <a:r>
+              <a:rPr>
+                <a:solidFill>
+                  <a:srgbClr val="20794D"/>
+                </a:solidFill>
+                <a:latin typeface="Courier"/>
+              </a:rPr>
+              <a:t>"PC1 Loadings"</a:t>
+            </a:r>
+            <a:r>
+              <a:rPr>
+                <a:solidFill>
+                  <a:srgbClr val="003B4F"/>
+                </a:solidFill>
+                <a:latin typeface="Courier"/>
+              </a:rPr>
+              <a:t>,</a:t>
+            </a:r>
+            <a:br/>
+            <a:r>
+              <a:rPr>
+                <a:solidFill>
+                  <a:srgbClr val="003B4F"/>
+                </a:solidFill>
+                <a:latin typeface="Courier"/>
+              </a:rPr>
+              <a:t>       </a:t>
+            </a:r>
+            <a:r>
+              <a:rPr>
+                <a:solidFill>
+                  <a:srgbClr val="657422"/>
+                </a:solidFill>
+                <a:latin typeface="Courier"/>
+              </a:rPr>
+              <a:t>subtitle =</a:t>
+            </a:r>
+            <a:r>
+              <a:rPr>
+                <a:solidFill>
+                  <a:srgbClr val="003B4F"/>
+                </a:solidFill>
+                <a:latin typeface="Courier"/>
+              </a:rPr>
+              <a:t> </a:t>
+            </a:r>
+            <a:r>
+              <a:rPr>
+                <a:solidFill>
+                  <a:srgbClr val="20794D"/>
+                </a:solidFill>
+                <a:latin typeface="Courier"/>
+              </a:rPr>
+              <a:t>"Overall Plant Size"</a:t>
+            </a:r>
+            <a:r>
+              <a:rPr>
+                <a:solidFill>
+                  <a:srgbClr val="003B4F"/>
+                </a:solidFill>
+                <a:latin typeface="Courier"/>
+              </a:rPr>
+              <a:t>,</a:t>
+            </a:r>
+            <a:br/>
+            <a:r>
+              <a:rPr>
+                <a:solidFill>
+                  <a:srgbClr val="003B4F"/>
+                </a:solidFill>
+                <a:latin typeface="Courier"/>
+              </a:rPr>
+              <a:t>       </a:t>
+            </a:r>
+            <a:r>
+              <a:rPr>
+                <a:solidFill>
+                  <a:srgbClr val="657422"/>
+                </a:solidFill>
+                <a:latin typeface="Courier"/>
+              </a:rPr>
+              <a:t>x =</a:t>
+            </a:r>
+            <a:r>
+              <a:rPr>
+                <a:solidFill>
+                  <a:srgbClr val="003B4F"/>
+                </a:solidFill>
+                <a:latin typeface="Courier"/>
+              </a:rPr>
+              <a:t> </a:t>
+            </a:r>
+            <a:r>
+              <a:rPr>
+                <a:solidFill>
+                  <a:srgbClr val="20794D"/>
+                </a:solidFill>
+                <a:latin typeface="Courier"/>
+              </a:rPr>
+              <a:t>"Variable"</a:t>
+            </a:r>
+            <a:r>
+              <a:rPr>
+                <a:solidFill>
+                  <a:srgbClr val="003B4F"/>
+                </a:solidFill>
+                <a:latin typeface="Courier"/>
+              </a:rPr>
+              <a:t>,</a:t>
+            </a:r>
+            <a:br/>
+            <a:r>
+              <a:rPr>
+                <a:solidFill>
+                  <a:srgbClr val="003B4F"/>
+                </a:solidFill>
+                <a:latin typeface="Courier"/>
+              </a:rPr>
+              <a:t>       </a:t>
+            </a:r>
+            <a:r>
+              <a:rPr>
+                <a:solidFill>
+                  <a:srgbClr val="657422"/>
+                </a:solidFill>
+                <a:latin typeface="Courier"/>
+              </a:rPr>
+              <a:t>y =</a:t>
+            </a:r>
+            <a:r>
+              <a:rPr>
+                <a:solidFill>
+                  <a:srgbClr val="003B4F"/>
+                </a:solidFill>
+                <a:latin typeface="Courier"/>
+              </a:rPr>
+              <a:t> </a:t>
+            </a:r>
+            <a:r>
+              <a:rPr>
+                <a:solidFill>
+                  <a:srgbClr val="20794D"/>
+                </a:solidFill>
+                <a:latin typeface="Courier"/>
+              </a:rPr>
+              <a:t>"Loading"</a:t>
+            </a:r>
+            <a:r>
+              <a:rPr>
+                <a:solidFill>
+                  <a:srgbClr val="003B4F"/>
+                </a:solidFill>
+                <a:latin typeface="Courier"/>
+              </a:rPr>
+              <a:t>) </a:t>
+            </a:r>
+            <a:r>
+              <a:rPr>
+                <a:solidFill>
+                  <a:srgbClr val="5E5E5E"/>
+                </a:solidFill>
+                <a:latin typeface="Courier"/>
+              </a:rPr>
+              <a:t>+</a:t>
+            </a:r>
+            <a:br/>
+            <a:r>
+              <a:rPr>
+                <a:solidFill>
+                  <a:srgbClr val="003B4F"/>
+                </a:solidFill>
+                <a:latin typeface="Courier"/>
+              </a:rPr>
+              <a:t>  </a:t>
+            </a:r>
+            <a:r>
+              <a:rPr>
+                <a:solidFill>
+                  <a:srgbClr val="4758AB"/>
+                </a:solidFill>
+                <a:latin typeface="Courier"/>
+              </a:rPr>
+              <a:t>scale_fill_manual</a:t>
+            </a:r>
+            <a:r>
+              <a:rPr>
+                <a:solidFill>
+                  <a:srgbClr val="003B4F"/>
+                </a:solidFill>
+                <a:latin typeface="Courier"/>
+              </a:rPr>
+              <a:t>(</a:t>
+            </a:r>
+            <a:r>
+              <a:rPr>
+                <a:solidFill>
+                  <a:srgbClr val="657422"/>
+                </a:solidFill>
+                <a:latin typeface="Courier"/>
+              </a:rPr>
+              <a:t>values =</a:t>
+            </a:r>
+            <a:r>
+              <a:rPr>
+                <a:solidFill>
+                  <a:srgbClr val="003B4F"/>
+                </a:solidFill>
+                <a:latin typeface="Courier"/>
+              </a:rPr>
+              <a:t> </a:t>
+            </a:r>
+            <a:r>
+              <a:rPr>
+                <a:solidFill>
+                  <a:srgbClr val="4758AB"/>
+                </a:solidFill>
+                <a:latin typeface="Courier"/>
+              </a:rPr>
+              <a:t>c</a:t>
+            </a:r>
+            <a:r>
+              <a:rPr>
+                <a:solidFill>
+                  <a:srgbClr val="003B4F"/>
+                </a:solidFill>
+                <a:latin typeface="Courier"/>
+              </a:rPr>
+              <a:t>(</a:t>
+            </a:r>
+            <a:r>
+              <a:rPr>
+                <a:solidFill>
+                  <a:srgbClr val="20794D"/>
+                </a:solidFill>
+                <a:latin typeface="Courier"/>
+              </a:rPr>
+              <a:t>"FALSE"</a:t>
+            </a:r>
+            <a:r>
+              <a:rPr>
+                <a:solidFill>
+                  <a:srgbClr val="003B4F"/>
+                </a:solidFill>
+                <a:latin typeface="Courier"/>
+              </a:rPr>
+              <a:t> = </a:t>
+            </a:r>
+            <a:r>
+              <a:rPr>
+                <a:solidFill>
+                  <a:srgbClr val="20794D"/>
+                </a:solidFill>
+                <a:latin typeface="Courier"/>
+              </a:rPr>
+              <a:t>"coral"</a:t>
+            </a:r>
+            <a:r>
+              <a:rPr>
+                <a:solidFill>
+                  <a:srgbClr val="003B4F"/>
+                </a:solidFill>
+                <a:latin typeface="Courier"/>
+              </a:rPr>
+              <a:t>, </a:t>
+            </a:r>
+            <a:r>
+              <a:rPr>
+                <a:solidFill>
+                  <a:srgbClr val="20794D"/>
+                </a:solidFill>
+                <a:latin typeface="Courier"/>
+              </a:rPr>
+              <a:t>"TRUE"</a:t>
+            </a:r>
+            <a:r>
+              <a:rPr>
+                <a:solidFill>
+                  <a:srgbClr val="003B4F"/>
+                </a:solidFill>
+                <a:latin typeface="Courier"/>
+              </a:rPr>
+              <a:t> = </a:t>
+            </a:r>
+            <a:r>
+              <a:rPr>
+                <a:solidFill>
+                  <a:srgbClr val="20794D"/>
+                </a:solidFill>
+                <a:latin typeface="Courier"/>
+              </a:rPr>
+              <a:t>"steelblue"</a:t>
+            </a:r>
+            <a:r>
+              <a:rPr>
+                <a:solidFill>
+                  <a:srgbClr val="003B4F"/>
+                </a:solidFill>
+                <a:latin typeface="Courier"/>
+              </a:rPr>
+              <a:t>)) </a:t>
+            </a:r>
+            <a:r>
+              <a:rPr>
+                <a:solidFill>
+                  <a:srgbClr val="5E5E5E"/>
+                </a:solidFill>
+                <a:latin typeface="Courier"/>
+              </a:rPr>
+              <a:t>+</a:t>
+            </a:r>
+            <a:br/>
+            <a:r>
+              <a:rPr>
+                <a:solidFill>
+                  <a:srgbClr val="003B4F"/>
+                </a:solidFill>
+                <a:latin typeface="Courier"/>
+              </a:rPr>
+              <a:t>  </a:t>
+            </a:r>
+            <a:r>
+              <a:rPr>
+                <a:solidFill>
+                  <a:srgbClr val="4758AB"/>
+                </a:solidFill>
+                <a:latin typeface="Courier"/>
+              </a:rPr>
+              <a:t>theme_minimal</a:t>
+            </a:r>
+            <a:r>
+              <a:rPr>
+                <a:solidFill>
+                  <a:srgbClr val="003B4F"/>
+                </a:solidFill>
+                <a:latin typeface="Courier"/>
+              </a:rPr>
+              <a:t>()</a:t>
+            </a:r>
+          </a:p>
+          <a:p>
+            <a:pPr lvl="0" indent="0" marL="0">
+              <a:buNone/>
+            </a:pPr>
+            <a:r>
+              <a:rPr b="1"/>
+              <a:t>▶ Run this</a:t>
+            </a:r>
+            <a:r>
+              <a:rPr/>
+              <a:t> — same for PC2:</a:t>
+            </a:r>
+          </a:p>
+          <a:p>
+            <a:pPr lvl="0" indent="0">
+              <a:buNone/>
+            </a:pPr>
+            <a:r>
+              <a:rPr>
+                <a:solidFill>
+                  <a:srgbClr val="003B4F"/>
+                </a:solidFill>
+                <a:latin typeface="Courier"/>
+              </a:rPr>
+              <a:t>pc2_loads &lt;- </a:t>
+            </a:r>
+            <a:r>
+              <a:rPr>
+                <a:solidFill>
+                  <a:srgbClr val="4758AB"/>
+                </a:solidFill>
+                <a:latin typeface="Courier"/>
+              </a:rPr>
+              <a:t>tibble</a:t>
+            </a:r>
+            <a:r>
+              <a:rPr>
+                <a:solidFill>
+                  <a:srgbClr val="003B4F"/>
+                </a:solidFill>
+                <a:latin typeface="Courier"/>
+              </a:rPr>
+              <a:t>(</a:t>
+            </a:r>
+            <a:br/>
+            <a:r>
+              <a:rPr>
+                <a:solidFill>
+                  <a:srgbClr val="003B4F"/>
+                </a:solidFill>
+                <a:latin typeface="Courier"/>
+              </a:rPr>
+              <a:t>  </a:t>
+            </a:r>
+            <a:r>
+              <a:rPr>
+                <a:solidFill>
+                  <a:srgbClr val="657422"/>
+                </a:solidFill>
+                <a:latin typeface="Courier"/>
+              </a:rPr>
+              <a:t>Variable =</a:t>
+            </a:r>
+            <a:r>
+              <a:rPr>
+                <a:solidFill>
+                  <a:srgbClr val="003B4F"/>
+                </a:solidFill>
+                <a:latin typeface="Courier"/>
+              </a:rPr>
+              <a:t> </a:t>
+            </a:r>
+            <a:r>
+              <a:rPr>
+                <a:solidFill>
+                  <a:srgbClr val="4758AB"/>
+                </a:solidFill>
+                <a:latin typeface="Courier"/>
+              </a:rPr>
+              <a:t>rownames</a:t>
+            </a:r>
+            <a:r>
+              <a:rPr>
+                <a:solidFill>
+                  <a:srgbClr val="003B4F"/>
+                </a:solidFill>
+                <a:latin typeface="Courier"/>
+              </a:rPr>
+              <a:t>(pca_result</a:t>
+            </a:r>
+            <a:r>
+              <a:rPr>
+                <a:solidFill>
+                  <a:srgbClr val="5E5E5E"/>
+                </a:solidFill>
+                <a:latin typeface="Courier"/>
+              </a:rPr>
+              <a:t>$</a:t>
+            </a:r>
+            <a:r>
+              <a:rPr>
+                <a:solidFill>
+                  <a:srgbClr val="003B4F"/>
+                </a:solidFill>
+                <a:latin typeface="Courier"/>
+              </a:rPr>
+              <a:t>rotation),</a:t>
+            </a:r>
+            <a:br/>
+            <a:r>
+              <a:rPr>
+                <a:solidFill>
+                  <a:srgbClr val="003B4F"/>
+                </a:solidFill>
+                <a:latin typeface="Courier"/>
+              </a:rPr>
+              <a:t>  </a:t>
+            </a:r>
+            <a:r>
+              <a:rPr>
+                <a:solidFill>
+                  <a:srgbClr val="657422"/>
+                </a:solidFill>
+                <a:latin typeface="Courier"/>
+              </a:rPr>
+              <a:t>Loading =</a:t>
+            </a:r>
+            <a:r>
+              <a:rPr>
+                <a:solidFill>
+                  <a:srgbClr val="003B4F"/>
+                </a:solidFill>
+                <a:latin typeface="Courier"/>
+              </a:rPr>
+              <a:t> pca_result</a:t>
+            </a:r>
+            <a:r>
+              <a:rPr>
+                <a:solidFill>
+                  <a:srgbClr val="5E5E5E"/>
+                </a:solidFill>
+                <a:latin typeface="Courier"/>
+              </a:rPr>
+              <a:t>$</a:t>
+            </a:r>
+            <a:r>
+              <a:rPr>
+                <a:solidFill>
+                  <a:srgbClr val="003B4F"/>
+                </a:solidFill>
+                <a:latin typeface="Courier"/>
+              </a:rPr>
+              <a:t>rotation[, </a:t>
+            </a:r>
+            <a:r>
+              <a:rPr>
+                <a:solidFill>
+                  <a:srgbClr val="AD0000"/>
+                </a:solidFill>
+                <a:latin typeface="Courier"/>
+              </a:rPr>
+              <a:t>2</a:t>
+            </a:r>
+            <a:r>
+              <a:rPr>
+                <a:solidFill>
+                  <a:srgbClr val="003B4F"/>
+                </a:solidFill>
+                <a:latin typeface="Courier"/>
+              </a:rPr>
+              <a:t>]</a:t>
+            </a:r>
+            <a:br/>
+            <a:r>
+              <a:rPr>
+                <a:solidFill>
+                  <a:srgbClr val="003B4F"/>
+                </a:solidFill>
+                <a:latin typeface="Courier"/>
+              </a:rPr>
+              <a:t>) </a:t>
+            </a:r>
+            <a:r>
+              <a:rPr>
+                <a:solidFill>
+                  <a:srgbClr val="5E5E5E"/>
+                </a:solidFill>
+                <a:latin typeface="Courier"/>
+              </a:rPr>
+              <a:t>%&gt;%</a:t>
+            </a:r>
+            <a:br/>
+            <a:r>
+              <a:rPr>
+                <a:solidFill>
+                  <a:srgbClr val="003B4F"/>
+                </a:solidFill>
+                <a:latin typeface="Courier"/>
+              </a:rPr>
+              <a:t>  </a:t>
+            </a:r>
+            <a:r>
+              <a:rPr>
+                <a:solidFill>
+                  <a:srgbClr val="4758AB"/>
+                </a:solidFill>
+                <a:latin typeface="Courier"/>
+              </a:rPr>
+              <a:t>arrange</a:t>
+            </a:r>
+            <a:r>
+              <a:rPr>
+                <a:solidFill>
+                  <a:srgbClr val="003B4F"/>
+                </a:solidFill>
+                <a:latin typeface="Courier"/>
+              </a:rPr>
+              <a:t>(</a:t>
+            </a:r>
+            <a:r>
+              <a:rPr>
+                <a:solidFill>
+                  <a:srgbClr val="4758AB"/>
+                </a:solidFill>
+                <a:latin typeface="Courier"/>
+              </a:rPr>
+              <a:t>desc</a:t>
+            </a:r>
+            <a:r>
+              <a:rPr>
+                <a:solidFill>
+                  <a:srgbClr val="003B4F"/>
+                </a:solidFill>
+                <a:latin typeface="Courier"/>
+              </a:rPr>
+              <a:t>(</a:t>
+            </a:r>
+            <a:r>
+              <a:rPr>
+                <a:solidFill>
+                  <a:srgbClr val="4758AB"/>
+                </a:solidFill>
+                <a:latin typeface="Courier"/>
+              </a:rPr>
+              <a:t>abs</a:t>
+            </a:r>
+            <a:r>
+              <a:rPr>
+                <a:solidFill>
+                  <a:srgbClr val="003B4F"/>
+                </a:solidFill>
+                <a:latin typeface="Courier"/>
+              </a:rPr>
+              <a:t>(Loading)))</a:t>
+            </a:r>
+            <a:br/>
+            <a:br/>
+            <a:r>
+              <a:rPr>
+                <a:solidFill>
+                  <a:srgbClr val="003B4F"/>
+                </a:solidFill>
+                <a:latin typeface="Courier"/>
+              </a:rPr>
+              <a:t>pc2_loads</a:t>
+            </a:r>
+            <a:br/>
+            <a:br/>
+            <a:r>
+              <a:rPr>
+                <a:solidFill>
+                  <a:srgbClr val="003B4F"/>
+                </a:solidFill>
+                <a:latin typeface="Courier"/>
+              </a:rPr>
+              <a:t>pc2_loads </a:t>
+            </a:r>
+            <a:r>
+              <a:rPr>
+                <a:solidFill>
+                  <a:srgbClr val="5E5E5E"/>
+                </a:solidFill>
+                <a:latin typeface="Courier"/>
+              </a:rPr>
+              <a:t>%&gt;%</a:t>
+            </a:r>
+            <a:br/>
+            <a:r>
+              <a:rPr>
+                <a:solidFill>
+                  <a:srgbClr val="003B4F"/>
+                </a:solidFill>
+                <a:latin typeface="Courier"/>
+              </a:rPr>
+              <a:t>  </a:t>
+            </a:r>
+            <a:r>
+              <a:rPr>
+                <a:solidFill>
+                  <a:srgbClr val="4758AB"/>
+                </a:solidFill>
+                <a:latin typeface="Courier"/>
+              </a:rPr>
+              <a:t>ggplot</a:t>
+            </a:r>
+            <a:r>
+              <a:rPr>
+                <a:solidFill>
+                  <a:srgbClr val="003B4F"/>
+                </a:solidFill>
+                <a:latin typeface="Courier"/>
+              </a:rPr>
+              <a:t>(</a:t>
+            </a:r>
+            <a:r>
+              <a:rPr>
+                <a:solidFill>
+                  <a:srgbClr val="4758AB"/>
+                </a:solidFill>
+                <a:latin typeface="Courier"/>
+              </a:rPr>
+              <a:t>aes</a:t>
+            </a:r>
+            <a:r>
+              <a:rPr>
+                <a:solidFill>
+                  <a:srgbClr val="003B4F"/>
+                </a:solidFill>
+                <a:latin typeface="Courier"/>
+              </a:rPr>
+              <a:t>(</a:t>
+            </a:r>
+            <a:r>
+              <a:rPr>
+                <a:solidFill>
+                  <a:srgbClr val="657422"/>
+                </a:solidFill>
+                <a:latin typeface="Courier"/>
+              </a:rPr>
+              <a:t>x =</a:t>
+            </a:r>
+            <a:r>
+              <a:rPr>
+                <a:solidFill>
+                  <a:srgbClr val="003B4F"/>
+                </a:solidFill>
+                <a:latin typeface="Courier"/>
+              </a:rPr>
+              <a:t> </a:t>
+            </a:r>
+            <a:r>
+              <a:rPr>
+                <a:solidFill>
+                  <a:srgbClr val="4758AB"/>
+                </a:solidFill>
+                <a:latin typeface="Courier"/>
+              </a:rPr>
+              <a:t>reorder</a:t>
+            </a:r>
+            <a:r>
+              <a:rPr>
+                <a:solidFill>
+                  <a:srgbClr val="003B4F"/>
+                </a:solidFill>
+                <a:latin typeface="Courier"/>
+              </a:rPr>
+              <a:t>(Variable, Loading), </a:t>
+            </a:r>
+            <a:r>
+              <a:rPr>
+                <a:solidFill>
+                  <a:srgbClr val="657422"/>
+                </a:solidFill>
+                <a:latin typeface="Courier"/>
+              </a:rPr>
+              <a:t>y =</a:t>
+            </a:r>
+            <a:r>
+              <a:rPr>
+                <a:solidFill>
+                  <a:srgbClr val="003B4F"/>
+                </a:solidFill>
+                <a:latin typeface="Courier"/>
+              </a:rPr>
+              <a:t> Loading)) </a:t>
+            </a:r>
+            <a:r>
+              <a:rPr>
+                <a:solidFill>
+                  <a:srgbClr val="5E5E5E"/>
+                </a:solidFill>
+                <a:latin typeface="Courier"/>
+              </a:rPr>
+              <a:t>+</a:t>
+            </a:r>
+            <a:br/>
+            <a:r>
+              <a:rPr>
+                <a:solidFill>
+                  <a:srgbClr val="003B4F"/>
+                </a:solidFill>
+                <a:latin typeface="Courier"/>
+              </a:rPr>
+              <a:t>  </a:t>
+            </a:r>
+            <a:r>
+              <a:rPr>
+                <a:solidFill>
+                  <a:srgbClr val="4758AB"/>
+                </a:solidFill>
+                <a:latin typeface="Courier"/>
+              </a:rPr>
+              <a:t>geom_col</a:t>
+            </a:r>
+            <a:r>
+              <a:rPr>
+                <a:solidFill>
+                  <a:srgbClr val="003B4F"/>
+                </a:solidFill>
+                <a:latin typeface="Courier"/>
+              </a:rPr>
+              <a:t>(</a:t>
+            </a:r>
+            <a:r>
+              <a:rPr>
+                <a:solidFill>
+                  <a:srgbClr val="4758AB"/>
+                </a:solidFill>
+                <a:latin typeface="Courier"/>
+              </a:rPr>
+              <a:t>aes</a:t>
+            </a:r>
+            <a:r>
+              <a:rPr>
+                <a:solidFill>
+                  <a:srgbClr val="003B4F"/>
+                </a:solidFill>
+                <a:latin typeface="Courier"/>
+              </a:rPr>
+              <a:t>(</a:t>
+            </a:r>
+            <a:r>
+              <a:rPr>
+                <a:solidFill>
+                  <a:srgbClr val="657422"/>
+                </a:solidFill>
+                <a:latin typeface="Courier"/>
+              </a:rPr>
+              <a:t>fill =</a:t>
+            </a:r>
+            <a:r>
+              <a:rPr>
+                <a:solidFill>
+                  <a:srgbClr val="003B4F"/>
+                </a:solidFill>
+                <a:latin typeface="Courier"/>
+              </a:rPr>
+              <a:t> Loading </a:t>
+            </a:r>
+            <a:r>
+              <a:rPr>
+                <a:solidFill>
+                  <a:srgbClr val="5E5E5E"/>
+                </a:solidFill>
+                <a:latin typeface="Courier"/>
+              </a:rPr>
+              <a:t>&gt;</a:t>
+            </a:r>
+            <a:r>
+              <a:rPr>
+                <a:solidFill>
+                  <a:srgbClr val="003B4F"/>
+                </a:solidFill>
+                <a:latin typeface="Courier"/>
+              </a:rPr>
+              <a:t> </a:t>
+            </a:r>
+            <a:r>
+              <a:rPr>
+                <a:solidFill>
+                  <a:srgbClr val="AD0000"/>
+                </a:solidFill>
+                <a:latin typeface="Courier"/>
+              </a:rPr>
+              <a:t>0</a:t>
+            </a:r>
+            <a:r>
+              <a:rPr>
+                <a:solidFill>
+                  <a:srgbClr val="003B4F"/>
+                </a:solidFill>
+                <a:latin typeface="Courier"/>
+              </a:rPr>
+              <a:t>), </a:t>
+            </a:r>
+            <a:r>
+              <a:rPr>
+                <a:solidFill>
+                  <a:srgbClr val="657422"/>
+                </a:solidFill>
+                <a:latin typeface="Courier"/>
+              </a:rPr>
+              <a:t>show.legend =</a:t>
+            </a:r>
+            <a:r>
+              <a:rPr>
+                <a:solidFill>
+                  <a:srgbClr val="003B4F"/>
+                </a:solidFill>
+                <a:latin typeface="Courier"/>
+              </a:rPr>
+              <a:t> </a:t>
+            </a:r>
+            <a:r>
+              <a:rPr>
+                <a:solidFill>
+                  <a:srgbClr val="8F5902"/>
+                </a:solidFill>
+                <a:latin typeface="Courier"/>
+              </a:rPr>
+              <a:t>FALSE</a:t>
+            </a:r>
+            <a:r>
+              <a:rPr>
+                <a:solidFill>
+                  <a:srgbClr val="003B4F"/>
+                </a:solidFill>
+                <a:latin typeface="Courier"/>
+              </a:rPr>
+              <a:t>) </a:t>
+            </a:r>
+            <a:r>
+              <a:rPr>
+                <a:solidFill>
+                  <a:srgbClr val="5E5E5E"/>
+                </a:solidFill>
+                <a:latin typeface="Courier"/>
+              </a:rPr>
+              <a:t>+</a:t>
+            </a:r>
+            <a:br/>
+            <a:r>
+              <a:rPr>
+                <a:solidFill>
+                  <a:srgbClr val="003B4F"/>
+                </a:solidFill>
+                <a:latin typeface="Courier"/>
+              </a:rPr>
+              <a:t>  </a:t>
+            </a:r>
+            <a:r>
+              <a:rPr>
+                <a:solidFill>
+                  <a:srgbClr val="4758AB"/>
+                </a:solidFill>
+                <a:latin typeface="Courier"/>
+              </a:rPr>
+              <a:t>coord_flip</a:t>
+            </a:r>
+            <a:r>
+              <a:rPr>
+                <a:solidFill>
+                  <a:srgbClr val="003B4F"/>
+                </a:solidFill>
+                <a:latin typeface="Courier"/>
+              </a:rPr>
+              <a:t>() </a:t>
+            </a:r>
+            <a:r>
+              <a:rPr>
+                <a:solidFill>
+                  <a:srgbClr val="5E5E5E"/>
+                </a:solidFill>
+                <a:latin typeface="Courier"/>
+              </a:rPr>
+              <a:t>+</a:t>
+            </a:r>
+            <a:br/>
+            <a:r>
+              <a:rPr>
+                <a:solidFill>
+                  <a:srgbClr val="003B4F"/>
+                </a:solidFill>
+                <a:latin typeface="Courier"/>
+              </a:rPr>
+              <a:t>  </a:t>
+            </a:r>
+            <a:r>
+              <a:rPr>
+                <a:solidFill>
+                  <a:srgbClr val="4758AB"/>
+                </a:solidFill>
+                <a:latin typeface="Courier"/>
+              </a:rPr>
+              <a:t>geom_hline</a:t>
+            </a:r>
+            <a:r>
+              <a:rPr>
+                <a:solidFill>
+                  <a:srgbClr val="003B4F"/>
+                </a:solidFill>
+                <a:latin typeface="Courier"/>
+              </a:rPr>
+              <a:t>(</a:t>
+            </a:r>
+            <a:r>
+              <a:rPr>
+                <a:solidFill>
+                  <a:srgbClr val="657422"/>
+                </a:solidFill>
+                <a:latin typeface="Courier"/>
+              </a:rPr>
+              <a:t>yintercept =</a:t>
+            </a:r>
+            <a:r>
+              <a:rPr>
+                <a:solidFill>
+                  <a:srgbClr val="003B4F"/>
+                </a:solidFill>
+                <a:latin typeface="Courier"/>
+              </a:rPr>
+              <a:t> </a:t>
+            </a:r>
+            <a:r>
+              <a:rPr>
+                <a:solidFill>
+                  <a:srgbClr val="AD0000"/>
+                </a:solidFill>
+                <a:latin typeface="Courier"/>
+              </a:rPr>
+              <a:t>0</a:t>
+            </a:r>
+            <a:r>
+              <a:rPr>
+                <a:solidFill>
+                  <a:srgbClr val="003B4F"/>
+                </a:solidFill>
+                <a:latin typeface="Courier"/>
+              </a:rPr>
+              <a:t>, </a:t>
+            </a:r>
+            <a:r>
+              <a:rPr>
+                <a:solidFill>
+                  <a:srgbClr val="657422"/>
+                </a:solidFill>
+                <a:latin typeface="Courier"/>
+              </a:rPr>
+              <a:t>linetype =</a:t>
+            </a:r>
+            <a:r>
+              <a:rPr>
+                <a:solidFill>
+                  <a:srgbClr val="003B4F"/>
+                </a:solidFill>
+                <a:latin typeface="Courier"/>
+              </a:rPr>
+              <a:t> </a:t>
+            </a:r>
+            <a:r>
+              <a:rPr>
+                <a:solidFill>
+                  <a:srgbClr val="20794D"/>
+                </a:solidFill>
+                <a:latin typeface="Courier"/>
+              </a:rPr>
+              <a:t>"dashed"</a:t>
+            </a:r>
+            <a:r>
+              <a:rPr>
+                <a:solidFill>
+                  <a:srgbClr val="003B4F"/>
+                </a:solidFill>
+                <a:latin typeface="Courier"/>
+              </a:rPr>
+              <a:t>) </a:t>
+            </a:r>
+            <a:r>
+              <a:rPr>
+                <a:solidFill>
+                  <a:srgbClr val="5E5E5E"/>
+                </a:solidFill>
+                <a:latin typeface="Courier"/>
+              </a:rPr>
+              <a:t>+</a:t>
+            </a:r>
+            <a:br/>
+            <a:r>
+              <a:rPr>
+                <a:solidFill>
+                  <a:srgbClr val="003B4F"/>
+                </a:solidFill>
+                <a:latin typeface="Courier"/>
+              </a:rPr>
+              <a:t>  </a:t>
+            </a:r>
+            <a:r>
+              <a:rPr>
+                <a:solidFill>
+                  <a:srgbClr val="4758AB"/>
+                </a:solidFill>
+                <a:latin typeface="Courier"/>
+              </a:rPr>
+              <a:t>labs</a:t>
+            </a:r>
+            <a:r>
+              <a:rPr>
+                <a:solidFill>
+                  <a:srgbClr val="003B4F"/>
+                </a:solidFill>
+                <a:latin typeface="Courier"/>
+              </a:rPr>
+              <a:t>(</a:t>
+            </a:r>
+            <a:r>
+              <a:rPr>
+                <a:solidFill>
+                  <a:srgbClr val="657422"/>
+                </a:solidFill>
+                <a:latin typeface="Courier"/>
+              </a:rPr>
+              <a:t>title =</a:t>
+            </a:r>
+            <a:r>
+              <a:rPr>
+                <a:solidFill>
+                  <a:srgbClr val="003B4F"/>
+                </a:solidFill>
+                <a:latin typeface="Courier"/>
+              </a:rPr>
+              <a:t> </a:t>
+            </a:r>
+            <a:r>
+              <a:rPr>
+                <a:solidFill>
+                  <a:srgbClr val="20794D"/>
+                </a:solidFill>
+                <a:latin typeface="Courier"/>
+              </a:rPr>
+              <a:t>"PC2 Loadings"</a:t>
+            </a:r>
+            <a:r>
+              <a:rPr>
+                <a:solidFill>
+                  <a:srgbClr val="003B4F"/>
+                </a:solidFill>
+                <a:latin typeface="Courier"/>
+              </a:rPr>
+              <a:t>,</a:t>
+            </a:r>
+            <a:br/>
+            <a:r>
+              <a:rPr>
+                <a:solidFill>
+                  <a:srgbClr val="003B4F"/>
+                </a:solidFill>
+                <a:latin typeface="Courier"/>
+              </a:rPr>
+              <a:t>       </a:t>
+            </a:r>
+            <a:r>
+              <a:rPr>
+                <a:solidFill>
+                  <a:srgbClr val="657422"/>
+                </a:solidFill>
+                <a:latin typeface="Courier"/>
+              </a:rPr>
+              <a:t>subtitle =</a:t>
+            </a:r>
+            <a:r>
+              <a:rPr>
+                <a:solidFill>
+                  <a:srgbClr val="003B4F"/>
+                </a:solidFill>
+                <a:latin typeface="Courier"/>
+              </a:rPr>
+              <a:t> </a:t>
+            </a:r>
+            <a:r>
+              <a:rPr>
+                <a:solidFill>
+                  <a:srgbClr val="20794D"/>
+                </a:solidFill>
+                <a:latin typeface="Courier"/>
+              </a:rPr>
+              <a:t>"Shape: Height vs. Wing Size"</a:t>
+            </a:r>
+            <a:r>
+              <a:rPr>
+                <a:solidFill>
+                  <a:srgbClr val="003B4F"/>
+                </a:solidFill>
+                <a:latin typeface="Courier"/>
+              </a:rPr>
+              <a:t>,</a:t>
+            </a:r>
+            <a:br/>
+            <a:r>
+              <a:rPr>
+                <a:solidFill>
+                  <a:srgbClr val="003B4F"/>
+                </a:solidFill>
+                <a:latin typeface="Courier"/>
+              </a:rPr>
+              <a:t>       </a:t>
+            </a:r>
+            <a:r>
+              <a:rPr>
+                <a:solidFill>
+                  <a:srgbClr val="657422"/>
+                </a:solidFill>
+                <a:latin typeface="Courier"/>
+              </a:rPr>
+              <a:t>x =</a:t>
+            </a:r>
+            <a:r>
+              <a:rPr>
+                <a:solidFill>
+                  <a:srgbClr val="003B4F"/>
+                </a:solidFill>
+                <a:latin typeface="Courier"/>
+              </a:rPr>
+              <a:t> </a:t>
+            </a:r>
+            <a:r>
+              <a:rPr>
+                <a:solidFill>
+                  <a:srgbClr val="20794D"/>
+                </a:solidFill>
+                <a:latin typeface="Courier"/>
+              </a:rPr>
+              <a:t>"Variable"</a:t>
+            </a:r>
+            <a:r>
+              <a:rPr>
+                <a:solidFill>
+                  <a:srgbClr val="003B4F"/>
+                </a:solidFill>
+                <a:latin typeface="Courier"/>
+              </a:rPr>
+              <a:t>,</a:t>
+            </a:r>
+            <a:br/>
+            <a:r>
+              <a:rPr>
+                <a:solidFill>
+                  <a:srgbClr val="003B4F"/>
+                </a:solidFill>
+                <a:latin typeface="Courier"/>
+              </a:rPr>
+              <a:t>       </a:t>
+            </a:r>
+            <a:r>
+              <a:rPr>
+                <a:solidFill>
+                  <a:srgbClr val="657422"/>
+                </a:solidFill>
+                <a:latin typeface="Courier"/>
+              </a:rPr>
+              <a:t>y =</a:t>
+            </a:r>
+            <a:r>
+              <a:rPr>
+                <a:solidFill>
+                  <a:srgbClr val="003B4F"/>
+                </a:solidFill>
+                <a:latin typeface="Courier"/>
+              </a:rPr>
+              <a:t> </a:t>
+            </a:r>
+            <a:r>
+              <a:rPr>
+                <a:solidFill>
+                  <a:srgbClr val="20794D"/>
+                </a:solidFill>
+                <a:latin typeface="Courier"/>
+              </a:rPr>
+              <a:t>"Loading"</a:t>
+            </a:r>
+            <a:r>
+              <a:rPr>
+                <a:solidFill>
+                  <a:srgbClr val="003B4F"/>
+                </a:solidFill>
+                <a:latin typeface="Courier"/>
+              </a:rPr>
+              <a:t>) </a:t>
+            </a:r>
+            <a:r>
+              <a:rPr>
+                <a:solidFill>
+                  <a:srgbClr val="5E5E5E"/>
+                </a:solidFill>
+                <a:latin typeface="Courier"/>
+              </a:rPr>
+              <a:t>+</a:t>
+            </a:r>
+            <a:br/>
+            <a:r>
+              <a:rPr>
+                <a:solidFill>
+                  <a:srgbClr val="003B4F"/>
+                </a:solidFill>
+                <a:latin typeface="Courier"/>
+              </a:rPr>
+              <a:t>  </a:t>
+            </a:r>
+            <a:r>
+              <a:rPr>
+                <a:solidFill>
+                  <a:srgbClr val="4758AB"/>
+                </a:solidFill>
+                <a:latin typeface="Courier"/>
+              </a:rPr>
+              <a:t>scale_fill_manual</a:t>
+            </a:r>
+            <a:r>
+              <a:rPr>
+                <a:solidFill>
+                  <a:srgbClr val="003B4F"/>
+                </a:solidFill>
+                <a:latin typeface="Courier"/>
+              </a:rPr>
+              <a:t>(</a:t>
+            </a:r>
+            <a:r>
+              <a:rPr>
+                <a:solidFill>
+                  <a:srgbClr val="657422"/>
+                </a:solidFill>
+                <a:latin typeface="Courier"/>
+              </a:rPr>
+              <a:t>values =</a:t>
+            </a:r>
+            <a:r>
+              <a:rPr>
+                <a:solidFill>
+                  <a:srgbClr val="003B4F"/>
+                </a:solidFill>
+                <a:latin typeface="Courier"/>
+              </a:rPr>
+              <a:t> </a:t>
+            </a:r>
+            <a:r>
+              <a:rPr>
+                <a:solidFill>
+                  <a:srgbClr val="4758AB"/>
+                </a:solidFill>
+                <a:latin typeface="Courier"/>
+              </a:rPr>
+              <a:t>c</a:t>
+            </a:r>
+            <a:r>
+              <a:rPr>
+                <a:solidFill>
+                  <a:srgbClr val="003B4F"/>
+                </a:solidFill>
+                <a:latin typeface="Courier"/>
+              </a:rPr>
+              <a:t>(</a:t>
+            </a:r>
+            <a:r>
+              <a:rPr>
+                <a:solidFill>
+                  <a:srgbClr val="20794D"/>
+                </a:solidFill>
+                <a:latin typeface="Courier"/>
+              </a:rPr>
+              <a:t>"FALSE"</a:t>
+            </a:r>
+            <a:r>
+              <a:rPr>
+                <a:solidFill>
+                  <a:srgbClr val="003B4F"/>
+                </a:solidFill>
+                <a:latin typeface="Courier"/>
+              </a:rPr>
+              <a:t> = </a:t>
+            </a:r>
+            <a:r>
+              <a:rPr>
+                <a:solidFill>
+                  <a:srgbClr val="20794D"/>
+                </a:solidFill>
+                <a:latin typeface="Courier"/>
+              </a:rPr>
+              <a:t>"coral"</a:t>
+            </a:r>
+            <a:r>
+              <a:rPr>
+                <a:solidFill>
+                  <a:srgbClr val="003B4F"/>
+                </a:solidFill>
+                <a:latin typeface="Courier"/>
+              </a:rPr>
+              <a:t>, </a:t>
+            </a:r>
+            <a:r>
+              <a:rPr>
+                <a:solidFill>
+                  <a:srgbClr val="20794D"/>
+                </a:solidFill>
+                <a:latin typeface="Courier"/>
+              </a:rPr>
+              <a:t>"TRUE"</a:t>
+            </a:r>
+            <a:r>
+              <a:rPr>
+                <a:solidFill>
+                  <a:srgbClr val="003B4F"/>
+                </a:solidFill>
+                <a:latin typeface="Courier"/>
+              </a:rPr>
+              <a:t> = </a:t>
+            </a:r>
+            <a:r>
+              <a:rPr>
+                <a:solidFill>
+                  <a:srgbClr val="20794D"/>
+                </a:solidFill>
+                <a:latin typeface="Courier"/>
+              </a:rPr>
+              <a:t>"steelblue"</a:t>
+            </a:r>
+            <a:r>
+              <a:rPr>
+                <a:solidFill>
+                  <a:srgbClr val="003B4F"/>
+                </a:solidFill>
+                <a:latin typeface="Courier"/>
+              </a:rPr>
+              <a:t>)) </a:t>
+            </a:r>
+            <a:r>
+              <a:rPr>
+                <a:solidFill>
+                  <a:srgbClr val="5E5E5E"/>
+                </a:solidFill>
+                <a:latin typeface="Courier"/>
+              </a:rPr>
+              <a:t>+</a:t>
+            </a:r>
+            <a:br/>
+            <a:r>
+              <a:rPr>
+                <a:solidFill>
+                  <a:srgbClr val="003B4F"/>
+                </a:solidFill>
+                <a:latin typeface="Courier"/>
+              </a:rPr>
+              <a:t>  </a:t>
+            </a:r>
+            <a:r>
+              <a:rPr>
+                <a:solidFill>
+                  <a:srgbClr val="4758AB"/>
+                </a:solidFill>
+                <a:latin typeface="Courier"/>
+              </a:rPr>
+              <a:t>theme_minimal</a:t>
+            </a:r>
+            <a:r>
+              <a:rPr>
+                <a:solidFill>
+                  <a:srgbClr val="003B4F"/>
+                </a:solidFill>
+                <a:latin typeface="Courier"/>
+              </a:rPr>
+              <a:t>()</a:t>
+            </a:r>
+          </a:p>
+          <a:p>
+            <a:pPr lvl="0" indent="0" marL="0">
+              <a:buNone/>
+            </a:pPr>
+            <a:r>
+              <a:rPr/>
+              <a:t>✏️ </a:t>
+            </a:r>
+            <a:r>
+              <a:rPr b="1"/>
+              <a:t>Your turn:</a:t>
+            </a:r>
+            <a:r>
+              <a:rPr/>
+              <a:t> Based on the loadings, write a one-sentence biological interpretation of PC1 and PC2 (what does a high score on each mean?).</a:t>
+            </a:r>
+          </a:p>
+          <a:p>
+            <a:pPr lvl="0" indent="0">
+              <a:buNone/>
+            </a:pPr>
+            <a:r>
+              <a:rPr>
+                <a:latin typeface="Courier"/>
+              </a:rPr>
+              <a:t>PC1 = ________________________________________________
+PC2 = ________________________________________________</a:t>
+            </a:r>
+          </a:p>
+          <a:p>
+            <a:pPr lvl="0" indent="0" marL="1270000">
+              <a:buNone/>
+            </a:pPr>
+            <a:r>
+              <a:rPr sz="2000" b="1"/>
+              <a:t>Tip</a:t>
+            </a:r>
+          </a:p>
+          <a:p>
+            <a:pPr lvl="0" indent="0" marL="1270000">
+              <a:buNone/>
+            </a:pPr>
+            <a:r>
+              <a:rPr sz="2000" b="1"/>
+              <a:t>🚀 If you finish early:</a:t>
+            </a:r>
+            <a:r>
+              <a:rPr sz="2000"/>
+              <a:t> Repeat this loadings analysis for PC3 (</a:t>
+            </a:r>
+            <a:r>
+              <a:rPr sz="2000">
+                <a:latin typeface="Courier"/>
+              </a:rPr>
+              <a:t>pca_result$rotation[, 3]</a:t>
+            </a:r>
+            <a:r>
+              <a:rPr sz="2000"/>
+              <a:t>). What does PC3 seem to represent?</a:t>
+            </a:r>
+          </a:p>
+          <a:p>
+            <a:pPr lvl="0" indent="0">
+              <a:buNone/>
+            </a:pPr>
+            <a:r>
+              <a:rPr>
+                <a:solidFill>
+                  <a:srgbClr val="5E5E5E"/>
+                </a:solidFill>
+                <a:latin typeface="Courier"/>
+              </a:rPr>
+              <a:t># Write your code here:</a:t>
             </a:r>
           </a:p>
         </p:txBody>
       </p:sp>
-      <p:pic>
-        <p:nvPicPr>
-          <p:cNvPr descr="multivariate_statistics_activity_files/figure-pptx/unnamed-chunk-13-1.png" id="0" name="Picture 1"/>
-          <p:cNvPicPr>
-            <a:picLocks noGrp="1" noChangeAspect="1"/>
-          </p:cNvPicPr>
-          <p:nvPr/>
-        </p:nvPicPr>
-        <p:blipFill>
-          <a:blip r:embed="rId2"/>
-          <a:stretch>
-            <a:fillRect/>
-          </a:stretch>
-        </p:blipFill>
-        <p:spPr bwMode="auto">
-          <a:xfrm>
-            <a:off x="3657600" y="1244600"/>
-            <a:ext cx="5232400" cy="3225800"/>
-          </a:xfrm>
-          <a:prstGeom prst="rect">
-            <a:avLst/>
-          </a:prstGeom>
-          <a:noFill/>
-          <a:ln w="9525">
-            <a:noFill/>
-            <a:headEnd/>
-            <a:tailEnd/>
-          </a:ln>
-        </p:spPr>
-      </p:pic>
     </p:spTree>
   </p:cSld>
 </p:sld>
@@ -4044,12 +9838,42 @@
       </p:grpSpPr>
       <p:sp>
         <p:nvSpPr>
-          <p:cNvPr id="4" name="Text Placeholder 3"/>
+          <p:cNvPr id="2" name="Title 1"/>
           <p:cNvSpPr>
             <a:spLocks noGrp="1"/>
           </p:cNvSpPr>
           <p:nvPr>
-            <p:ph idx="2" sz="half" type="body"/>
+            <p:ph type="title"/>
+          </p:nvPr>
+        </p:nvSpPr>
+        <p:spPr>
+          <a:xfrm>
+            <a:off x="0" y="0"/>
+            <a:ext cx="9144000" cy="582780"/>
+          </a:xfrm>
+        </p:spPr>
+        <p:txBody>
+          <a:bodyPr/>
+          <a:lstStyle/>
+          <a:p>
+            <a:pPr lvl="0" indent="0" marL="0">
+              <a:buNone/>
+            </a:pPr>
+            <a:r>
+              <a:rPr/>
+              <a:t>Part 6 · Scores and Ordination</a:t>
+            </a:r>
+          </a:p>
+        </p:txBody>
+      </p:sp>
+      <p:sp>
+        <p:nvSpPr>
+          <p:cNvPr id="3" name="Content Placeholder 2"/>
+          <p:cNvSpPr>
+            <a:spLocks noGrp="1"/>
+          </p:cNvSpPr>
+          <p:nvPr>
+            <p:ph idx="1"/>
           </p:nvPr>
         </p:nvSpPr>
         <p:spPr/>
@@ -4057,60 +9881,1803 @@
           <a:bodyPr/>
           <a:lstStyle/>
           <a:p>
+            <a:pPr lvl="0" indent="0" marL="0">
+              <a:buNone/>
+            </a:pPr>
+            <a:r>
+              <a:rPr b="1"/>
+              <a:t>▶ Run this</a:t>
+            </a:r>
+            <a:r>
+              <a:rPr/>
+              <a:t> — view PC scores for individual plants:</a:t>
+            </a:r>
+          </a:p>
+          <a:p>
             <a:pPr lvl="0" indent="0">
               <a:buNone/>
             </a:pPr>
             <a:r>
               <a:rPr>
-                <a:latin typeface="Courier"/>
-              </a:rPr>
-              <a:t># A tibble: 10 × 5
-   plant_id site     PC1     PC2    PC3
-      &lt;int&gt; &lt;chr&gt;  &lt;dbl&gt;   &lt;dbl&gt;  &lt;dbl&gt;
- 1        1 TJH   -1.92   0.0772  1.53 
- 2        2 TJH    3.35   1.53    0.755
- 3        3 TJH    0.918 -0.0320  0.248
- 4        4 TJH   -0.983  0.236  -0.242
- 5        5 TJH    1.15  -1.02    1.54 
- 6        6 TJH   -1.37  -0.613   0.847
- 7        7 TJH   -1.50  -1.63    0.693
- 8        8 TJH   -0.651  0.121  -0.412
- 9        9 TJH    2.48  -0.0786 -0.260
-10       10 TJH   -1.11  -1.27    2.27 </a:t>
+                <a:solidFill>
+                  <a:srgbClr val="003B4F"/>
+                </a:solidFill>
+                <a:latin typeface="Courier"/>
+              </a:rPr>
+              <a:t>pc_scores &lt;- </a:t>
+            </a:r>
+            <a:r>
+              <a:rPr>
+                <a:solidFill>
+                  <a:srgbClr val="4758AB"/>
+                </a:solidFill>
+                <a:latin typeface="Courier"/>
+              </a:rPr>
+              <a:t>as_tibble</a:t>
+            </a:r>
+            <a:r>
+              <a:rPr>
+                <a:solidFill>
+                  <a:srgbClr val="003B4F"/>
+                </a:solidFill>
+                <a:latin typeface="Courier"/>
+              </a:rPr>
+              <a:t>(pca_result</a:t>
+            </a:r>
+            <a:r>
+              <a:rPr>
+                <a:solidFill>
+                  <a:srgbClr val="5E5E5E"/>
+                </a:solidFill>
+                <a:latin typeface="Courier"/>
+              </a:rPr>
+              <a:t>$</a:t>
+            </a:r>
+            <a:r>
+              <a:rPr>
+                <a:solidFill>
+                  <a:srgbClr val="003B4F"/>
+                </a:solidFill>
+                <a:latin typeface="Courier"/>
+              </a:rPr>
+              <a:t>x) </a:t>
+            </a:r>
+            <a:r>
+              <a:rPr>
+                <a:solidFill>
+                  <a:srgbClr val="5E5E5E"/>
+                </a:solidFill>
+                <a:latin typeface="Courier"/>
+              </a:rPr>
+              <a:t>%&gt;%</a:t>
+            </a:r>
+            <a:br/>
+            <a:r>
+              <a:rPr>
+                <a:solidFill>
+                  <a:srgbClr val="003B4F"/>
+                </a:solidFill>
+                <a:latin typeface="Courier"/>
+              </a:rPr>
+              <a:t>  </a:t>
+            </a:r>
+            <a:r>
+              <a:rPr>
+                <a:solidFill>
+                  <a:srgbClr val="4758AB"/>
+                </a:solidFill>
+                <a:latin typeface="Courier"/>
+              </a:rPr>
+              <a:t>mutate</a:t>
+            </a:r>
+            <a:r>
+              <a:rPr>
+                <a:solidFill>
+                  <a:srgbClr val="003B4F"/>
+                </a:solidFill>
+                <a:latin typeface="Courier"/>
+              </a:rPr>
+              <a:t>(</a:t>
+            </a:r>
+            <a:r>
+              <a:rPr>
+                <a:solidFill>
+                  <a:srgbClr val="657422"/>
+                </a:solidFill>
+                <a:latin typeface="Courier"/>
+              </a:rPr>
+              <a:t>site =</a:t>
+            </a:r>
+            <a:r>
+              <a:rPr>
+                <a:solidFill>
+                  <a:srgbClr val="003B4F"/>
+                </a:solidFill>
+                <a:latin typeface="Courier"/>
+              </a:rPr>
+              <a:t> darlingtonia</a:t>
+            </a:r>
+            <a:r>
+              <a:rPr>
+                <a:solidFill>
+                  <a:srgbClr val="5E5E5E"/>
+                </a:solidFill>
+                <a:latin typeface="Courier"/>
+              </a:rPr>
+              <a:t>$</a:t>
+            </a:r>
+            <a:r>
+              <a:rPr>
+                <a:solidFill>
+                  <a:srgbClr val="003B4F"/>
+                </a:solidFill>
+                <a:latin typeface="Courier"/>
+              </a:rPr>
+              <a:t>site,</a:t>
+            </a:r>
+            <a:br/>
+            <a:r>
+              <a:rPr>
+                <a:solidFill>
+                  <a:srgbClr val="003B4F"/>
+                </a:solidFill>
+                <a:latin typeface="Courier"/>
+              </a:rPr>
+              <a:t>         </a:t>
+            </a:r>
+            <a:r>
+              <a:rPr>
+                <a:solidFill>
+                  <a:srgbClr val="657422"/>
+                </a:solidFill>
+                <a:latin typeface="Courier"/>
+              </a:rPr>
+              <a:t>plant_id =</a:t>
+            </a:r>
+            <a:r>
+              <a:rPr>
+                <a:solidFill>
+                  <a:srgbClr val="003B4F"/>
+                </a:solidFill>
+                <a:latin typeface="Courier"/>
+              </a:rPr>
+              <a:t> </a:t>
+            </a:r>
+            <a:r>
+              <a:rPr>
+                <a:solidFill>
+                  <a:srgbClr val="AD0000"/>
+                </a:solidFill>
+                <a:latin typeface="Courier"/>
+              </a:rPr>
+              <a:t>1</a:t>
+            </a:r>
+            <a:r>
+              <a:rPr>
+                <a:solidFill>
+                  <a:srgbClr val="5E5E5E"/>
+                </a:solidFill>
+                <a:latin typeface="Courier"/>
+              </a:rPr>
+              <a:t>:</a:t>
+            </a:r>
+            <a:r>
+              <a:rPr>
+                <a:solidFill>
+                  <a:srgbClr val="4758AB"/>
+                </a:solidFill>
+                <a:latin typeface="Courier"/>
+              </a:rPr>
+              <a:t>n</a:t>
+            </a:r>
+            <a:r>
+              <a:rPr>
+                <a:solidFill>
+                  <a:srgbClr val="003B4F"/>
+                </a:solidFill>
+                <a:latin typeface="Courier"/>
+              </a:rPr>
+              <a:t>())</a:t>
+            </a:r>
+            <a:br/>
+            <a:br/>
+            <a:r>
+              <a:rPr>
+                <a:solidFill>
+                  <a:srgbClr val="003B4F"/>
+                </a:solidFill>
+                <a:latin typeface="Courier"/>
+              </a:rPr>
+              <a:t>pc_scores </a:t>
+            </a:r>
+            <a:r>
+              <a:rPr>
+                <a:solidFill>
+                  <a:srgbClr val="5E5E5E"/>
+                </a:solidFill>
+                <a:latin typeface="Courier"/>
+              </a:rPr>
+              <a:t>%&gt;%</a:t>
+            </a:r>
+            <a:br/>
+            <a:r>
+              <a:rPr>
+                <a:solidFill>
+                  <a:srgbClr val="003B4F"/>
+                </a:solidFill>
+                <a:latin typeface="Courier"/>
+              </a:rPr>
+              <a:t>  </a:t>
+            </a:r>
+            <a:r>
+              <a:rPr>
+                <a:solidFill>
+                  <a:srgbClr val="4758AB"/>
+                </a:solidFill>
+                <a:latin typeface="Courier"/>
+              </a:rPr>
+              <a:t>select</a:t>
+            </a:r>
+            <a:r>
+              <a:rPr>
+                <a:solidFill>
+                  <a:srgbClr val="003B4F"/>
+                </a:solidFill>
+                <a:latin typeface="Courier"/>
+              </a:rPr>
+              <a:t>(plant_id, site, PC1, PC2, PC3) </a:t>
+            </a:r>
+            <a:r>
+              <a:rPr>
+                <a:solidFill>
+                  <a:srgbClr val="5E5E5E"/>
+                </a:solidFill>
+                <a:latin typeface="Courier"/>
+              </a:rPr>
+              <a:t>%&gt;%</a:t>
+            </a:r>
+            <a:br/>
+            <a:r>
+              <a:rPr>
+                <a:solidFill>
+                  <a:srgbClr val="003B4F"/>
+                </a:solidFill>
+                <a:latin typeface="Courier"/>
+              </a:rPr>
+              <a:t>  </a:t>
+            </a:r>
+            <a:r>
+              <a:rPr>
+                <a:solidFill>
+                  <a:srgbClr val="4758AB"/>
+                </a:solidFill>
+                <a:latin typeface="Courier"/>
+              </a:rPr>
+              <a:t>head</a:t>
+            </a:r>
+            <a:r>
+              <a:rPr>
+                <a:solidFill>
+                  <a:srgbClr val="003B4F"/>
+                </a:solidFill>
+                <a:latin typeface="Courier"/>
+              </a:rPr>
+              <a:t>(</a:t>
+            </a:r>
+            <a:r>
+              <a:rPr>
+                <a:solidFill>
+                  <a:srgbClr val="AD0000"/>
+                </a:solidFill>
+                <a:latin typeface="Courier"/>
+              </a:rPr>
+              <a:t>10</a:t>
+            </a:r>
+            <a:r>
+              <a:rPr>
+                <a:solidFill>
+                  <a:srgbClr val="003B4F"/>
+                </a:solidFill>
+                <a:latin typeface="Courier"/>
+              </a:rPr>
+              <a:t>)</a:t>
+            </a:r>
+          </a:p>
+          <a:p>
+            <a:pPr lvl="0" indent="0" marL="0">
+              <a:buNone/>
+            </a:pPr>
+            <a:r>
+              <a:rPr b="1"/>
+              <a:t>▶ Run this</a:t>
+            </a:r>
+            <a:r>
+              <a:rPr/>
+              <a:t> — a basic scores plot:</a:t>
+            </a:r>
+          </a:p>
+          <a:p>
+            <a:pPr lvl="0" indent="0">
+              <a:buNone/>
+            </a:pPr>
+            <a:r>
+              <a:rPr>
+                <a:solidFill>
+                  <a:srgbClr val="4758AB"/>
+                </a:solidFill>
+                <a:latin typeface="Courier"/>
+              </a:rPr>
+              <a:t>ggplot</a:t>
+            </a:r>
+            <a:r>
+              <a:rPr>
+                <a:solidFill>
+                  <a:srgbClr val="003B4F"/>
+                </a:solidFill>
+                <a:latin typeface="Courier"/>
+              </a:rPr>
+              <a:t>(pc_scores, </a:t>
+            </a:r>
+            <a:r>
+              <a:rPr>
+                <a:solidFill>
+                  <a:srgbClr val="4758AB"/>
+                </a:solidFill>
+                <a:latin typeface="Courier"/>
+              </a:rPr>
+              <a:t>aes</a:t>
+            </a:r>
+            <a:r>
+              <a:rPr>
+                <a:solidFill>
+                  <a:srgbClr val="003B4F"/>
+                </a:solidFill>
+                <a:latin typeface="Courier"/>
+              </a:rPr>
+              <a:t>(</a:t>
+            </a:r>
+            <a:r>
+              <a:rPr>
+                <a:solidFill>
+                  <a:srgbClr val="657422"/>
+                </a:solidFill>
+                <a:latin typeface="Courier"/>
+              </a:rPr>
+              <a:t>x =</a:t>
+            </a:r>
+            <a:r>
+              <a:rPr>
+                <a:solidFill>
+                  <a:srgbClr val="003B4F"/>
+                </a:solidFill>
+                <a:latin typeface="Courier"/>
+              </a:rPr>
+              <a:t> PC1, </a:t>
+            </a:r>
+            <a:r>
+              <a:rPr>
+                <a:solidFill>
+                  <a:srgbClr val="657422"/>
+                </a:solidFill>
+                <a:latin typeface="Courier"/>
+              </a:rPr>
+              <a:t>y =</a:t>
+            </a:r>
+            <a:r>
+              <a:rPr>
+                <a:solidFill>
+                  <a:srgbClr val="003B4F"/>
+                </a:solidFill>
+                <a:latin typeface="Courier"/>
+              </a:rPr>
+              <a:t> PC2, </a:t>
+            </a:r>
+            <a:r>
+              <a:rPr>
+                <a:solidFill>
+                  <a:srgbClr val="657422"/>
+                </a:solidFill>
+                <a:latin typeface="Courier"/>
+              </a:rPr>
+              <a:t>color =</a:t>
+            </a:r>
+            <a:r>
+              <a:rPr>
+                <a:solidFill>
+                  <a:srgbClr val="003B4F"/>
+                </a:solidFill>
+                <a:latin typeface="Courier"/>
+              </a:rPr>
+              <a:t> site)) </a:t>
+            </a:r>
+            <a:r>
+              <a:rPr>
+                <a:solidFill>
+                  <a:srgbClr val="5E5E5E"/>
+                </a:solidFill>
+                <a:latin typeface="Courier"/>
+              </a:rPr>
+              <a:t>+</a:t>
+            </a:r>
+            <a:br/>
+            <a:r>
+              <a:rPr>
+                <a:solidFill>
+                  <a:srgbClr val="003B4F"/>
+                </a:solidFill>
+                <a:latin typeface="Courier"/>
+              </a:rPr>
+              <a:t>  </a:t>
+            </a:r>
+            <a:r>
+              <a:rPr>
+                <a:solidFill>
+                  <a:srgbClr val="4758AB"/>
+                </a:solidFill>
+                <a:latin typeface="Courier"/>
+              </a:rPr>
+              <a:t>geom_point</a:t>
+            </a:r>
+            <a:r>
+              <a:rPr>
+                <a:solidFill>
+                  <a:srgbClr val="003B4F"/>
+                </a:solidFill>
+                <a:latin typeface="Courier"/>
+              </a:rPr>
+              <a:t>(</a:t>
+            </a:r>
+            <a:r>
+              <a:rPr>
+                <a:solidFill>
+                  <a:srgbClr val="657422"/>
+                </a:solidFill>
+                <a:latin typeface="Courier"/>
+              </a:rPr>
+              <a:t>size =</a:t>
+            </a:r>
+            <a:r>
+              <a:rPr>
+                <a:solidFill>
+                  <a:srgbClr val="003B4F"/>
+                </a:solidFill>
+                <a:latin typeface="Courier"/>
+              </a:rPr>
+              <a:t> </a:t>
+            </a:r>
+            <a:r>
+              <a:rPr>
+                <a:solidFill>
+                  <a:srgbClr val="AD0000"/>
+                </a:solidFill>
+                <a:latin typeface="Courier"/>
+              </a:rPr>
+              <a:t>3</a:t>
+            </a:r>
+            <a:r>
+              <a:rPr>
+                <a:solidFill>
+                  <a:srgbClr val="003B4F"/>
+                </a:solidFill>
+                <a:latin typeface="Courier"/>
+              </a:rPr>
+              <a:t>, </a:t>
+            </a:r>
+            <a:r>
+              <a:rPr>
+                <a:solidFill>
+                  <a:srgbClr val="657422"/>
+                </a:solidFill>
+                <a:latin typeface="Courier"/>
+              </a:rPr>
+              <a:t>alpha =</a:t>
+            </a:r>
+            <a:r>
+              <a:rPr>
+                <a:solidFill>
+                  <a:srgbClr val="003B4F"/>
+                </a:solidFill>
+                <a:latin typeface="Courier"/>
+              </a:rPr>
+              <a:t> </a:t>
+            </a:r>
+            <a:r>
+              <a:rPr>
+                <a:solidFill>
+                  <a:srgbClr val="AD0000"/>
+                </a:solidFill>
+                <a:latin typeface="Courier"/>
+              </a:rPr>
+              <a:t>0.7</a:t>
+            </a:r>
+            <a:r>
+              <a:rPr>
+                <a:solidFill>
+                  <a:srgbClr val="003B4F"/>
+                </a:solidFill>
+                <a:latin typeface="Courier"/>
+              </a:rPr>
+              <a:t>) </a:t>
+            </a:r>
+            <a:r>
+              <a:rPr>
+                <a:solidFill>
+                  <a:srgbClr val="5E5E5E"/>
+                </a:solidFill>
+                <a:latin typeface="Courier"/>
+              </a:rPr>
+              <a:t>+</a:t>
+            </a:r>
+            <a:br/>
+            <a:r>
+              <a:rPr>
+                <a:solidFill>
+                  <a:srgbClr val="003B4F"/>
+                </a:solidFill>
+                <a:latin typeface="Courier"/>
+              </a:rPr>
+              <a:t>  </a:t>
+            </a:r>
+            <a:r>
+              <a:rPr>
+                <a:solidFill>
+                  <a:srgbClr val="4758AB"/>
+                </a:solidFill>
+                <a:latin typeface="Courier"/>
+              </a:rPr>
+              <a:t>stat_ellipse</a:t>
+            </a:r>
+            <a:r>
+              <a:rPr>
+                <a:solidFill>
+                  <a:srgbClr val="003B4F"/>
+                </a:solidFill>
+                <a:latin typeface="Courier"/>
+              </a:rPr>
+              <a:t>(</a:t>
+            </a:r>
+            <a:r>
+              <a:rPr>
+                <a:solidFill>
+                  <a:srgbClr val="657422"/>
+                </a:solidFill>
+                <a:latin typeface="Courier"/>
+              </a:rPr>
+              <a:t>level =</a:t>
+            </a:r>
+            <a:r>
+              <a:rPr>
+                <a:solidFill>
+                  <a:srgbClr val="003B4F"/>
+                </a:solidFill>
+                <a:latin typeface="Courier"/>
+              </a:rPr>
+              <a:t> </a:t>
+            </a:r>
+            <a:r>
+              <a:rPr>
+                <a:solidFill>
+                  <a:srgbClr val="AD0000"/>
+                </a:solidFill>
+                <a:latin typeface="Courier"/>
+              </a:rPr>
+              <a:t>0.68</a:t>
+            </a:r>
+            <a:r>
+              <a:rPr>
+                <a:solidFill>
+                  <a:srgbClr val="003B4F"/>
+                </a:solidFill>
+                <a:latin typeface="Courier"/>
+              </a:rPr>
+              <a:t>, </a:t>
+            </a:r>
+            <a:r>
+              <a:rPr>
+                <a:solidFill>
+                  <a:srgbClr val="657422"/>
+                </a:solidFill>
+                <a:latin typeface="Courier"/>
+              </a:rPr>
+              <a:t>linetype =</a:t>
+            </a:r>
+            <a:r>
+              <a:rPr>
+                <a:solidFill>
+                  <a:srgbClr val="003B4F"/>
+                </a:solidFill>
+                <a:latin typeface="Courier"/>
+              </a:rPr>
+              <a:t> </a:t>
+            </a:r>
+            <a:r>
+              <a:rPr>
+                <a:solidFill>
+                  <a:srgbClr val="AD0000"/>
+                </a:solidFill>
+                <a:latin typeface="Courier"/>
+              </a:rPr>
+              <a:t>2</a:t>
+            </a:r>
+            <a:r>
+              <a:rPr>
+                <a:solidFill>
+                  <a:srgbClr val="003B4F"/>
+                </a:solidFill>
+                <a:latin typeface="Courier"/>
+              </a:rPr>
+              <a:t>) </a:t>
+            </a:r>
+            <a:r>
+              <a:rPr>
+                <a:solidFill>
+                  <a:srgbClr val="5E5E5E"/>
+                </a:solidFill>
+                <a:latin typeface="Courier"/>
+              </a:rPr>
+              <a:t>+</a:t>
+            </a:r>
+            <a:br/>
+            <a:r>
+              <a:rPr>
+                <a:solidFill>
+                  <a:srgbClr val="003B4F"/>
+                </a:solidFill>
+                <a:latin typeface="Courier"/>
+              </a:rPr>
+              <a:t>  </a:t>
+            </a:r>
+            <a:r>
+              <a:rPr>
+                <a:solidFill>
+                  <a:srgbClr val="4758AB"/>
+                </a:solidFill>
+                <a:latin typeface="Courier"/>
+              </a:rPr>
+              <a:t>labs</a:t>
+            </a:r>
+            <a:r>
+              <a:rPr>
+                <a:solidFill>
+                  <a:srgbClr val="003B4F"/>
+                </a:solidFill>
+                <a:latin typeface="Courier"/>
+              </a:rPr>
+              <a:t>(</a:t>
+            </a:r>
+            <a:r>
+              <a:rPr>
+                <a:solidFill>
+                  <a:srgbClr val="657422"/>
+                </a:solidFill>
+                <a:latin typeface="Courier"/>
+              </a:rPr>
+              <a:t>title =</a:t>
+            </a:r>
+            <a:r>
+              <a:rPr>
+                <a:solidFill>
+                  <a:srgbClr val="003B4F"/>
+                </a:solidFill>
+                <a:latin typeface="Courier"/>
+              </a:rPr>
+              <a:t> </a:t>
+            </a:r>
+            <a:r>
+              <a:rPr>
+                <a:solidFill>
+                  <a:srgbClr val="20794D"/>
+                </a:solidFill>
+                <a:latin typeface="Courier"/>
+              </a:rPr>
+              <a:t>"PCA Scores Plot"</a:t>
+            </a:r>
+            <a:r>
+              <a:rPr>
+                <a:solidFill>
+                  <a:srgbClr val="003B4F"/>
+                </a:solidFill>
+                <a:latin typeface="Courier"/>
+              </a:rPr>
+              <a:t>,</a:t>
+            </a:r>
+            <a:br/>
+            <a:r>
+              <a:rPr>
+                <a:solidFill>
+                  <a:srgbClr val="003B4F"/>
+                </a:solidFill>
+                <a:latin typeface="Courier"/>
+              </a:rPr>
+              <a:t>       </a:t>
+            </a:r>
+            <a:r>
+              <a:rPr>
+                <a:solidFill>
+                  <a:srgbClr val="657422"/>
+                </a:solidFill>
+                <a:latin typeface="Courier"/>
+              </a:rPr>
+              <a:t>x =</a:t>
+            </a:r>
+            <a:r>
+              <a:rPr>
+                <a:solidFill>
+                  <a:srgbClr val="003B4F"/>
+                </a:solidFill>
+                <a:latin typeface="Courier"/>
+              </a:rPr>
+              <a:t> </a:t>
+            </a:r>
+            <a:r>
+              <a:rPr>
+                <a:solidFill>
+                  <a:srgbClr val="4758AB"/>
+                </a:solidFill>
+                <a:latin typeface="Courier"/>
+              </a:rPr>
+              <a:t>paste0</a:t>
+            </a:r>
+            <a:r>
+              <a:rPr>
+                <a:solidFill>
+                  <a:srgbClr val="003B4F"/>
+                </a:solidFill>
+                <a:latin typeface="Courier"/>
+              </a:rPr>
+              <a:t>(</a:t>
+            </a:r>
+            <a:r>
+              <a:rPr>
+                <a:solidFill>
+                  <a:srgbClr val="20794D"/>
+                </a:solidFill>
+                <a:latin typeface="Courier"/>
+              </a:rPr>
+              <a:t>"PC1: Overall Size"</a:t>
+            </a:r>
+            <a:r>
+              <a:rPr>
+                <a:solidFill>
+                  <a:srgbClr val="003B4F"/>
+                </a:solidFill>
+                <a:latin typeface="Courier"/>
+              </a:rPr>
+              <a:t>),</a:t>
+            </a:r>
+            <a:br/>
+            <a:r>
+              <a:rPr>
+                <a:solidFill>
+                  <a:srgbClr val="003B4F"/>
+                </a:solidFill>
+                <a:latin typeface="Courier"/>
+              </a:rPr>
+              <a:t>       </a:t>
+            </a:r>
+            <a:r>
+              <a:rPr>
+                <a:solidFill>
+                  <a:srgbClr val="657422"/>
+                </a:solidFill>
+                <a:latin typeface="Courier"/>
+              </a:rPr>
+              <a:t>y =</a:t>
+            </a:r>
+            <a:r>
+              <a:rPr>
+                <a:solidFill>
+                  <a:srgbClr val="003B4F"/>
+                </a:solidFill>
+                <a:latin typeface="Courier"/>
+              </a:rPr>
+              <a:t> </a:t>
+            </a:r>
+            <a:r>
+              <a:rPr>
+                <a:solidFill>
+                  <a:srgbClr val="4758AB"/>
+                </a:solidFill>
+                <a:latin typeface="Courier"/>
+              </a:rPr>
+              <a:t>paste0</a:t>
+            </a:r>
+            <a:r>
+              <a:rPr>
+                <a:solidFill>
+                  <a:srgbClr val="003B4F"/>
+                </a:solidFill>
+                <a:latin typeface="Courier"/>
+              </a:rPr>
+              <a:t>(</a:t>
+            </a:r>
+            <a:r>
+              <a:rPr>
+                <a:solidFill>
+                  <a:srgbClr val="20794D"/>
+                </a:solidFill>
+                <a:latin typeface="Courier"/>
+              </a:rPr>
+              <a:t>"PC2: Shapeb%)"</a:t>
+            </a:r>
+            <a:r>
+              <a:rPr>
+                <a:solidFill>
+                  <a:srgbClr val="003B4F"/>
+                </a:solidFill>
+                <a:latin typeface="Courier"/>
+              </a:rPr>
+              <a:t>),</a:t>
+            </a:r>
+            <a:br/>
+            <a:r>
+              <a:rPr>
+                <a:solidFill>
+                  <a:srgbClr val="003B4F"/>
+                </a:solidFill>
+                <a:latin typeface="Courier"/>
+              </a:rPr>
+              <a:t>       </a:t>
+            </a:r>
+            <a:r>
+              <a:rPr>
+                <a:solidFill>
+                  <a:srgbClr val="657422"/>
+                </a:solidFill>
+                <a:latin typeface="Courier"/>
+              </a:rPr>
+              <a:t>color =</a:t>
+            </a:r>
+            <a:r>
+              <a:rPr>
+                <a:solidFill>
+                  <a:srgbClr val="003B4F"/>
+                </a:solidFill>
+                <a:latin typeface="Courier"/>
+              </a:rPr>
+              <a:t> </a:t>
+            </a:r>
+            <a:r>
+              <a:rPr>
+                <a:solidFill>
+                  <a:srgbClr val="20794D"/>
+                </a:solidFill>
+                <a:latin typeface="Courier"/>
+              </a:rPr>
+              <a:t>"Site"</a:t>
+            </a:r>
+            <a:r>
+              <a:rPr>
+                <a:solidFill>
+                  <a:srgbClr val="003B4F"/>
+                </a:solidFill>
+                <a:latin typeface="Courier"/>
+              </a:rPr>
+              <a:t>) </a:t>
+            </a:r>
+            <a:r>
+              <a:rPr>
+                <a:solidFill>
+                  <a:srgbClr val="5E5E5E"/>
+                </a:solidFill>
+                <a:latin typeface="Courier"/>
+              </a:rPr>
+              <a:t>+</a:t>
+            </a:r>
+            <a:br/>
+            <a:r>
+              <a:rPr>
+                <a:solidFill>
+                  <a:srgbClr val="003B4F"/>
+                </a:solidFill>
+                <a:latin typeface="Courier"/>
+              </a:rPr>
+              <a:t>  </a:t>
+            </a:r>
+            <a:r>
+              <a:rPr>
+                <a:solidFill>
+                  <a:srgbClr val="4758AB"/>
+                </a:solidFill>
+                <a:latin typeface="Courier"/>
+              </a:rPr>
+              <a:t>theme_minimal</a:t>
+            </a:r>
+            <a:r>
+              <a:rPr>
+                <a:solidFill>
+                  <a:srgbClr val="003B4F"/>
+                </a:solidFill>
+                <a:latin typeface="Courier"/>
+              </a:rPr>
+              <a:t>(</a:t>
+            </a:r>
+            <a:r>
+              <a:rPr>
+                <a:solidFill>
+                  <a:srgbClr val="657422"/>
+                </a:solidFill>
+                <a:latin typeface="Courier"/>
+              </a:rPr>
+              <a:t>base_size =</a:t>
+            </a:r>
+            <a:r>
+              <a:rPr>
+                <a:solidFill>
+                  <a:srgbClr val="003B4F"/>
+                </a:solidFill>
+                <a:latin typeface="Courier"/>
+              </a:rPr>
+              <a:t> </a:t>
+            </a:r>
+            <a:r>
+              <a:rPr>
+                <a:solidFill>
+                  <a:srgbClr val="AD0000"/>
+                </a:solidFill>
+                <a:latin typeface="Courier"/>
+              </a:rPr>
+              <a:t>9</a:t>
+            </a:r>
+            <a:r>
+              <a:rPr>
+                <a:solidFill>
+                  <a:srgbClr val="003B4F"/>
+                </a:solidFill>
+                <a:latin typeface="Courier"/>
+              </a:rPr>
+              <a:t>) </a:t>
+            </a:r>
+            <a:r>
+              <a:rPr>
+                <a:solidFill>
+                  <a:srgbClr val="5E5E5E"/>
+                </a:solidFill>
+                <a:latin typeface="Courier"/>
+              </a:rPr>
+              <a:t>+</a:t>
+            </a:r>
+            <a:br/>
+            <a:r>
+              <a:rPr>
+                <a:solidFill>
+                  <a:srgbClr val="003B4F"/>
+                </a:solidFill>
+                <a:latin typeface="Courier"/>
+              </a:rPr>
+              <a:t>  </a:t>
+            </a:r>
+            <a:r>
+              <a:rPr>
+                <a:solidFill>
+                  <a:srgbClr val="4758AB"/>
+                </a:solidFill>
+                <a:latin typeface="Courier"/>
+              </a:rPr>
+              <a:t>theme</a:t>
+            </a:r>
+            <a:r>
+              <a:rPr>
+                <a:solidFill>
+                  <a:srgbClr val="003B4F"/>
+                </a:solidFill>
+                <a:latin typeface="Courier"/>
+              </a:rPr>
+              <a:t>(</a:t>
+            </a:r>
+            <a:r>
+              <a:rPr>
+                <a:solidFill>
+                  <a:srgbClr val="657422"/>
+                </a:solidFill>
+                <a:latin typeface="Courier"/>
+              </a:rPr>
+              <a:t>legend.position =</a:t>
+            </a:r>
+            <a:r>
+              <a:rPr>
+                <a:solidFill>
+                  <a:srgbClr val="003B4F"/>
+                </a:solidFill>
+                <a:latin typeface="Courier"/>
+              </a:rPr>
+              <a:t> </a:t>
+            </a:r>
+            <a:r>
+              <a:rPr>
+                <a:solidFill>
+                  <a:srgbClr val="20794D"/>
+                </a:solidFill>
+                <a:latin typeface="Courier"/>
+              </a:rPr>
+              <a:t>"right"</a:t>
+            </a:r>
+            <a:r>
+              <a:rPr>
+                <a:solidFill>
+                  <a:srgbClr val="003B4F"/>
+                </a:solidFill>
+                <a:latin typeface="Courier"/>
+              </a:rPr>
+              <a:t>)</a:t>
+            </a:r>
+          </a:p>
+          <a:p>
+            <a:pPr lvl="0" indent="0" marL="0">
+              <a:buNone/>
+            </a:pPr>
+            <a:r>
+              <a:rPr b="1"/>
+              <a:t>▶ Run this</a:t>
+            </a:r>
+            <a:r>
+              <a:rPr/>
+              <a:t> — an interactive 3D version using </a:t>
+            </a:r>
+            <a:r>
+              <a:rPr>
+                <a:latin typeface="Courier"/>
+              </a:rPr>
+              <a:t>plotly</a:t>
+            </a:r>
+            <a:r>
+              <a:rPr/>
+              <a:t>:</a:t>
+            </a:r>
+          </a:p>
+          <a:p>
+            <a:pPr lvl="0" indent="0">
+              <a:buNone/>
+            </a:pPr>
+            <a:r>
+              <a:rPr>
+                <a:solidFill>
+                  <a:srgbClr val="003B4F"/>
+                </a:solidFill>
+                <a:latin typeface="Courier"/>
+              </a:rPr>
+              <a:t>pc_data &lt;- </a:t>
+            </a:r>
+            <a:r>
+              <a:rPr>
+                <a:solidFill>
+                  <a:srgbClr val="4758AB"/>
+                </a:solidFill>
+                <a:latin typeface="Courier"/>
+              </a:rPr>
+              <a:t>as.data.frame</a:t>
+            </a:r>
+            <a:r>
+              <a:rPr>
+                <a:solidFill>
+                  <a:srgbClr val="003B4F"/>
+                </a:solidFill>
+                <a:latin typeface="Courier"/>
+              </a:rPr>
+              <a:t>(pca_result</a:t>
+            </a:r>
+            <a:r>
+              <a:rPr>
+                <a:solidFill>
+                  <a:srgbClr val="5E5E5E"/>
+                </a:solidFill>
+                <a:latin typeface="Courier"/>
+              </a:rPr>
+              <a:t>$</a:t>
+            </a:r>
+            <a:r>
+              <a:rPr>
+                <a:solidFill>
+                  <a:srgbClr val="003B4F"/>
+                </a:solidFill>
+                <a:latin typeface="Courier"/>
+              </a:rPr>
+              <a:t>x) </a:t>
+            </a:r>
+            <a:r>
+              <a:rPr>
+                <a:solidFill>
+                  <a:srgbClr val="5E5E5E"/>
+                </a:solidFill>
+                <a:latin typeface="Courier"/>
+              </a:rPr>
+              <a:t>%&gt;%</a:t>
+            </a:r>
+            <a:br/>
+            <a:r>
+              <a:rPr>
+                <a:solidFill>
+                  <a:srgbClr val="003B4F"/>
+                </a:solidFill>
+                <a:latin typeface="Courier"/>
+              </a:rPr>
+              <a:t>  </a:t>
+            </a:r>
+            <a:r>
+              <a:rPr>
+                <a:solidFill>
+                  <a:srgbClr val="4758AB"/>
+                </a:solidFill>
+                <a:latin typeface="Courier"/>
+              </a:rPr>
+              <a:t>mutate</a:t>
+            </a:r>
+            <a:r>
+              <a:rPr>
+                <a:solidFill>
+                  <a:srgbClr val="003B4F"/>
+                </a:solidFill>
+                <a:latin typeface="Courier"/>
+              </a:rPr>
+              <a:t>(</a:t>
+            </a:r>
+            <a:r>
+              <a:rPr>
+                <a:solidFill>
+                  <a:srgbClr val="657422"/>
+                </a:solidFill>
+                <a:latin typeface="Courier"/>
+              </a:rPr>
+              <a:t>site =</a:t>
+            </a:r>
+            <a:r>
+              <a:rPr>
+                <a:solidFill>
+                  <a:srgbClr val="003B4F"/>
+                </a:solidFill>
+                <a:latin typeface="Courier"/>
+              </a:rPr>
+              <a:t> darlingtonia</a:t>
+            </a:r>
+            <a:r>
+              <a:rPr>
+                <a:solidFill>
+                  <a:srgbClr val="5E5E5E"/>
+                </a:solidFill>
+                <a:latin typeface="Courier"/>
+              </a:rPr>
+              <a:t>$</a:t>
+            </a:r>
+            <a:r>
+              <a:rPr>
+                <a:solidFill>
+                  <a:srgbClr val="003B4F"/>
+                </a:solidFill>
+                <a:latin typeface="Courier"/>
+              </a:rPr>
+              <a:t>site)</a:t>
+            </a:r>
+            <a:br/>
+            <a:br/>
+            <a:r>
+              <a:rPr>
+                <a:solidFill>
+                  <a:srgbClr val="4758AB"/>
+                </a:solidFill>
+                <a:latin typeface="Courier"/>
+              </a:rPr>
+              <a:t>plot_ly</a:t>
+            </a:r>
+            <a:r>
+              <a:rPr>
+                <a:solidFill>
+                  <a:srgbClr val="003B4F"/>
+                </a:solidFill>
+                <a:latin typeface="Courier"/>
+              </a:rPr>
+              <a:t>(pc_data,</a:t>
+            </a:r>
+            <a:br/>
+            <a:r>
+              <a:rPr>
+                <a:solidFill>
+                  <a:srgbClr val="003B4F"/>
+                </a:solidFill>
+                <a:latin typeface="Courier"/>
+              </a:rPr>
+              <a:t>        </a:t>
+            </a:r>
+            <a:r>
+              <a:rPr>
+                <a:solidFill>
+                  <a:srgbClr val="657422"/>
+                </a:solidFill>
+                <a:latin typeface="Courier"/>
+              </a:rPr>
+              <a:t>x =</a:t>
+            </a:r>
+            <a:r>
+              <a:rPr>
+                <a:solidFill>
+                  <a:srgbClr val="003B4F"/>
+                </a:solidFill>
+                <a:latin typeface="Courier"/>
+              </a:rPr>
+              <a:t> </a:t>
+            </a:r>
+            <a:r>
+              <a:rPr>
+                <a:solidFill>
+                  <a:srgbClr val="5E5E5E"/>
+                </a:solidFill>
+                <a:latin typeface="Courier"/>
+              </a:rPr>
+              <a:t>~</a:t>
+            </a:r>
+            <a:r>
+              <a:rPr>
+                <a:solidFill>
+                  <a:srgbClr val="003B4F"/>
+                </a:solidFill>
+                <a:latin typeface="Courier"/>
+              </a:rPr>
+              <a:t>PC1, </a:t>
+            </a:r>
+            <a:r>
+              <a:rPr>
+                <a:solidFill>
+                  <a:srgbClr val="657422"/>
+                </a:solidFill>
+                <a:latin typeface="Courier"/>
+              </a:rPr>
+              <a:t>y =</a:t>
+            </a:r>
+            <a:r>
+              <a:rPr>
+                <a:solidFill>
+                  <a:srgbClr val="003B4F"/>
+                </a:solidFill>
+                <a:latin typeface="Courier"/>
+              </a:rPr>
+              <a:t> </a:t>
+            </a:r>
+            <a:r>
+              <a:rPr>
+                <a:solidFill>
+                  <a:srgbClr val="5E5E5E"/>
+                </a:solidFill>
+                <a:latin typeface="Courier"/>
+              </a:rPr>
+              <a:t>~</a:t>
+            </a:r>
+            <a:r>
+              <a:rPr>
+                <a:solidFill>
+                  <a:srgbClr val="003B4F"/>
+                </a:solidFill>
+                <a:latin typeface="Courier"/>
+              </a:rPr>
+              <a:t>PC2, </a:t>
+            </a:r>
+            <a:r>
+              <a:rPr>
+                <a:solidFill>
+                  <a:srgbClr val="657422"/>
+                </a:solidFill>
+                <a:latin typeface="Courier"/>
+              </a:rPr>
+              <a:t>z =</a:t>
+            </a:r>
+            <a:r>
+              <a:rPr>
+                <a:solidFill>
+                  <a:srgbClr val="003B4F"/>
+                </a:solidFill>
+                <a:latin typeface="Courier"/>
+              </a:rPr>
+              <a:t> </a:t>
+            </a:r>
+            <a:r>
+              <a:rPr>
+                <a:solidFill>
+                  <a:srgbClr val="5E5E5E"/>
+                </a:solidFill>
+                <a:latin typeface="Courier"/>
+              </a:rPr>
+              <a:t>~</a:t>
+            </a:r>
+            <a:r>
+              <a:rPr>
+                <a:solidFill>
+                  <a:srgbClr val="003B4F"/>
+                </a:solidFill>
+                <a:latin typeface="Courier"/>
+              </a:rPr>
+              <a:t>PC3,</a:t>
+            </a:r>
+            <a:br/>
+            <a:r>
+              <a:rPr>
+                <a:solidFill>
+                  <a:srgbClr val="003B4F"/>
+                </a:solidFill>
+                <a:latin typeface="Courier"/>
+              </a:rPr>
+              <a:t>        </a:t>
+            </a:r>
+            <a:r>
+              <a:rPr>
+                <a:solidFill>
+                  <a:srgbClr val="657422"/>
+                </a:solidFill>
+                <a:latin typeface="Courier"/>
+              </a:rPr>
+              <a:t>color =</a:t>
+            </a:r>
+            <a:r>
+              <a:rPr>
+                <a:solidFill>
+                  <a:srgbClr val="003B4F"/>
+                </a:solidFill>
+                <a:latin typeface="Courier"/>
+              </a:rPr>
+              <a:t> </a:t>
+            </a:r>
+            <a:r>
+              <a:rPr>
+                <a:solidFill>
+                  <a:srgbClr val="5E5E5E"/>
+                </a:solidFill>
+                <a:latin typeface="Courier"/>
+              </a:rPr>
+              <a:t>~</a:t>
+            </a:r>
+            <a:r>
+              <a:rPr>
+                <a:solidFill>
+                  <a:srgbClr val="003B4F"/>
+                </a:solidFill>
+                <a:latin typeface="Courier"/>
+              </a:rPr>
+              <a:t>site,</a:t>
+            </a:r>
+            <a:br/>
+            <a:r>
+              <a:rPr>
+                <a:solidFill>
+                  <a:srgbClr val="003B4F"/>
+                </a:solidFill>
+                <a:latin typeface="Courier"/>
+              </a:rPr>
+              <a:t>        </a:t>
+            </a:r>
+            <a:r>
+              <a:rPr>
+                <a:solidFill>
+                  <a:srgbClr val="657422"/>
+                </a:solidFill>
+                <a:latin typeface="Courier"/>
+              </a:rPr>
+              <a:t>type =</a:t>
+            </a:r>
+            <a:r>
+              <a:rPr>
+                <a:solidFill>
+                  <a:srgbClr val="003B4F"/>
+                </a:solidFill>
+                <a:latin typeface="Courier"/>
+              </a:rPr>
+              <a:t> </a:t>
+            </a:r>
+            <a:r>
+              <a:rPr>
+                <a:solidFill>
+                  <a:srgbClr val="20794D"/>
+                </a:solidFill>
+                <a:latin typeface="Courier"/>
+              </a:rPr>
+              <a:t>"scatter3d"</a:t>
+            </a:r>
+            <a:r>
+              <a:rPr>
+                <a:solidFill>
+                  <a:srgbClr val="003B4F"/>
+                </a:solidFill>
+                <a:latin typeface="Courier"/>
+              </a:rPr>
+              <a:t>,</a:t>
+            </a:r>
+            <a:br/>
+            <a:r>
+              <a:rPr>
+                <a:solidFill>
+                  <a:srgbClr val="003B4F"/>
+                </a:solidFill>
+                <a:latin typeface="Courier"/>
+              </a:rPr>
+              <a:t>        </a:t>
+            </a:r>
+            <a:r>
+              <a:rPr>
+                <a:solidFill>
+                  <a:srgbClr val="657422"/>
+                </a:solidFill>
+                <a:latin typeface="Courier"/>
+              </a:rPr>
+              <a:t>mode =</a:t>
+            </a:r>
+            <a:r>
+              <a:rPr>
+                <a:solidFill>
+                  <a:srgbClr val="003B4F"/>
+                </a:solidFill>
+                <a:latin typeface="Courier"/>
+              </a:rPr>
+              <a:t> </a:t>
+            </a:r>
+            <a:r>
+              <a:rPr>
+                <a:solidFill>
+                  <a:srgbClr val="20794D"/>
+                </a:solidFill>
+                <a:latin typeface="Courier"/>
+              </a:rPr>
+              <a:t>"markers"</a:t>
+            </a:r>
+            <a:r>
+              <a:rPr>
+                <a:solidFill>
+                  <a:srgbClr val="003B4F"/>
+                </a:solidFill>
+                <a:latin typeface="Courier"/>
+              </a:rPr>
+              <a:t>) </a:t>
+            </a:r>
+            <a:r>
+              <a:rPr>
+                <a:solidFill>
+                  <a:srgbClr val="5E5E5E"/>
+                </a:solidFill>
+                <a:latin typeface="Courier"/>
+              </a:rPr>
+              <a:t>%&gt;%</a:t>
+            </a:r>
+            <a:br/>
+            <a:r>
+              <a:rPr>
+                <a:solidFill>
+                  <a:srgbClr val="003B4F"/>
+                </a:solidFill>
+                <a:latin typeface="Courier"/>
+              </a:rPr>
+              <a:t>  </a:t>
+            </a:r>
+            <a:r>
+              <a:rPr>
+                <a:solidFill>
+                  <a:srgbClr val="4758AB"/>
+                </a:solidFill>
+                <a:latin typeface="Courier"/>
+              </a:rPr>
+              <a:t>layout</a:t>
+            </a:r>
+            <a:r>
+              <a:rPr>
+                <a:solidFill>
+                  <a:srgbClr val="003B4F"/>
+                </a:solidFill>
+                <a:latin typeface="Courier"/>
+              </a:rPr>
+              <a:t>(</a:t>
+            </a:r>
+            <a:r>
+              <a:rPr>
+                <a:solidFill>
+                  <a:srgbClr val="657422"/>
+                </a:solidFill>
+                <a:latin typeface="Courier"/>
+              </a:rPr>
+              <a:t>scene =</a:t>
+            </a:r>
+            <a:r>
+              <a:rPr>
+                <a:solidFill>
+                  <a:srgbClr val="003B4F"/>
+                </a:solidFill>
+                <a:latin typeface="Courier"/>
+              </a:rPr>
+              <a:t> </a:t>
+            </a:r>
+            <a:r>
+              <a:rPr>
+                <a:solidFill>
+                  <a:srgbClr val="4758AB"/>
+                </a:solidFill>
+                <a:latin typeface="Courier"/>
+              </a:rPr>
+              <a:t>list</a:t>
+            </a:r>
+            <a:r>
+              <a:rPr>
+                <a:solidFill>
+                  <a:srgbClr val="003B4F"/>
+                </a:solidFill>
+                <a:latin typeface="Courier"/>
+              </a:rPr>
+              <a:t>(</a:t>
+            </a:r>
+            <a:br/>
+            <a:r>
+              <a:rPr>
+                <a:solidFill>
+                  <a:srgbClr val="003B4F"/>
+                </a:solidFill>
+                <a:latin typeface="Courier"/>
+              </a:rPr>
+              <a:t>    </a:t>
+            </a:r>
+            <a:r>
+              <a:rPr>
+                <a:solidFill>
+                  <a:srgbClr val="657422"/>
+                </a:solidFill>
+                <a:latin typeface="Courier"/>
+              </a:rPr>
+              <a:t>xaxis =</a:t>
+            </a:r>
+            <a:r>
+              <a:rPr>
+                <a:solidFill>
+                  <a:srgbClr val="003B4F"/>
+                </a:solidFill>
+                <a:latin typeface="Courier"/>
+              </a:rPr>
+              <a:t> </a:t>
+            </a:r>
+            <a:r>
+              <a:rPr>
+                <a:solidFill>
+                  <a:srgbClr val="4758AB"/>
+                </a:solidFill>
+                <a:latin typeface="Courier"/>
+              </a:rPr>
+              <a:t>list</a:t>
+            </a:r>
+            <a:r>
+              <a:rPr>
+                <a:solidFill>
+                  <a:srgbClr val="003B4F"/>
+                </a:solidFill>
+                <a:latin typeface="Courier"/>
+              </a:rPr>
+              <a:t>(</a:t>
+            </a:r>
+            <a:r>
+              <a:rPr>
+                <a:solidFill>
+                  <a:srgbClr val="657422"/>
+                </a:solidFill>
+                <a:latin typeface="Courier"/>
+              </a:rPr>
+              <a:t>title =</a:t>
+            </a:r>
+            <a:r>
+              <a:rPr>
+                <a:solidFill>
+                  <a:srgbClr val="003B4F"/>
+                </a:solidFill>
+                <a:latin typeface="Courier"/>
+              </a:rPr>
+              <a:t> </a:t>
+            </a:r>
+            <a:r>
+              <a:rPr>
+                <a:solidFill>
+                  <a:srgbClr val="20794D"/>
+                </a:solidFill>
+                <a:latin typeface="Courier"/>
+              </a:rPr>
+              <a:t>"PC1"</a:t>
+            </a:r>
+            <a:r>
+              <a:rPr>
+                <a:solidFill>
+                  <a:srgbClr val="003B4F"/>
+                </a:solidFill>
+                <a:latin typeface="Courier"/>
+              </a:rPr>
+              <a:t>),</a:t>
+            </a:r>
+            <a:br/>
+            <a:r>
+              <a:rPr>
+                <a:solidFill>
+                  <a:srgbClr val="003B4F"/>
+                </a:solidFill>
+                <a:latin typeface="Courier"/>
+              </a:rPr>
+              <a:t>    </a:t>
+            </a:r>
+            <a:r>
+              <a:rPr>
+                <a:solidFill>
+                  <a:srgbClr val="657422"/>
+                </a:solidFill>
+                <a:latin typeface="Courier"/>
+              </a:rPr>
+              <a:t>yaxis =</a:t>
+            </a:r>
+            <a:r>
+              <a:rPr>
+                <a:solidFill>
+                  <a:srgbClr val="003B4F"/>
+                </a:solidFill>
+                <a:latin typeface="Courier"/>
+              </a:rPr>
+              <a:t> </a:t>
+            </a:r>
+            <a:r>
+              <a:rPr>
+                <a:solidFill>
+                  <a:srgbClr val="4758AB"/>
+                </a:solidFill>
+                <a:latin typeface="Courier"/>
+              </a:rPr>
+              <a:t>list</a:t>
+            </a:r>
+            <a:r>
+              <a:rPr>
+                <a:solidFill>
+                  <a:srgbClr val="003B4F"/>
+                </a:solidFill>
+                <a:latin typeface="Courier"/>
+              </a:rPr>
+              <a:t>(</a:t>
+            </a:r>
+            <a:r>
+              <a:rPr>
+                <a:solidFill>
+                  <a:srgbClr val="657422"/>
+                </a:solidFill>
+                <a:latin typeface="Courier"/>
+              </a:rPr>
+              <a:t>title =</a:t>
+            </a:r>
+            <a:r>
+              <a:rPr>
+                <a:solidFill>
+                  <a:srgbClr val="003B4F"/>
+                </a:solidFill>
+                <a:latin typeface="Courier"/>
+              </a:rPr>
+              <a:t> </a:t>
+            </a:r>
+            <a:r>
+              <a:rPr>
+                <a:solidFill>
+                  <a:srgbClr val="20794D"/>
+                </a:solidFill>
+                <a:latin typeface="Courier"/>
+              </a:rPr>
+              <a:t>"PC2"</a:t>
+            </a:r>
+            <a:r>
+              <a:rPr>
+                <a:solidFill>
+                  <a:srgbClr val="003B4F"/>
+                </a:solidFill>
+                <a:latin typeface="Courier"/>
+              </a:rPr>
+              <a:t>),</a:t>
+            </a:r>
+            <a:br/>
+            <a:r>
+              <a:rPr>
+                <a:solidFill>
+                  <a:srgbClr val="003B4F"/>
+                </a:solidFill>
+                <a:latin typeface="Courier"/>
+              </a:rPr>
+              <a:t>    </a:t>
+            </a:r>
+            <a:r>
+              <a:rPr>
+                <a:solidFill>
+                  <a:srgbClr val="657422"/>
+                </a:solidFill>
+                <a:latin typeface="Courier"/>
+              </a:rPr>
+              <a:t>zaxis =</a:t>
+            </a:r>
+            <a:r>
+              <a:rPr>
+                <a:solidFill>
+                  <a:srgbClr val="003B4F"/>
+                </a:solidFill>
+                <a:latin typeface="Courier"/>
+              </a:rPr>
+              <a:t> </a:t>
+            </a:r>
+            <a:r>
+              <a:rPr>
+                <a:solidFill>
+                  <a:srgbClr val="4758AB"/>
+                </a:solidFill>
+                <a:latin typeface="Courier"/>
+              </a:rPr>
+              <a:t>list</a:t>
+            </a:r>
+            <a:r>
+              <a:rPr>
+                <a:solidFill>
+                  <a:srgbClr val="003B4F"/>
+                </a:solidFill>
+                <a:latin typeface="Courier"/>
+              </a:rPr>
+              <a:t>(</a:t>
+            </a:r>
+            <a:r>
+              <a:rPr>
+                <a:solidFill>
+                  <a:srgbClr val="657422"/>
+                </a:solidFill>
+                <a:latin typeface="Courier"/>
+              </a:rPr>
+              <a:t>title =</a:t>
+            </a:r>
+            <a:r>
+              <a:rPr>
+                <a:solidFill>
+                  <a:srgbClr val="003B4F"/>
+                </a:solidFill>
+                <a:latin typeface="Courier"/>
+              </a:rPr>
+              <a:t> </a:t>
+            </a:r>
+            <a:r>
+              <a:rPr>
+                <a:solidFill>
+                  <a:srgbClr val="20794D"/>
+                </a:solidFill>
+                <a:latin typeface="Courier"/>
+              </a:rPr>
+              <a:t>"PC3"</a:t>
+            </a:r>
+            <a:r>
+              <a:rPr>
+                <a:solidFill>
+                  <a:srgbClr val="003B4F"/>
+                </a:solidFill>
+                <a:latin typeface="Courier"/>
+              </a:rPr>
+              <a:t>)</a:t>
+            </a:r>
+            <a:br/>
+            <a:r>
+              <a:rPr>
+                <a:solidFill>
+                  <a:srgbClr val="003B4F"/>
+                </a:solidFill>
+                <a:latin typeface="Courier"/>
+              </a:rPr>
+              <a:t>  ))</a:t>
+            </a:r>
+          </a:p>
+          <a:p>
+            <a:pPr lvl="0" indent="0" marL="0">
+              <a:buNone/>
+            </a:pPr>
+            <a:r>
+              <a:rPr/>
+              <a:t>✏️ </a:t>
+            </a:r>
+            <a:r>
+              <a:rPr b="1"/>
+              <a:t>Your turn:</a:t>
+            </a:r>
+            <a:r>
+              <a:rPr/>
+              <a:t> Looking at the scores plot, do the sites appear to separate from each other, or do they overlap heavily? </a:t>
+            </a:r>
+            <a:r>
+              <a:rPr>
+                <a:latin typeface="Courier"/>
+              </a:rPr>
+              <a:t>________________________</a:t>
             </a:r>
           </a:p>
         </p:txBody>
       </p:sp>
-      <p:pic>
-        <p:nvPicPr>
-          <p:cNvPr descr="multivariate_statistics_activity_files/figure-pptx/unnamed-chunk-15-1.png" id="0" name="Picture 1"/>
-          <p:cNvPicPr>
-            <a:picLocks noGrp="1" noChangeAspect="1"/>
-          </p:cNvPicPr>
-          <p:nvPr/>
-        </p:nvPicPr>
-        <p:blipFill>
-          <a:blip r:embed="rId2"/>
-          <a:stretch>
-            <a:fillRect/>
-          </a:stretch>
-        </p:blipFill>
-        <p:spPr bwMode="auto">
-          <a:xfrm>
-            <a:off x="3657600" y="1244600"/>
-            <a:ext cx="5232400" cy="3225800"/>
-          </a:xfrm>
-          <a:prstGeom prst="rect">
-            <a:avLst/>
-          </a:prstGeom>
-          <a:noFill/>
-          <a:ln w="9525">
-            <a:noFill/>
-            <a:headEnd/>
-            <a:tailEnd/>
-          </a:ln>
-        </p:spPr>
-      </p:pic>
     </p:spTree>
   </p:cSld>
 </p:sld>
@@ -4133,36 +11700,733 @@
           <a:chExt cx="0" cy="0"/>
         </a:xfrm>
       </p:grpSpPr>
-      <p:pic>
-        <p:nvPicPr>
-          <p:cNvPr descr="multivariate_statistics_activity_files/figure-pptx/unnamed-chunk-16-1.png" id="0" name="Picture 1"/>
-          <p:cNvPicPr>
-            <a:picLocks noGrp="1" noChangeAspect="1"/>
-          </p:cNvPicPr>
-          <p:nvPr/>
-        </p:nvPicPr>
-        <p:blipFill>
-          <a:blip r:embed="rId2"/>
-          <a:stretch>
-            <a:fillRect/>
-          </a:stretch>
-        </p:blipFill>
-        <p:spPr bwMode="auto">
+      <p:sp>
+        <p:nvSpPr>
+          <p:cNvPr id="2" name="Title 1"/>
+          <p:cNvSpPr>
+            <a:spLocks noGrp="1"/>
+          </p:cNvSpPr>
+          <p:nvPr>
+            <p:ph type="title"/>
+          </p:nvPr>
+        </p:nvSpPr>
+        <p:spPr>
           <a:xfrm>
-            <a:off x="1358900" y="609600"/>
-            <a:ext cx="6350000" cy="3911600"/>
+            <a:off x="0" y="0"/>
+            <a:ext cx="9144000" cy="582780"/>
           </a:xfrm>
-          <a:prstGeom prst="rect">
-            <a:avLst/>
-          </a:prstGeom>
-          <a:noFill/>
-          <a:ln w="9525">
-            <a:noFill/>
-            <a:headEnd/>
-            <a:tailEnd/>
-          </a:ln>
         </p:spPr>
-      </p:pic>
+        <p:txBody>
+          <a:bodyPr/>
+          <a:lstStyle/>
+          <a:p>
+            <a:pPr lvl="0" indent="0" marL="0">
+              <a:buNone/>
+            </a:pPr>
+            <a:r>
+              <a:rPr/>
+              <a:t>Part 7 · Distances Between Sites</a:t>
+            </a:r>
+          </a:p>
+        </p:txBody>
+      </p:sp>
+      <p:sp>
+        <p:nvSpPr>
+          <p:cNvPr id="3" name="Content Placeholder 2"/>
+          <p:cNvSpPr>
+            <a:spLocks noGrp="1"/>
+          </p:cNvSpPr>
+          <p:nvPr>
+            <p:ph idx="1"/>
+          </p:nvPr>
+        </p:nvSpPr>
+        <p:spPr/>
+        <p:txBody>
+          <a:bodyPr/>
+          <a:lstStyle/>
+          <a:p>
+            <a:pPr lvl="0" indent="0" marL="0">
+              <a:buNone/>
+            </a:pPr>
+            <a:r>
+              <a:rPr b="1"/>
+              <a:t>▶ Run this</a:t>
+            </a:r>
+            <a:r>
+              <a:rPr/>
+              <a:t> — calculate site centroids (mean PC scores) and the Euclidean distance between them:</a:t>
+            </a:r>
+          </a:p>
+          <a:p>
+            <a:pPr lvl="0" indent="0">
+              <a:buNone/>
+            </a:pPr>
+            <a:r>
+              <a:rPr>
+                <a:solidFill>
+                  <a:srgbClr val="003B4F"/>
+                </a:solidFill>
+                <a:latin typeface="Courier"/>
+              </a:rPr>
+              <a:t>pc_scores_for_dist &lt;- </a:t>
+            </a:r>
+            <a:r>
+              <a:rPr>
+                <a:solidFill>
+                  <a:srgbClr val="4758AB"/>
+                </a:solidFill>
+                <a:latin typeface="Courier"/>
+              </a:rPr>
+              <a:t>as.data.frame</a:t>
+            </a:r>
+            <a:r>
+              <a:rPr>
+                <a:solidFill>
+                  <a:srgbClr val="003B4F"/>
+                </a:solidFill>
+                <a:latin typeface="Courier"/>
+              </a:rPr>
+              <a:t>(pca_result</a:t>
+            </a:r>
+            <a:r>
+              <a:rPr>
+                <a:solidFill>
+                  <a:srgbClr val="5E5E5E"/>
+                </a:solidFill>
+                <a:latin typeface="Courier"/>
+              </a:rPr>
+              <a:t>$</a:t>
+            </a:r>
+            <a:r>
+              <a:rPr>
+                <a:solidFill>
+                  <a:srgbClr val="003B4F"/>
+                </a:solidFill>
+                <a:latin typeface="Courier"/>
+              </a:rPr>
+              <a:t>x) </a:t>
+            </a:r>
+            <a:r>
+              <a:rPr>
+                <a:solidFill>
+                  <a:srgbClr val="5E5E5E"/>
+                </a:solidFill>
+                <a:latin typeface="Courier"/>
+              </a:rPr>
+              <a:t>%&gt;%</a:t>
+            </a:r>
+            <a:br/>
+            <a:r>
+              <a:rPr>
+                <a:solidFill>
+                  <a:srgbClr val="003B4F"/>
+                </a:solidFill>
+                <a:latin typeface="Courier"/>
+              </a:rPr>
+              <a:t>  </a:t>
+            </a:r>
+            <a:r>
+              <a:rPr>
+                <a:solidFill>
+                  <a:srgbClr val="4758AB"/>
+                </a:solidFill>
+                <a:latin typeface="Courier"/>
+              </a:rPr>
+              <a:t>mutate</a:t>
+            </a:r>
+            <a:r>
+              <a:rPr>
+                <a:solidFill>
+                  <a:srgbClr val="003B4F"/>
+                </a:solidFill>
+                <a:latin typeface="Courier"/>
+              </a:rPr>
+              <a:t>(</a:t>
+            </a:r>
+            <a:r>
+              <a:rPr>
+                <a:solidFill>
+                  <a:srgbClr val="657422"/>
+                </a:solidFill>
+                <a:latin typeface="Courier"/>
+              </a:rPr>
+              <a:t>site =</a:t>
+            </a:r>
+            <a:r>
+              <a:rPr>
+                <a:solidFill>
+                  <a:srgbClr val="003B4F"/>
+                </a:solidFill>
+                <a:latin typeface="Courier"/>
+              </a:rPr>
+              <a:t> darlingtonia</a:t>
+            </a:r>
+            <a:r>
+              <a:rPr>
+                <a:solidFill>
+                  <a:srgbClr val="5E5E5E"/>
+                </a:solidFill>
+                <a:latin typeface="Courier"/>
+              </a:rPr>
+              <a:t>$</a:t>
+            </a:r>
+            <a:r>
+              <a:rPr>
+                <a:solidFill>
+                  <a:srgbClr val="003B4F"/>
+                </a:solidFill>
+                <a:latin typeface="Courier"/>
+              </a:rPr>
+              <a:t>site)</a:t>
+            </a:r>
+            <a:br/>
+            <a:br/>
+            <a:r>
+              <a:rPr>
+                <a:solidFill>
+                  <a:srgbClr val="003B4F"/>
+                </a:solidFill>
+                <a:latin typeface="Courier"/>
+              </a:rPr>
+              <a:t>site_centroids &lt;- pc_scores_for_dist </a:t>
+            </a:r>
+            <a:r>
+              <a:rPr>
+                <a:solidFill>
+                  <a:srgbClr val="5E5E5E"/>
+                </a:solidFill>
+                <a:latin typeface="Courier"/>
+              </a:rPr>
+              <a:t>%&gt;%</a:t>
+            </a:r>
+            <a:br/>
+            <a:r>
+              <a:rPr>
+                <a:solidFill>
+                  <a:srgbClr val="003B4F"/>
+                </a:solidFill>
+                <a:latin typeface="Courier"/>
+              </a:rPr>
+              <a:t>  </a:t>
+            </a:r>
+            <a:r>
+              <a:rPr>
+                <a:solidFill>
+                  <a:srgbClr val="4758AB"/>
+                </a:solidFill>
+                <a:latin typeface="Courier"/>
+              </a:rPr>
+              <a:t>group_by</a:t>
+            </a:r>
+            <a:r>
+              <a:rPr>
+                <a:solidFill>
+                  <a:srgbClr val="003B4F"/>
+                </a:solidFill>
+                <a:latin typeface="Courier"/>
+              </a:rPr>
+              <a:t>(site) </a:t>
+            </a:r>
+            <a:r>
+              <a:rPr>
+                <a:solidFill>
+                  <a:srgbClr val="5E5E5E"/>
+                </a:solidFill>
+                <a:latin typeface="Courier"/>
+              </a:rPr>
+              <a:t>%&gt;%</a:t>
+            </a:r>
+            <a:br/>
+            <a:r>
+              <a:rPr>
+                <a:solidFill>
+                  <a:srgbClr val="003B4F"/>
+                </a:solidFill>
+                <a:latin typeface="Courier"/>
+              </a:rPr>
+              <a:t>  </a:t>
+            </a:r>
+            <a:r>
+              <a:rPr>
+                <a:solidFill>
+                  <a:srgbClr val="4758AB"/>
+                </a:solidFill>
+                <a:latin typeface="Courier"/>
+              </a:rPr>
+              <a:t>summarise</a:t>
+            </a:r>
+            <a:r>
+              <a:rPr>
+                <a:solidFill>
+                  <a:srgbClr val="003B4F"/>
+                </a:solidFill>
+                <a:latin typeface="Courier"/>
+              </a:rPr>
+              <a:t>(</a:t>
+            </a:r>
+            <a:r>
+              <a:rPr>
+                <a:solidFill>
+                  <a:srgbClr val="4758AB"/>
+                </a:solidFill>
+                <a:latin typeface="Courier"/>
+              </a:rPr>
+              <a:t>across</a:t>
+            </a:r>
+            <a:r>
+              <a:rPr>
+                <a:solidFill>
+                  <a:srgbClr val="003B4F"/>
+                </a:solidFill>
+                <a:latin typeface="Courier"/>
+              </a:rPr>
+              <a:t>(</a:t>
+            </a:r>
+            <a:r>
+              <a:rPr>
+                <a:solidFill>
+                  <a:srgbClr val="4758AB"/>
+                </a:solidFill>
+                <a:latin typeface="Courier"/>
+              </a:rPr>
+              <a:t>starts_with</a:t>
+            </a:r>
+            <a:r>
+              <a:rPr>
+                <a:solidFill>
+                  <a:srgbClr val="003B4F"/>
+                </a:solidFill>
+                <a:latin typeface="Courier"/>
+              </a:rPr>
+              <a:t>(</a:t>
+            </a:r>
+            <a:r>
+              <a:rPr>
+                <a:solidFill>
+                  <a:srgbClr val="20794D"/>
+                </a:solidFill>
+                <a:latin typeface="Courier"/>
+              </a:rPr>
+              <a:t>"PC"</a:t>
+            </a:r>
+            <a:r>
+              <a:rPr>
+                <a:solidFill>
+                  <a:srgbClr val="003B4F"/>
+                </a:solidFill>
+                <a:latin typeface="Courier"/>
+              </a:rPr>
+              <a:t>), mean)) </a:t>
+            </a:r>
+            <a:r>
+              <a:rPr>
+                <a:solidFill>
+                  <a:srgbClr val="5E5E5E"/>
+                </a:solidFill>
+                <a:latin typeface="Courier"/>
+              </a:rPr>
+              <a:t>%&gt;%</a:t>
+            </a:r>
+            <a:br/>
+            <a:r>
+              <a:rPr>
+                <a:solidFill>
+                  <a:srgbClr val="003B4F"/>
+                </a:solidFill>
+                <a:latin typeface="Courier"/>
+              </a:rPr>
+              <a:t>  </a:t>
+            </a:r>
+            <a:r>
+              <a:rPr>
+                <a:solidFill>
+                  <a:srgbClr val="4758AB"/>
+                </a:solidFill>
+                <a:latin typeface="Courier"/>
+              </a:rPr>
+              <a:t>ungroup</a:t>
+            </a:r>
+            <a:r>
+              <a:rPr>
+                <a:solidFill>
+                  <a:srgbClr val="003B4F"/>
+                </a:solidFill>
+                <a:latin typeface="Courier"/>
+              </a:rPr>
+              <a:t>()</a:t>
+            </a:r>
+            <a:br/>
+            <a:br/>
+            <a:r>
+              <a:rPr>
+                <a:solidFill>
+                  <a:srgbClr val="003B4F"/>
+                </a:solidFill>
+                <a:latin typeface="Courier"/>
+              </a:rPr>
+              <a:t>site_centroids_matrix &lt;- site_centroids </a:t>
+            </a:r>
+            <a:r>
+              <a:rPr>
+                <a:solidFill>
+                  <a:srgbClr val="5E5E5E"/>
+                </a:solidFill>
+                <a:latin typeface="Courier"/>
+              </a:rPr>
+              <a:t>%&gt;%</a:t>
+            </a:r>
+            <a:br/>
+            <a:r>
+              <a:rPr>
+                <a:solidFill>
+                  <a:srgbClr val="003B4F"/>
+                </a:solidFill>
+                <a:latin typeface="Courier"/>
+              </a:rPr>
+              <a:t>  </a:t>
+            </a:r>
+            <a:r>
+              <a:rPr>
+                <a:solidFill>
+                  <a:srgbClr val="4758AB"/>
+                </a:solidFill>
+                <a:latin typeface="Courier"/>
+              </a:rPr>
+              <a:t>column_to_rownames</a:t>
+            </a:r>
+            <a:r>
+              <a:rPr>
+                <a:solidFill>
+                  <a:srgbClr val="003B4F"/>
+                </a:solidFill>
+                <a:latin typeface="Courier"/>
+              </a:rPr>
+              <a:t>(</a:t>
+            </a:r>
+            <a:r>
+              <a:rPr>
+                <a:solidFill>
+                  <a:srgbClr val="20794D"/>
+                </a:solidFill>
+                <a:latin typeface="Courier"/>
+              </a:rPr>
+              <a:t>"site"</a:t>
+            </a:r>
+            <a:r>
+              <a:rPr>
+                <a:solidFill>
+                  <a:srgbClr val="003B4F"/>
+                </a:solidFill>
+                <a:latin typeface="Courier"/>
+              </a:rPr>
+              <a:t>)</a:t>
+            </a:r>
+            <a:br/>
+            <a:br/>
+            <a:r>
+              <a:rPr>
+                <a:solidFill>
+                  <a:srgbClr val="003B4F"/>
+                </a:solidFill>
+                <a:latin typeface="Courier"/>
+              </a:rPr>
+              <a:t>dist_matrix &lt;- </a:t>
+            </a:r>
+            <a:r>
+              <a:rPr>
+                <a:solidFill>
+                  <a:srgbClr val="4758AB"/>
+                </a:solidFill>
+                <a:latin typeface="Courier"/>
+              </a:rPr>
+              <a:t>dist</a:t>
+            </a:r>
+            <a:r>
+              <a:rPr>
+                <a:solidFill>
+                  <a:srgbClr val="003B4F"/>
+                </a:solidFill>
+                <a:latin typeface="Courier"/>
+              </a:rPr>
+              <a:t>(site_centroids_matrix, </a:t>
+            </a:r>
+            <a:r>
+              <a:rPr>
+                <a:solidFill>
+                  <a:srgbClr val="657422"/>
+                </a:solidFill>
+                <a:latin typeface="Courier"/>
+              </a:rPr>
+              <a:t>method =</a:t>
+            </a:r>
+            <a:r>
+              <a:rPr>
+                <a:solidFill>
+                  <a:srgbClr val="003B4F"/>
+                </a:solidFill>
+                <a:latin typeface="Courier"/>
+              </a:rPr>
+              <a:t> </a:t>
+            </a:r>
+            <a:r>
+              <a:rPr>
+                <a:solidFill>
+                  <a:srgbClr val="20794D"/>
+                </a:solidFill>
+                <a:latin typeface="Courier"/>
+              </a:rPr>
+              <a:t>"euclidean"</a:t>
+            </a:r>
+            <a:r>
+              <a:rPr>
+                <a:solidFill>
+                  <a:srgbClr val="003B4F"/>
+                </a:solidFill>
+                <a:latin typeface="Courier"/>
+              </a:rPr>
+              <a:t>)</a:t>
+            </a:r>
+            <a:br/>
+            <a:br/>
+            <a:r>
+              <a:rPr>
+                <a:solidFill>
+                  <a:srgbClr val="003B4F"/>
+                </a:solidFill>
+                <a:latin typeface="Courier"/>
+              </a:rPr>
+              <a:t>dist_matrix</a:t>
+            </a:r>
+            <a:br/>
+            <a:br/>
+            <a:r>
+              <a:rPr>
+                <a:solidFill>
+                  <a:srgbClr val="4758AB"/>
+                </a:solidFill>
+                <a:latin typeface="Courier"/>
+              </a:rPr>
+              <a:t>fviz_dist</a:t>
+            </a:r>
+            <a:r>
+              <a:rPr>
+                <a:solidFill>
+                  <a:srgbClr val="003B4F"/>
+                </a:solidFill>
+                <a:latin typeface="Courier"/>
+              </a:rPr>
+              <a:t>(dist_matrix,</a:t>
+            </a:r>
+            <a:br/>
+            <a:r>
+              <a:rPr>
+                <a:solidFill>
+                  <a:srgbClr val="003B4F"/>
+                </a:solidFill>
+                <a:latin typeface="Courier"/>
+              </a:rPr>
+              <a:t>          </a:t>
+            </a:r>
+            <a:r>
+              <a:rPr>
+                <a:solidFill>
+                  <a:srgbClr val="657422"/>
+                </a:solidFill>
+                <a:latin typeface="Courier"/>
+              </a:rPr>
+              <a:t>gradient =</a:t>
+            </a:r>
+            <a:r>
+              <a:rPr>
+                <a:solidFill>
+                  <a:srgbClr val="003B4F"/>
+                </a:solidFill>
+                <a:latin typeface="Courier"/>
+              </a:rPr>
+              <a:t> </a:t>
+            </a:r>
+            <a:r>
+              <a:rPr>
+                <a:solidFill>
+                  <a:srgbClr val="4758AB"/>
+                </a:solidFill>
+                <a:latin typeface="Courier"/>
+              </a:rPr>
+              <a:t>list</a:t>
+            </a:r>
+            <a:r>
+              <a:rPr>
+                <a:solidFill>
+                  <a:srgbClr val="003B4F"/>
+                </a:solidFill>
+                <a:latin typeface="Courier"/>
+              </a:rPr>
+              <a:t>(</a:t>
+            </a:r>
+            <a:r>
+              <a:rPr>
+                <a:solidFill>
+                  <a:srgbClr val="657422"/>
+                </a:solidFill>
+                <a:latin typeface="Courier"/>
+              </a:rPr>
+              <a:t>low =</a:t>
+            </a:r>
+            <a:r>
+              <a:rPr>
+                <a:solidFill>
+                  <a:srgbClr val="003B4F"/>
+                </a:solidFill>
+                <a:latin typeface="Courier"/>
+              </a:rPr>
+              <a:t> </a:t>
+            </a:r>
+            <a:r>
+              <a:rPr>
+                <a:solidFill>
+                  <a:srgbClr val="20794D"/>
+                </a:solidFill>
+                <a:latin typeface="Courier"/>
+              </a:rPr>
+              <a:t>"#00AFBB"</a:t>
+            </a:r>
+            <a:r>
+              <a:rPr>
+                <a:solidFill>
+                  <a:srgbClr val="003B4F"/>
+                </a:solidFill>
+                <a:latin typeface="Courier"/>
+              </a:rPr>
+              <a:t>, </a:t>
+            </a:r>
+            <a:r>
+              <a:rPr>
+                <a:solidFill>
+                  <a:srgbClr val="657422"/>
+                </a:solidFill>
+                <a:latin typeface="Courier"/>
+              </a:rPr>
+              <a:t>high =</a:t>
+            </a:r>
+            <a:r>
+              <a:rPr>
+                <a:solidFill>
+                  <a:srgbClr val="003B4F"/>
+                </a:solidFill>
+                <a:latin typeface="Courier"/>
+              </a:rPr>
+              <a:t> </a:t>
+            </a:r>
+            <a:r>
+              <a:rPr>
+                <a:solidFill>
+                  <a:srgbClr val="20794D"/>
+                </a:solidFill>
+                <a:latin typeface="Courier"/>
+              </a:rPr>
+              <a:t>"#FC4E07"</a:t>
+            </a:r>
+            <a:r>
+              <a:rPr>
+                <a:solidFill>
+                  <a:srgbClr val="003B4F"/>
+                </a:solidFill>
+                <a:latin typeface="Courier"/>
+              </a:rPr>
+              <a:t>))</a:t>
+            </a:r>
+          </a:p>
+          <a:p>
+            <a:pPr lvl="0" indent="0" marL="0">
+              <a:buNone/>
+            </a:pPr>
+            <a:r>
+              <a:rPr/>
+              <a:t>✏️ </a:t>
+            </a:r>
+            <a:r>
+              <a:rPr b="1"/>
+              <a:t>Your turn:</a:t>
+            </a:r>
+            <a:r>
+              <a:rPr/>
+              <a:t> Which two sites are the most different from each other (largest centroid distance)? Which two are the most similar? </a:t>
+            </a:r>
+            <a:r>
+              <a:rPr>
+                <a:latin typeface="Courier"/>
+              </a:rPr>
+              <a:t>________________________</a:t>
+            </a:r>
+          </a:p>
+          <a:p>
+            <a:pPr lvl="0" indent="0" marL="1270000">
+              <a:buNone/>
+            </a:pPr>
+            <a:r>
+              <a:rPr sz="2000" b="1"/>
+              <a:t>Tip</a:t>
+            </a:r>
+          </a:p>
+          <a:p>
+            <a:pPr lvl="0" indent="0" marL="1270000">
+              <a:buNone/>
+            </a:pPr>
+            <a:r>
+              <a:rPr sz="2000" b="1"/>
+              <a:t>🚀 If you finish early:</a:t>
+            </a:r>
+            <a:r>
+              <a:rPr sz="2000"/>
+              <a:t> Run a quick one-way ANOVA testing whether </a:t>
+            </a:r>
+            <a:r>
+              <a:rPr sz="2000">
+                <a:latin typeface="Courier"/>
+              </a:rPr>
+              <a:t>PC1</a:t>
+            </a:r>
+            <a:r>
+              <a:rPr sz="2000"/>
+              <a:t> differs by </a:t>
+            </a:r>
+            <a:r>
+              <a:rPr sz="2000">
+                <a:latin typeface="Courier"/>
+              </a:rPr>
+              <a:t>site</a:t>
+            </a:r>
+            <a:r>
+              <a:rPr sz="2000"/>
+              <a:t> (</a:t>
+            </a:r>
+            <a:r>
+              <a:rPr sz="2000">
+                <a:latin typeface="Courier"/>
+              </a:rPr>
+              <a:t>aov(PC1 ~ site, data = pc_scores)</a:t>
+            </a:r>
+            <a:r>
+              <a:rPr sz="2000"/>
+              <a:t>), just like we did in lecture. Is the site effect significant?</a:t>
+            </a:r>
+          </a:p>
+          <a:p>
+            <a:pPr lvl="0" indent="0">
+              <a:buNone/>
+            </a:pPr>
+            <a:r>
+              <a:rPr>
+                <a:solidFill>
+                  <a:srgbClr val="5E5E5E"/>
+                </a:solidFill>
+                <a:latin typeface="Courier"/>
+              </a:rPr>
+              <a:t># Write your code here:</a:t>
+            </a:r>
+          </a:p>
+        </p:txBody>
+      </p:sp>
     </p:spTree>
   </p:cSld>
 </p:sld>

--- a/docs/content/multivariate_statistics/multivariate_statistics_activity.pptx
+++ b/docs/content/multivariate_statistics/multivariate_statistics_activity.pptx
@@ -8617,7 +8617,7 @@
                 </a:solidFill>
                 <a:latin typeface="Courier"/>
               </a:rPr>
-              <a:t>"steelblue"</a:t>
+              <a:t>"darkblue"</a:t>
             </a:r>
             <a:r>
               <a:rPr>
@@ -9688,7 +9688,7 @@
                 </a:solidFill>
                 <a:latin typeface="Courier"/>
               </a:rPr>
-              <a:t>"steelblue"</a:t>
+              <a:t>"darkblue"</a:t>
             </a:r>
             <a:r>
               <a:rPr>
